--- a/samples/2026-08-18_abcmart/figures.pptx
+++ b/samples/2026-08-18_abcmart/figures.pptx
@@ -254,7 +254,7 @@
             <c:numRef>
               <c:f>Sheet1!$B$2:$B$4</c:f>
               <c:numCache>
-                <c:formatCode>General</c:formatCode>
+                <c:formatCode>0</c:formatCode>
                 <c:ptCount val="3"/>
                 <c:pt idx="0">
                   <c:v>32</c:v>
@@ -495,7 +495,7 @@
             <c:numRef>
               <c:f>Sheet1!$B$2:$B$6</c:f>
               <c:numCache>
-                <c:formatCode>General</c:formatCode>
+                <c:formatCode>0</c:formatCode>
                 <c:ptCount val="5"/>
                 <c:pt idx="0">
                   <c:v>2</c:v>
@@ -504,7 +504,7 @@
                   <c:v>7</c:v>
                 </c:pt>
                 <c:pt idx="2">
-                  <c:v>5</c:v>
+                  <c:v>4</c:v>
                 </c:pt>
                 <c:pt idx="3">
                   <c:v>63</c:v>
@@ -2978,6 +2978,30 @@
           </a:p>
         </p:txBody>
       </p:sp>
+      <p:sp>
+        <p:nvSpPr>
+          <p:cNvPr id="6" name="Slide Number Placeholder 5"/>
+          <p:cNvSpPr>
+            <a:spLocks noGrp="1"/>
+          </p:cNvSpPr>
+          <p:nvPr>
+            <p:ph type="sldNum" sz="quarter" idx="12"/>
+          </p:nvPr>
+        </p:nvSpPr>
+        <p:spPr/>
+        <p:txBody>
+          <a:bodyPr/>
+          <a:lstStyle/>
+          <a:p>
+            <a:fld id="{96E69268-9C8B-4EBF-A9EE-DC5DC2D48DC3}" type="slidenum">
+              <a:rPr lang="en-US" smtClean="0"/>
+              <a:pPr/>
+              <a:t>‹#›</a:t>
+            </a:fld>
+            <a:endParaRPr lang="en-US"/>
+          </a:p>
+        </p:txBody>
+      </p:sp>
     </p:spTree>
     <p:extLst>
       <p:ext uri="{BB962C8B-B14F-4D97-AF65-F5344CB8AC3E}">
@@ -3120,6 +3144,30 @@
           </a:p>
         </p:txBody>
       </p:sp>
+      <p:sp>
+        <p:nvSpPr>
+          <p:cNvPr id="5" name="Slide Number Placeholder 4"/>
+          <p:cNvSpPr>
+            <a:spLocks noGrp="1"/>
+          </p:cNvSpPr>
+          <p:nvPr>
+            <p:ph type="sldNum" sz="quarter" idx="12"/>
+          </p:nvPr>
+        </p:nvSpPr>
+        <p:spPr/>
+        <p:txBody>
+          <a:bodyPr/>
+          <a:lstStyle/>
+          <a:p>
+            <a:fld id="{96E69268-9C8B-4EBF-A9EE-DC5DC2D48DC3}" type="slidenum">
+              <a:rPr lang="en-US" smtClean="0"/>
+              <a:pPr/>
+              <a:t>‹#›</a:t>
+            </a:fld>
+            <a:endParaRPr lang="en-US"/>
+          </a:p>
+        </p:txBody>
+      </p:sp>
     </p:spTree>
     <p:extLst>
       <p:ext uri="{BB962C8B-B14F-4D97-AF65-F5344CB8AC3E}">
@@ -3358,6 +3406,30 @@
           </a:p>
         </p:txBody>
       </p:sp>
+      <p:sp>
+        <p:nvSpPr>
+          <p:cNvPr id="6" name="Slide Number Placeholder 5"/>
+          <p:cNvSpPr>
+            <a:spLocks noGrp="1"/>
+          </p:cNvSpPr>
+          <p:nvPr>
+            <p:ph type="sldNum" sz="quarter" idx="12"/>
+          </p:nvPr>
+        </p:nvSpPr>
+        <p:spPr/>
+        <p:txBody>
+          <a:bodyPr/>
+          <a:lstStyle/>
+          <a:p>
+            <a:fld id="{E5EDE275-BE14-4364-AEA2-5F5667C0FD49}" type="slidenum">
+              <a:rPr lang="en-US" smtClean="0"/>
+              <a:pPr/>
+              <a:t>‹#›</a:t>
+            </a:fld>
+            <a:endParaRPr lang="en-US"/>
+          </a:p>
+        </p:txBody>
+      </p:sp>
     </p:spTree>
     <p:extLst>
       <p:ext uri="{BB962C8B-B14F-4D97-AF65-F5344CB8AC3E}">
@@ -3576,6 +3648,30 @@
           </a:p>
         </p:txBody>
       </p:sp>
+      <p:sp>
+        <p:nvSpPr>
+          <p:cNvPr id="6" name="Slide Number Placeholder 5"/>
+          <p:cNvSpPr>
+            <a:spLocks noGrp="1"/>
+          </p:cNvSpPr>
+          <p:nvPr>
+            <p:ph type="sldNum" sz="quarter" idx="12"/>
+          </p:nvPr>
+        </p:nvSpPr>
+        <p:spPr/>
+        <p:txBody>
+          <a:bodyPr/>
+          <a:lstStyle/>
+          <a:p>
+            <a:fld id="{96E69268-9C8B-4EBF-A9EE-DC5DC2D48DC3}" type="slidenum">
+              <a:rPr lang="en-US" smtClean="0"/>
+              <a:pPr/>
+              <a:t>‹#›</a:t>
+            </a:fld>
+            <a:endParaRPr lang="en-US"/>
+          </a:p>
+        </p:txBody>
+      </p:sp>
     </p:spTree>
     <p:extLst>
       <p:ext uri="{BB962C8B-B14F-4D97-AF65-F5344CB8AC3E}">
@@ -3722,6 +3818,30 @@
           </a:p>
         </p:txBody>
       </p:sp>
+      <p:sp>
+        <p:nvSpPr>
+          <p:cNvPr id="6" name="Slide Number Placeholder 5"/>
+          <p:cNvSpPr>
+            <a:spLocks noGrp="1"/>
+          </p:cNvSpPr>
+          <p:nvPr>
+            <p:ph type="sldNum" sz="quarter" idx="12"/>
+          </p:nvPr>
+        </p:nvSpPr>
+        <p:spPr/>
+        <p:txBody>
+          <a:bodyPr/>
+          <a:lstStyle/>
+          <a:p>
+            <a:fld id="{96E69268-9C8B-4EBF-A9EE-DC5DC2D48DC3}" type="slidenum">
+              <a:rPr lang="en-US" smtClean="0"/>
+              <a:pPr/>
+              <a:t>‹#›</a:t>
+            </a:fld>
+            <a:endParaRPr lang="en-US"/>
+          </a:p>
+        </p:txBody>
+      </p:sp>
     </p:spTree>
     <p:extLst>
       <p:ext uri="{BB962C8B-B14F-4D97-AF65-F5344CB8AC3E}">
@@ -3945,6 +4065,30 @@
           </a:p>
         </p:txBody>
       </p:sp>
+      <p:sp>
+        <p:nvSpPr>
+          <p:cNvPr id="6" name="Slide Number Placeholder 5"/>
+          <p:cNvSpPr>
+            <a:spLocks noGrp="1"/>
+          </p:cNvSpPr>
+          <p:nvPr>
+            <p:ph type="sldNum" sz="quarter" idx="12"/>
+          </p:nvPr>
+        </p:nvSpPr>
+        <p:spPr/>
+        <p:txBody>
+          <a:bodyPr/>
+          <a:lstStyle/>
+          <a:p>
+            <a:fld id="{96E69268-9C8B-4EBF-A9EE-DC5DC2D48DC3}" type="slidenum">
+              <a:rPr lang="en-US" smtClean="0"/>
+              <a:pPr/>
+              <a:t>‹#›</a:t>
+            </a:fld>
+            <a:endParaRPr lang="en-US"/>
+          </a:p>
+        </p:txBody>
+      </p:sp>
     </p:spTree>
     <p:extLst>
       <p:ext uri="{BB962C8B-B14F-4D97-AF65-F5344CB8AC3E}">
@@ -4208,6 +4352,30 @@
           </a:p>
         </p:txBody>
       </p:sp>
+      <p:sp>
+        <p:nvSpPr>
+          <p:cNvPr id="7" name="Slide Number Placeholder 6"/>
+          <p:cNvSpPr>
+            <a:spLocks noGrp="1"/>
+          </p:cNvSpPr>
+          <p:nvPr>
+            <p:ph type="sldNum" sz="quarter" idx="12"/>
+          </p:nvPr>
+        </p:nvSpPr>
+        <p:spPr/>
+        <p:txBody>
+          <a:bodyPr/>
+          <a:lstStyle/>
+          <a:p>
+            <a:fld id="{96E69268-9C8B-4EBF-A9EE-DC5DC2D48DC3}" type="slidenum">
+              <a:rPr lang="en-US" smtClean="0"/>
+              <a:pPr/>
+              <a:t>‹#›</a:t>
+            </a:fld>
+            <a:endParaRPr lang="en-US"/>
+          </a:p>
+        </p:txBody>
+      </p:sp>
     </p:spTree>
     <p:extLst>
       <p:ext uri="{BB962C8B-B14F-4D97-AF65-F5344CB8AC3E}">
@@ -4605,6 +4773,30 @@
           </a:p>
         </p:txBody>
       </p:sp>
+      <p:sp>
+        <p:nvSpPr>
+          <p:cNvPr id="9" name="Slide Number Placeholder 8"/>
+          <p:cNvSpPr>
+            <a:spLocks noGrp="1"/>
+          </p:cNvSpPr>
+          <p:nvPr>
+            <p:ph type="sldNum" sz="quarter" idx="12"/>
+          </p:nvPr>
+        </p:nvSpPr>
+        <p:spPr/>
+        <p:txBody>
+          <a:bodyPr/>
+          <a:lstStyle/>
+          <a:p>
+            <a:fld id="{96E69268-9C8B-4EBF-A9EE-DC5DC2D48DC3}" type="slidenum">
+              <a:rPr lang="en-US" smtClean="0"/>
+              <a:pPr/>
+              <a:t>‹#›</a:t>
+            </a:fld>
+            <a:endParaRPr lang="en-US"/>
+          </a:p>
+        </p:txBody>
+      </p:sp>
     </p:spTree>
     <p:extLst>
       <p:ext uri="{BB962C8B-B14F-4D97-AF65-F5344CB8AC3E}">
@@ -4706,6 +4898,30 @@
           </a:p>
         </p:txBody>
       </p:sp>
+      <p:sp>
+        <p:nvSpPr>
+          <p:cNvPr id="5" name="Slide Number Placeholder 4"/>
+          <p:cNvSpPr>
+            <a:spLocks noGrp="1"/>
+          </p:cNvSpPr>
+          <p:nvPr>
+            <p:ph type="sldNum" sz="quarter" idx="12"/>
+          </p:nvPr>
+        </p:nvSpPr>
+        <p:spPr/>
+        <p:txBody>
+          <a:bodyPr/>
+          <a:lstStyle/>
+          <a:p>
+            <a:fld id="{96E69268-9C8B-4EBF-A9EE-DC5DC2D48DC3}" type="slidenum">
+              <a:rPr lang="en-US" smtClean="0"/>
+              <a:pPr/>
+              <a:t>‹#›</a:t>
+            </a:fld>
+            <a:endParaRPr lang="en-US"/>
+          </a:p>
+        </p:txBody>
+      </p:sp>
     </p:spTree>
     <p:extLst>
       <p:ext uri="{BB962C8B-B14F-4D97-AF65-F5344CB8AC3E}">
@@ -4779,6 +4995,30 @@
           </a:p>
         </p:txBody>
       </p:sp>
+      <p:sp>
+        <p:nvSpPr>
+          <p:cNvPr id="4" name="Slide Number Placeholder 3"/>
+          <p:cNvSpPr>
+            <a:spLocks noGrp="1"/>
+          </p:cNvSpPr>
+          <p:nvPr>
+            <p:ph type="sldNum" sz="quarter" idx="12"/>
+          </p:nvPr>
+        </p:nvSpPr>
+        <p:spPr/>
+        <p:txBody>
+          <a:bodyPr/>
+          <a:lstStyle/>
+          <a:p>
+            <a:fld id="{96E69268-9C8B-4EBF-A9EE-DC5DC2D48DC3}" type="slidenum">
+              <a:rPr lang="en-US" smtClean="0"/>
+              <a:pPr/>
+              <a:t>‹#›</a:t>
+            </a:fld>
+            <a:endParaRPr lang="en-US"/>
+          </a:p>
+        </p:txBody>
+      </p:sp>
     </p:spTree>
     <p:extLst>
       <p:ext uri="{BB962C8B-B14F-4D97-AF65-F5344CB8AC3E}">
@@ -5032,6 +5272,30 @@
           </a:p>
         </p:txBody>
       </p:sp>
+      <p:sp>
+        <p:nvSpPr>
+          <p:cNvPr id="7" name="Slide Number Placeholder 6"/>
+          <p:cNvSpPr>
+            <a:spLocks noGrp="1"/>
+          </p:cNvSpPr>
+          <p:nvPr>
+            <p:ph type="sldNum" sz="quarter" idx="12"/>
+          </p:nvPr>
+        </p:nvSpPr>
+        <p:spPr/>
+        <p:txBody>
+          <a:bodyPr/>
+          <a:lstStyle/>
+          <a:p>
+            <a:fld id="{96E69268-9C8B-4EBF-A9EE-DC5DC2D48DC3}" type="slidenum">
+              <a:rPr lang="en-US" smtClean="0"/>
+              <a:pPr/>
+              <a:t>‹#›</a:t>
+            </a:fld>
+            <a:endParaRPr lang="en-US"/>
+          </a:p>
+        </p:txBody>
+      </p:sp>
     </p:spTree>
     <p:extLst>
       <p:ext uri="{BB962C8B-B14F-4D97-AF65-F5344CB8AC3E}">
@@ -5295,6 +5559,30 @@
           </a:p>
         </p:txBody>
       </p:sp>
+      <p:sp>
+        <p:nvSpPr>
+          <p:cNvPr id="7" name="Slide Number Placeholder 6"/>
+          <p:cNvSpPr>
+            <a:spLocks noGrp="1"/>
+          </p:cNvSpPr>
+          <p:nvPr>
+            <p:ph type="sldNum" sz="quarter" idx="12"/>
+          </p:nvPr>
+        </p:nvSpPr>
+        <p:spPr/>
+        <p:txBody>
+          <a:bodyPr/>
+          <a:lstStyle/>
+          <a:p>
+            <a:fld id="{96E69268-9C8B-4EBF-A9EE-DC5DC2D48DC3}" type="slidenum">
+              <a:rPr lang="en-US" smtClean="0"/>
+              <a:pPr/>
+              <a:t>‹#›</a:t>
+            </a:fld>
+            <a:endParaRPr lang="en-US"/>
+          </a:p>
+        </p:txBody>
+      </p:sp>
     </p:spTree>
     <p:extLst>
       <p:ext uri="{BB962C8B-B14F-4D97-AF65-F5344CB8AC3E}">
@@ -5525,6 +5813,30 @@
           </a:p>
         </p:txBody>
       </p:sp>
+      <p:sp>
+        <p:nvSpPr>
+          <p:cNvPr id="7" name="Slide Number Placeholder 6"/>
+          <p:cNvSpPr>
+            <a:spLocks noGrp="1"/>
+          </p:cNvSpPr>
+          <p:nvPr>
+            <p:ph type="sldNum" sz="quarter" idx="12"/>
+          </p:nvPr>
+        </p:nvSpPr>
+        <p:spPr/>
+        <p:txBody>
+          <a:bodyPr/>
+          <a:lstStyle/>
+          <a:p>
+            <a:fld id="{96E69268-9C8B-4EBF-A9EE-DC5DC2D48DC3}" type="slidenum">
+              <a:rPr lang="en-US" smtClean="0"/>
+              <a:pPr/>
+              <a:t>‹#›</a:t>
+            </a:fld>
+            <a:endParaRPr lang="en-US"/>
+          </a:p>
+        </p:txBody>
+      </p:sp>
     </p:spTree>
     <p:extLst>
       <p:ext uri="{BB962C8B-B14F-4D97-AF65-F5344CB8AC3E}">
@@ -5671,6 +5983,30 @@
           </a:p>
         </p:txBody>
       </p:sp>
+      <p:sp>
+        <p:nvSpPr>
+          <p:cNvPr id="6" name="Slide Number Placeholder 5"/>
+          <p:cNvSpPr>
+            <a:spLocks noGrp="1"/>
+          </p:cNvSpPr>
+          <p:nvPr>
+            <p:ph type="sldNum" sz="quarter" idx="12"/>
+          </p:nvPr>
+        </p:nvSpPr>
+        <p:spPr/>
+        <p:txBody>
+          <a:bodyPr/>
+          <a:lstStyle/>
+          <a:p>
+            <a:fld id="{96E69268-9C8B-4EBF-A9EE-DC5DC2D48DC3}" type="slidenum">
+              <a:rPr lang="en-US" smtClean="0"/>
+              <a:pPr/>
+              <a:t>‹#›</a:t>
+            </a:fld>
+            <a:endParaRPr lang="en-US"/>
+          </a:p>
+        </p:txBody>
+      </p:sp>
     </p:spTree>
     <p:extLst>
       <p:ext uri="{BB962C8B-B14F-4D97-AF65-F5344CB8AC3E}">
@@ -5823,6 +6159,30 @@
           <a:bodyPr/>
           <a:lstStyle/>
           <a:p>
+            <a:endParaRPr lang="en-US"/>
+          </a:p>
+        </p:txBody>
+      </p:sp>
+      <p:sp>
+        <p:nvSpPr>
+          <p:cNvPr id="6" name="Slide Number Placeholder 5"/>
+          <p:cNvSpPr>
+            <a:spLocks noGrp="1"/>
+          </p:cNvSpPr>
+          <p:nvPr>
+            <p:ph type="sldNum" sz="quarter" idx="12"/>
+          </p:nvPr>
+        </p:nvSpPr>
+        <p:spPr/>
+        <p:txBody>
+          <a:bodyPr/>
+          <a:lstStyle/>
+          <a:p>
+            <a:fld id="{96E69268-9C8B-4EBF-A9EE-DC5DC2D48DC3}" type="slidenum">
+              <a:rPr lang="en-US" smtClean="0"/>
+              <a:pPr/>
+              <a:t>‹#›</a:t>
+            </a:fld>
             <a:endParaRPr lang="en-US"/>
           </a:p>
         </p:txBody>
@@ -5969,6 +6329,30 @@
           </a:p>
         </p:txBody>
       </p:sp>
+      <p:sp>
+        <p:nvSpPr>
+          <p:cNvPr id="5" name="Slide Number Placeholder 4"/>
+          <p:cNvSpPr>
+            <a:spLocks noGrp="1"/>
+          </p:cNvSpPr>
+          <p:nvPr>
+            <p:ph type="sldNum" sz="quarter" idx="12"/>
+          </p:nvPr>
+        </p:nvSpPr>
+        <p:spPr/>
+        <p:txBody>
+          <a:bodyPr/>
+          <a:lstStyle/>
+          <a:p>
+            <a:fld id="{96E69268-9C8B-4EBF-A9EE-DC5DC2D48DC3}" type="slidenum">
+              <a:rPr lang="en-US" smtClean="0"/>
+              <a:pPr/>
+              <a:t>‹#›</a:t>
+            </a:fld>
+            <a:endParaRPr lang="en-US"/>
+          </a:p>
+        </p:txBody>
+      </p:sp>
     </p:spTree>
     <p:extLst>
       <p:ext uri="{BB962C8B-B14F-4D97-AF65-F5344CB8AC3E}">
@@ -6207,6 +6591,30 @@
           </a:p>
         </p:txBody>
       </p:sp>
+      <p:sp>
+        <p:nvSpPr>
+          <p:cNvPr id="6" name="Slide Number Placeholder 5"/>
+          <p:cNvSpPr>
+            <a:spLocks noGrp="1"/>
+          </p:cNvSpPr>
+          <p:nvPr>
+            <p:ph type="sldNum" sz="quarter" idx="12"/>
+          </p:nvPr>
+        </p:nvSpPr>
+        <p:spPr/>
+        <p:txBody>
+          <a:bodyPr/>
+          <a:lstStyle/>
+          <a:p>
+            <a:fld id="{E5EDE275-BE14-4364-AEA2-5F5667C0FD49}" type="slidenum">
+              <a:rPr lang="en-US" smtClean="0"/>
+              <a:pPr/>
+              <a:t>‹#›</a:t>
+            </a:fld>
+            <a:endParaRPr lang="en-US"/>
+          </a:p>
+        </p:txBody>
+      </p:sp>
     </p:spTree>
     <p:extLst>
       <p:ext uri="{BB962C8B-B14F-4D97-AF65-F5344CB8AC3E}">
@@ -6425,6 +6833,30 @@
           </a:p>
         </p:txBody>
       </p:sp>
+      <p:sp>
+        <p:nvSpPr>
+          <p:cNvPr id="6" name="Slide Number Placeholder 5"/>
+          <p:cNvSpPr>
+            <a:spLocks noGrp="1"/>
+          </p:cNvSpPr>
+          <p:nvPr>
+            <p:ph type="sldNum" sz="quarter" idx="12"/>
+          </p:nvPr>
+        </p:nvSpPr>
+        <p:spPr/>
+        <p:txBody>
+          <a:bodyPr/>
+          <a:lstStyle/>
+          <a:p>
+            <a:fld id="{96E69268-9C8B-4EBF-A9EE-DC5DC2D48DC3}" type="slidenum">
+              <a:rPr lang="en-US" smtClean="0"/>
+              <a:pPr/>
+              <a:t>‹#›</a:t>
+            </a:fld>
+            <a:endParaRPr lang="en-US"/>
+          </a:p>
+        </p:txBody>
+      </p:sp>
     </p:spTree>
     <p:extLst>
       <p:ext uri="{BB962C8B-B14F-4D97-AF65-F5344CB8AC3E}">
@@ -6571,6 +7003,30 @@
           </a:p>
         </p:txBody>
       </p:sp>
+      <p:sp>
+        <p:nvSpPr>
+          <p:cNvPr id="6" name="Slide Number Placeholder 5"/>
+          <p:cNvSpPr>
+            <a:spLocks noGrp="1"/>
+          </p:cNvSpPr>
+          <p:nvPr>
+            <p:ph type="sldNum" sz="quarter" idx="12"/>
+          </p:nvPr>
+        </p:nvSpPr>
+        <p:spPr/>
+        <p:txBody>
+          <a:bodyPr/>
+          <a:lstStyle/>
+          <a:p>
+            <a:fld id="{96E69268-9C8B-4EBF-A9EE-DC5DC2D48DC3}" type="slidenum">
+              <a:rPr lang="en-US" smtClean="0"/>
+              <a:pPr/>
+              <a:t>‹#›</a:t>
+            </a:fld>
+            <a:endParaRPr lang="en-US"/>
+          </a:p>
+        </p:txBody>
+      </p:sp>
     </p:spTree>
     <p:extLst>
       <p:ext uri="{BB962C8B-B14F-4D97-AF65-F5344CB8AC3E}">
@@ -6794,6 +7250,30 @@
           </a:p>
         </p:txBody>
       </p:sp>
+      <p:sp>
+        <p:nvSpPr>
+          <p:cNvPr id="6" name="Slide Number Placeholder 5"/>
+          <p:cNvSpPr>
+            <a:spLocks noGrp="1"/>
+          </p:cNvSpPr>
+          <p:nvPr>
+            <p:ph type="sldNum" sz="quarter" idx="12"/>
+          </p:nvPr>
+        </p:nvSpPr>
+        <p:spPr/>
+        <p:txBody>
+          <a:bodyPr/>
+          <a:lstStyle/>
+          <a:p>
+            <a:fld id="{96E69268-9C8B-4EBF-A9EE-DC5DC2D48DC3}" type="slidenum">
+              <a:rPr lang="en-US" smtClean="0"/>
+              <a:pPr/>
+              <a:t>‹#›</a:t>
+            </a:fld>
+            <a:endParaRPr lang="en-US"/>
+          </a:p>
+        </p:txBody>
+      </p:sp>
     </p:spTree>
     <p:extLst>
       <p:ext uri="{BB962C8B-B14F-4D97-AF65-F5344CB8AC3E}">
@@ -7057,6 +7537,30 @@
           </a:p>
         </p:txBody>
       </p:sp>
+      <p:sp>
+        <p:nvSpPr>
+          <p:cNvPr id="7" name="Slide Number Placeholder 6"/>
+          <p:cNvSpPr>
+            <a:spLocks noGrp="1"/>
+          </p:cNvSpPr>
+          <p:nvPr>
+            <p:ph type="sldNum" sz="quarter" idx="12"/>
+          </p:nvPr>
+        </p:nvSpPr>
+        <p:spPr/>
+        <p:txBody>
+          <a:bodyPr/>
+          <a:lstStyle/>
+          <a:p>
+            <a:fld id="{96E69268-9C8B-4EBF-A9EE-DC5DC2D48DC3}" type="slidenum">
+              <a:rPr lang="en-US" smtClean="0"/>
+              <a:pPr/>
+              <a:t>‹#›</a:t>
+            </a:fld>
+            <a:endParaRPr lang="en-US"/>
+          </a:p>
+        </p:txBody>
+      </p:sp>
     </p:spTree>
     <p:extLst>
       <p:ext uri="{BB962C8B-B14F-4D97-AF65-F5344CB8AC3E}">
@@ -7454,6 +7958,30 @@
           </a:p>
         </p:txBody>
       </p:sp>
+      <p:sp>
+        <p:nvSpPr>
+          <p:cNvPr id="9" name="Slide Number Placeholder 8"/>
+          <p:cNvSpPr>
+            <a:spLocks noGrp="1"/>
+          </p:cNvSpPr>
+          <p:nvPr>
+            <p:ph type="sldNum" sz="quarter" idx="12"/>
+          </p:nvPr>
+        </p:nvSpPr>
+        <p:spPr/>
+        <p:txBody>
+          <a:bodyPr/>
+          <a:lstStyle/>
+          <a:p>
+            <a:fld id="{96E69268-9C8B-4EBF-A9EE-DC5DC2D48DC3}" type="slidenum">
+              <a:rPr lang="en-US" smtClean="0"/>
+              <a:pPr/>
+              <a:t>‹#›</a:t>
+            </a:fld>
+            <a:endParaRPr lang="en-US"/>
+          </a:p>
+        </p:txBody>
+      </p:sp>
     </p:spTree>
     <p:extLst>
       <p:ext uri="{BB962C8B-B14F-4D97-AF65-F5344CB8AC3E}">
@@ -7851,6 +8379,30 @@
           </a:p>
         </p:txBody>
       </p:sp>
+      <p:sp>
+        <p:nvSpPr>
+          <p:cNvPr id="9" name="Slide Number Placeholder 8"/>
+          <p:cNvSpPr>
+            <a:spLocks noGrp="1"/>
+          </p:cNvSpPr>
+          <p:nvPr>
+            <p:ph type="sldNum" sz="quarter" idx="12"/>
+          </p:nvPr>
+        </p:nvSpPr>
+        <p:spPr/>
+        <p:txBody>
+          <a:bodyPr/>
+          <a:lstStyle/>
+          <a:p>
+            <a:fld id="{96E69268-9C8B-4EBF-A9EE-DC5DC2D48DC3}" type="slidenum">
+              <a:rPr lang="en-US" smtClean="0"/>
+              <a:pPr/>
+              <a:t>‹#›</a:t>
+            </a:fld>
+            <a:endParaRPr lang="en-US"/>
+          </a:p>
+        </p:txBody>
+      </p:sp>
     </p:spTree>
     <p:extLst>
       <p:ext uri="{BB962C8B-B14F-4D97-AF65-F5344CB8AC3E}">
@@ -7952,6 +8504,30 @@
           </a:p>
         </p:txBody>
       </p:sp>
+      <p:sp>
+        <p:nvSpPr>
+          <p:cNvPr id="5" name="Slide Number Placeholder 4"/>
+          <p:cNvSpPr>
+            <a:spLocks noGrp="1"/>
+          </p:cNvSpPr>
+          <p:nvPr>
+            <p:ph type="sldNum" sz="quarter" idx="12"/>
+          </p:nvPr>
+        </p:nvSpPr>
+        <p:spPr/>
+        <p:txBody>
+          <a:bodyPr/>
+          <a:lstStyle/>
+          <a:p>
+            <a:fld id="{96E69268-9C8B-4EBF-A9EE-DC5DC2D48DC3}" type="slidenum">
+              <a:rPr lang="en-US" smtClean="0"/>
+              <a:pPr/>
+              <a:t>‹#›</a:t>
+            </a:fld>
+            <a:endParaRPr lang="en-US"/>
+          </a:p>
+        </p:txBody>
+      </p:sp>
     </p:spTree>
     <p:extLst>
       <p:ext uri="{BB962C8B-B14F-4D97-AF65-F5344CB8AC3E}">
@@ -8025,6 +8601,30 @@
           </a:p>
         </p:txBody>
       </p:sp>
+      <p:sp>
+        <p:nvSpPr>
+          <p:cNvPr id="4" name="Slide Number Placeholder 3"/>
+          <p:cNvSpPr>
+            <a:spLocks noGrp="1"/>
+          </p:cNvSpPr>
+          <p:nvPr>
+            <p:ph type="sldNum" sz="quarter" idx="12"/>
+          </p:nvPr>
+        </p:nvSpPr>
+        <p:spPr/>
+        <p:txBody>
+          <a:bodyPr/>
+          <a:lstStyle/>
+          <a:p>
+            <a:fld id="{96E69268-9C8B-4EBF-A9EE-DC5DC2D48DC3}" type="slidenum">
+              <a:rPr lang="en-US" smtClean="0"/>
+              <a:pPr/>
+              <a:t>‹#›</a:t>
+            </a:fld>
+            <a:endParaRPr lang="en-US"/>
+          </a:p>
+        </p:txBody>
+      </p:sp>
     </p:spTree>
     <p:extLst>
       <p:ext uri="{BB962C8B-B14F-4D97-AF65-F5344CB8AC3E}">
@@ -8278,6 +8878,30 @@
           </a:p>
         </p:txBody>
       </p:sp>
+      <p:sp>
+        <p:nvSpPr>
+          <p:cNvPr id="7" name="Slide Number Placeholder 6"/>
+          <p:cNvSpPr>
+            <a:spLocks noGrp="1"/>
+          </p:cNvSpPr>
+          <p:nvPr>
+            <p:ph type="sldNum" sz="quarter" idx="12"/>
+          </p:nvPr>
+        </p:nvSpPr>
+        <p:spPr/>
+        <p:txBody>
+          <a:bodyPr/>
+          <a:lstStyle/>
+          <a:p>
+            <a:fld id="{96E69268-9C8B-4EBF-A9EE-DC5DC2D48DC3}" type="slidenum">
+              <a:rPr lang="en-US" smtClean="0"/>
+              <a:pPr/>
+              <a:t>‹#›</a:t>
+            </a:fld>
+            <a:endParaRPr lang="en-US"/>
+          </a:p>
+        </p:txBody>
+      </p:sp>
     </p:spTree>
     <p:extLst>
       <p:ext uri="{BB962C8B-B14F-4D97-AF65-F5344CB8AC3E}">
@@ -8508,6 +9132,30 @@
           </a:p>
         </p:txBody>
       </p:sp>
+      <p:sp>
+        <p:nvSpPr>
+          <p:cNvPr id="7" name="Slide Number Placeholder 6"/>
+          <p:cNvSpPr>
+            <a:spLocks noGrp="1"/>
+          </p:cNvSpPr>
+          <p:nvPr>
+            <p:ph type="sldNum" sz="quarter" idx="12"/>
+          </p:nvPr>
+        </p:nvSpPr>
+        <p:spPr/>
+        <p:txBody>
+          <a:bodyPr/>
+          <a:lstStyle/>
+          <a:p>
+            <a:fld id="{96E69268-9C8B-4EBF-A9EE-DC5DC2D48DC3}" type="slidenum">
+              <a:rPr lang="en-US" smtClean="0"/>
+              <a:pPr/>
+              <a:t>‹#›</a:t>
+            </a:fld>
+            <a:endParaRPr lang="en-US"/>
+          </a:p>
+        </p:txBody>
+      </p:sp>
     </p:spTree>
     <p:extLst>
       <p:ext uri="{BB962C8B-B14F-4D97-AF65-F5344CB8AC3E}">
@@ -8654,6 +9302,30 @@
           </a:p>
         </p:txBody>
       </p:sp>
+      <p:sp>
+        <p:nvSpPr>
+          <p:cNvPr id="6" name="Slide Number Placeholder 5"/>
+          <p:cNvSpPr>
+            <a:spLocks noGrp="1"/>
+          </p:cNvSpPr>
+          <p:nvPr>
+            <p:ph type="sldNum" sz="quarter" idx="12"/>
+          </p:nvPr>
+        </p:nvSpPr>
+        <p:spPr/>
+        <p:txBody>
+          <a:bodyPr/>
+          <a:lstStyle/>
+          <a:p>
+            <a:fld id="{96E69268-9C8B-4EBF-A9EE-DC5DC2D48DC3}" type="slidenum">
+              <a:rPr lang="en-US" smtClean="0"/>
+              <a:pPr/>
+              <a:t>‹#›</a:t>
+            </a:fld>
+            <a:endParaRPr lang="en-US"/>
+          </a:p>
+        </p:txBody>
+      </p:sp>
     </p:spTree>
     <p:extLst>
       <p:ext uri="{BB962C8B-B14F-4D97-AF65-F5344CB8AC3E}">
@@ -8806,6 +9478,30 @@
           <a:bodyPr/>
           <a:lstStyle/>
           <a:p>
+            <a:endParaRPr lang="en-US"/>
+          </a:p>
+        </p:txBody>
+      </p:sp>
+      <p:sp>
+        <p:nvSpPr>
+          <p:cNvPr id="6" name="Slide Number Placeholder 5"/>
+          <p:cNvSpPr>
+            <a:spLocks noGrp="1"/>
+          </p:cNvSpPr>
+          <p:nvPr>
+            <p:ph type="sldNum" sz="quarter" idx="12"/>
+          </p:nvPr>
+        </p:nvSpPr>
+        <p:spPr/>
+        <p:txBody>
+          <a:bodyPr/>
+          <a:lstStyle/>
+          <a:p>
+            <a:fld id="{96E69268-9C8B-4EBF-A9EE-DC5DC2D48DC3}" type="slidenum">
+              <a:rPr lang="en-US" smtClean="0"/>
+              <a:pPr/>
+              <a:t>‹#›</a:t>
+            </a:fld>
             <a:endParaRPr lang="en-US"/>
           </a:p>
         </p:txBody>
@@ -8952,6 +9648,30 @@
           </a:p>
         </p:txBody>
       </p:sp>
+      <p:sp>
+        <p:nvSpPr>
+          <p:cNvPr id="5" name="Slide Number Placeholder 4"/>
+          <p:cNvSpPr>
+            <a:spLocks noGrp="1"/>
+          </p:cNvSpPr>
+          <p:nvPr>
+            <p:ph type="sldNum" sz="quarter" idx="12"/>
+          </p:nvPr>
+        </p:nvSpPr>
+        <p:spPr/>
+        <p:txBody>
+          <a:bodyPr/>
+          <a:lstStyle/>
+          <a:p>
+            <a:fld id="{96E69268-9C8B-4EBF-A9EE-DC5DC2D48DC3}" type="slidenum">
+              <a:rPr lang="en-US" smtClean="0"/>
+              <a:pPr/>
+              <a:t>‹#›</a:t>
+            </a:fld>
+            <a:endParaRPr lang="en-US"/>
+          </a:p>
+        </p:txBody>
+      </p:sp>
     </p:spTree>
     <p:extLst>
       <p:ext uri="{BB962C8B-B14F-4D97-AF65-F5344CB8AC3E}">
@@ -9258,6 +9978,30 @@
           </a:p>
         </p:txBody>
       </p:sp>
+      <p:sp>
+        <p:nvSpPr>
+          <p:cNvPr id="6" name="Slide Number Placeholder 5"/>
+          <p:cNvSpPr>
+            <a:spLocks noGrp="1"/>
+          </p:cNvSpPr>
+          <p:nvPr>
+            <p:ph type="sldNum" sz="quarter" idx="12"/>
+          </p:nvPr>
+        </p:nvSpPr>
+        <p:spPr/>
+        <p:txBody>
+          <a:bodyPr/>
+          <a:lstStyle/>
+          <a:p>
+            <a:fld id="{E5EDE275-BE14-4364-AEA2-5F5667C0FD49}" type="slidenum">
+              <a:rPr lang="en-US" smtClean="0"/>
+              <a:pPr/>
+              <a:t>‹#›</a:t>
+            </a:fld>
+            <a:endParaRPr lang="en-US"/>
+          </a:p>
+        </p:txBody>
+      </p:sp>
     </p:spTree>
     <p:extLst>
       <p:ext uri="{BB962C8B-B14F-4D97-AF65-F5344CB8AC3E}">
@@ -9478,6 +10222,30 @@
           </a:p>
         </p:txBody>
       </p:sp>
+      <p:sp>
+        <p:nvSpPr>
+          <p:cNvPr id="6" name="Slide Number Placeholder 5"/>
+          <p:cNvSpPr>
+            <a:spLocks noGrp="1"/>
+          </p:cNvSpPr>
+          <p:nvPr>
+            <p:ph type="sldNum" sz="quarter" idx="12"/>
+          </p:nvPr>
+        </p:nvSpPr>
+        <p:spPr/>
+        <p:txBody>
+          <a:bodyPr/>
+          <a:lstStyle/>
+          <a:p>
+            <a:fld id="{96E69268-9C8B-4EBF-A9EE-DC5DC2D48DC3}" type="slidenum">
+              <a:rPr lang="en-US" smtClean="0"/>
+              <a:pPr/>
+              <a:t>‹#›</a:t>
+            </a:fld>
+            <a:endParaRPr lang="en-US"/>
+          </a:p>
+        </p:txBody>
+      </p:sp>
     </p:spTree>
     <p:extLst>
       <p:ext uri="{BB962C8B-B14F-4D97-AF65-F5344CB8AC3E}">
@@ -9658,6 +10426,30 @@
           </a:p>
         </p:txBody>
       </p:sp>
+      <p:sp>
+        <p:nvSpPr>
+          <p:cNvPr id="6" name="Slide Number Placeholder 5"/>
+          <p:cNvSpPr>
+            <a:spLocks noGrp="1"/>
+          </p:cNvSpPr>
+          <p:nvPr>
+            <p:ph type="sldNum" sz="quarter" idx="12"/>
+          </p:nvPr>
+        </p:nvSpPr>
+        <p:spPr/>
+        <p:txBody>
+          <a:bodyPr/>
+          <a:lstStyle/>
+          <a:p>
+            <a:fld id="{96E69268-9C8B-4EBF-A9EE-DC5DC2D48DC3}" type="slidenum">
+              <a:rPr lang="en-US" smtClean="0"/>
+              <a:pPr/>
+              <a:t>‹#›</a:t>
+            </a:fld>
+            <a:endParaRPr lang="en-US"/>
+          </a:p>
+        </p:txBody>
+      </p:sp>
     </p:spTree>
     <p:extLst>
       <p:ext uri="{BB962C8B-B14F-4D97-AF65-F5344CB8AC3E}">
@@ -9759,6 +10551,30 @@
           </a:p>
         </p:txBody>
       </p:sp>
+      <p:sp>
+        <p:nvSpPr>
+          <p:cNvPr id="5" name="Slide Number Placeholder 4"/>
+          <p:cNvSpPr>
+            <a:spLocks noGrp="1"/>
+          </p:cNvSpPr>
+          <p:nvPr>
+            <p:ph type="sldNum" sz="quarter" idx="12"/>
+          </p:nvPr>
+        </p:nvSpPr>
+        <p:spPr/>
+        <p:txBody>
+          <a:bodyPr/>
+          <a:lstStyle/>
+          <a:p>
+            <a:fld id="{96E69268-9C8B-4EBF-A9EE-DC5DC2D48DC3}" type="slidenum">
+              <a:rPr lang="en-US" smtClean="0"/>
+              <a:pPr/>
+              <a:t>‹#›</a:t>
+            </a:fld>
+            <a:endParaRPr lang="en-US"/>
+          </a:p>
+        </p:txBody>
+      </p:sp>
     </p:spTree>
     <p:extLst>
       <p:ext uri="{BB962C8B-B14F-4D97-AF65-F5344CB8AC3E}">
@@ -9983,6 +10799,30 @@
           </a:p>
         </p:txBody>
       </p:sp>
+      <p:sp>
+        <p:nvSpPr>
+          <p:cNvPr id="6" name="Slide Number Placeholder 5"/>
+          <p:cNvSpPr>
+            <a:spLocks noGrp="1"/>
+          </p:cNvSpPr>
+          <p:nvPr>
+            <p:ph type="sldNum" sz="quarter" idx="12"/>
+          </p:nvPr>
+        </p:nvSpPr>
+        <p:spPr/>
+        <p:txBody>
+          <a:bodyPr/>
+          <a:lstStyle/>
+          <a:p>
+            <a:fld id="{96E69268-9C8B-4EBF-A9EE-DC5DC2D48DC3}" type="slidenum">
+              <a:rPr lang="en-US" smtClean="0"/>
+              <a:pPr/>
+              <a:t>‹#›</a:t>
+            </a:fld>
+            <a:endParaRPr lang="en-US"/>
+          </a:p>
+        </p:txBody>
+      </p:sp>
     </p:spTree>
     <p:extLst>
       <p:ext uri="{BB962C8B-B14F-4D97-AF65-F5344CB8AC3E}">
@@ -10313,6 +11153,30 @@
           </a:p>
         </p:txBody>
       </p:sp>
+      <p:sp>
+        <p:nvSpPr>
+          <p:cNvPr id="7" name="Slide Number Placeholder 6"/>
+          <p:cNvSpPr>
+            <a:spLocks noGrp="1"/>
+          </p:cNvSpPr>
+          <p:nvPr>
+            <p:ph type="sldNum" sz="quarter" idx="12"/>
+          </p:nvPr>
+        </p:nvSpPr>
+        <p:spPr/>
+        <p:txBody>
+          <a:bodyPr/>
+          <a:lstStyle/>
+          <a:p>
+            <a:fld id="{96E69268-9C8B-4EBF-A9EE-DC5DC2D48DC3}" type="slidenum">
+              <a:rPr lang="en-US" smtClean="0"/>
+              <a:pPr/>
+              <a:t>‹#›</a:t>
+            </a:fld>
+            <a:endParaRPr lang="en-US"/>
+          </a:p>
+        </p:txBody>
+      </p:sp>
     </p:spTree>
     <p:extLst>
       <p:ext uri="{BB962C8B-B14F-4D97-AF65-F5344CB8AC3E}">
@@ -10777,6 +11641,30 @@
           </a:p>
         </p:txBody>
       </p:sp>
+      <p:sp>
+        <p:nvSpPr>
+          <p:cNvPr id="9" name="Slide Number Placeholder 8"/>
+          <p:cNvSpPr>
+            <a:spLocks noGrp="1"/>
+          </p:cNvSpPr>
+          <p:nvPr>
+            <p:ph type="sldNum" sz="quarter" idx="12"/>
+          </p:nvPr>
+        </p:nvSpPr>
+        <p:spPr/>
+        <p:txBody>
+          <a:bodyPr/>
+          <a:lstStyle/>
+          <a:p>
+            <a:fld id="{96E69268-9C8B-4EBF-A9EE-DC5DC2D48DC3}" type="slidenum">
+              <a:rPr lang="en-US" smtClean="0"/>
+              <a:pPr/>
+              <a:t>‹#›</a:t>
+            </a:fld>
+            <a:endParaRPr lang="en-US"/>
+          </a:p>
+        </p:txBody>
+      </p:sp>
     </p:spTree>
     <p:extLst>
       <p:ext uri="{BB962C8B-B14F-4D97-AF65-F5344CB8AC3E}">
@@ -10879,6 +11767,30 @@
           </a:p>
         </p:txBody>
       </p:sp>
+      <p:sp>
+        <p:nvSpPr>
+          <p:cNvPr id="5" name="Slide Number Placeholder 4"/>
+          <p:cNvSpPr>
+            <a:spLocks noGrp="1"/>
+          </p:cNvSpPr>
+          <p:nvPr>
+            <p:ph type="sldNum" sz="quarter" idx="12"/>
+          </p:nvPr>
+        </p:nvSpPr>
+        <p:spPr/>
+        <p:txBody>
+          <a:bodyPr/>
+          <a:lstStyle/>
+          <a:p>
+            <a:fld id="{96E69268-9C8B-4EBF-A9EE-DC5DC2D48DC3}" type="slidenum">
+              <a:rPr lang="en-US" smtClean="0"/>
+              <a:pPr/>
+              <a:t>‹#›</a:t>
+            </a:fld>
+            <a:endParaRPr lang="en-US"/>
+          </a:p>
+        </p:txBody>
+      </p:sp>
     </p:spTree>
     <p:extLst>
       <p:ext uri="{BB962C8B-B14F-4D97-AF65-F5344CB8AC3E}">
@@ -10952,6 +11864,30 @@
           </a:p>
         </p:txBody>
       </p:sp>
+      <p:sp>
+        <p:nvSpPr>
+          <p:cNvPr id="4" name="Slide Number Placeholder 3"/>
+          <p:cNvSpPr>
+            <a:spLocks noGrp="1"/>
+          </p:cNvSpPr>
+          <p:nvPr>
+            <p:ph type="sldNum" sz="quarter" idx="12"/>
+          </p:nvPr>
+        </p:nvSpPr>
+        <p:spPr/>
+        <p:txBody>
+          <a:bodyPr/>
+          <a:lstStyle/>
+          <a:p>
+            <a:fld id="{96E69268-9C8B-4EBF-A9EE-DC5DC2D48DC3}" type="slidenum">
+              <a:rPr lang="en-US" smtClean="0"/>
+              <a:pPr/>
+              <a:t>‹#›</a:t>
+            </a:fld>
+            <a:endParaRPr lang="en-US"/>
+          </a:p>
+        </p:txBody>
+      </p:sp>
     </p:spTree>
     <p:extLst>
       <p:ext uri="{BB962C8B-B14F-4D97-AF65-F5344CB8AC3E}">
@@ -11239,6 +12175,30 @@
           </a:p>
         </p:txBody>
       </p:sp>
+      <p:sp>
+        <p:nvSpPr>
+          <p:cNvPr id="7" name="Slide Number Placeholder 6"/>
+          <p:cNvSpPr>
+            <a:spLocks noGrp="1"/>
+          </p:cNvSpPr>
+          <p:nvPr>
+            <p:ph type="sldNum" sz="quarter" idx="12"/>
+          </p:nvPr>
+        </p:nvSpPr>
+        <p:spPr/>
+        <p:txBody>
+          <a:bodyPr/>
+          <a:lstStyle/>
+          <a:p>
+            <a:fld id="{96E69268-9C8B-4EBF-A9EE-DC5DC2D48DC3}" type="slidenum">
+              <a:rPr lang="en-US" smtClean="0"/>
+              <a:pPr/>
+              <a:t>‹#›</a:t>
+            </a:fld>
+            <a:endParaRPr lang="en-US"/>
+          </a:p>
+        </p:txBody>
+      </p:sp>
     </p:spTree>
     <p:extLst>
       <p:ext uri="{BB962C8B-B14F-4D97-AF65-F5344CB8AC3E}">
@@ -11474,6 +12434,30 @@
           </a:p>
         </p:txBody>
       </p:sp>
+      <p:sp>
+        <p:nvSpPr>
+          <p:cNvPr id="7" name="Slide Number Placeholder 6"/>
+          <p:cNvSpPr>
+            <a:spLocks noGrp="1"/>
+          </p:cNvSpPr>
+          <p:nvPr>
+            <p:ph type="sldNum" sz="quarter" idx="12"/>
+          </p:nvPr>
+        </p:nvSpPr>
+        <p:spPr/>
+        <p:txBody>
+          <a:bodyPr/>
+          <a:lstStyle/>
+          <a:p>
+            <a:fld id="{96E69268-9C8B-4EBF-A9EE-DC5DC2D48DC3}" type="slidenum">
+              <a:rPr lang="en-US" smtClean="0"/>
+              <a:pPr/>
+              <a:t>‹#›</a:t>
+            </a:fld>
+            <a:endParaRPr lang="en-US"/>
+          </a:p>
+        </p:txBody>
+      </p:sp>
     </p:spTree>
     <p:extLst>
       <p:ext uri="{BB962C8B-B14F-4D97-AF65-F5344CB8AC3E}">
@@ -11654,6 +12638,30 @@
           </a:p>
         </p:txBody>
       </p:sp>
+      <p:sp>
+        <p:nvSpPr>
+          <p:cNvPr id="6" name="Slide Number Placeholder 5"/>
+          <p:cNvSpPr>
+            <a:spLocks noGrp="1"/>
+          </p:cNvSpPr>
+          <p:nvPr>
+            <p:ph type="sldNum" sz="quarter" idx="12"/>
+          </p:nvPr>
+        </p:nvSpPr>
+        <p:spPr/>
+        <p:txBody>
+          <a:bodyPr/>
+          <a:lstStyle/>
+          <a:p>
+            <a:fld id="{96E69268-9C8B-4EBF-A9EE-DC5DC2D48DC3}" type="slidenum">
+              <a:rPr lang="en-US" smtClean="0"/>
+              <a:pPr/>
+              <a:t>‹#›</a:t>
+            </a:fld>
+            <a:endParaRPr lang="en-US"/>
+          </a:p>
+        </p:txBody>
+      </p:sp>
     </p:spTree>
     <p:extLst>
       <p:ext uri="{BB962C8B-B14F-4D97-AF65-F5344CB8AC3E}">
@@ -11840,6 +12848,30 @@
           <a:bodyPr/>
           <a:lstStyle/>
           <a:p>
+            <a:endParaRPr lang="en-US"/>
+          </a:p>
+        </p:txBody>
+      </p:sp>
+      <p:sp>
+        <p:nvSpPr>
+          <p:cNvPr id="6" name="Slide Number Placeholder 5"/>
+          <p:cNvSpPr>
+            <a:spLocks noGrp="1"/>
+          </p:cNvSpPr>
+          <p:nvPr>
+            <p:ph type="sldNum" sz="quarter" idx="12"/>
+          </p:nvPr>
+        </p:nvSpPr>
+        <p:spPr/>
+        <p:txBody>
+          <a:bodyPr/>
+          <a:lstStyle/>
+          <a:p>
+            <a:fld id="{96E69268-9C8B-4EBF-A9EE-DC5DC2D48DC3}" type="slidenum">
+              <a:rPr lang="en-US" smtClean="0"/>
+              <a:pPr/>
+              <a:t>‹#›</a:t>
+            </a:fld>
             <a:endParaRPr lang="en-US"/>
           </a:p>
         </p:txBody>
@@ -11986,6 +13018,30 @@
           </a:p>
         </p:txBody>
       </p:sp>
+      <p:sp>
+        <p:nvSpPr>
+          <p:cNvPr id="5" name="Slide Number Placeholder 4"/>
+          <p:cNvSpPr>
+            <a:spLocks noGrp="1"/>
+          </p:cNvSpPr>
+          <p:nvPr>
+            <p:ph type="sldNum" sz="quarter" idx="12"/>
+          </p:nvPr>
+        </p:nvSpPr>
+        <p:spPr/>
+        <p:txBody>
+          <a:bodyPr/>
+          <a:lstStyle/>
+          <a:p>
+            <a:fld id="{96E69268-9C8B-4EBF-A9EE-DC5DC2D48DC3}" type="slidenum">
+              <a:rPr lang="en-US" smtClean="0"/>
+              <a:pPr/>
+              <a:t>‹#›</a:t>
+            </a:fld>
+            <a:endParaRPr lang="en-US"/>
+          </a:p>
+        </p:txBody>
+      </p:sp>
     </p:spTree>
     <p:extLst>
       <p:ext uri="{BB962C8B-B14F-4D97-AF65-F5344CB8AC3E}">
@@ -12055,6 +13111,30 @@
           <a:bodyPr/>
           <a:lstStyle/>
           <a:p>
+            <a:endParaRPr lang="en-US"/>
+          </a:p>
+        </p:txBody>
+      </p:sp>
+      <p:sp>
+        <p:nvSpPr>
+          <p:cNvPr id="4" name="Slide Number Placeholder 3"/>
+          <p:cNvSpPr>
+            <a:spLocks noGrp="1"/>
+          </p:cNvSpPr>
+          <p:nvPr>
+            <p:ph type="sldNum" sz="quarter" idx="12"/>
+          </p:nvPr>
+        </p:nvSpPr>
+        <p:spPr/>
+        <p:txBody>
+          <a:bodyPr/>
+          <a:lstStyle/>
+          <a:p>
+            <a:fld id="{96E69268-9C8B-4EBF-A9EE-DC5DC2D48DC3}" type="slidenum">
+              <a:rPr lang="en-US" smtClean="0"/>
+              <a:pPr/>
+              <a:t>‹#›</a:t>
+            </a:fld>
             <a:endParaRPr lang="en-US"/>
           </a:p>
         </p:txBody>
@@ -12363,6 +13443,30 @@
           </a:p>
         </p:txBody>
       </p:sp>
+      <p:sp>
+        <p:nvSpPr>
+          <p:cNvPr id="6" name="Slide Number Placeholder 5"/>
+          <p:cNvSpPr>
+            <a:spLocks noGrp="1"/>
+          </p:cNvSpPr>
+          <p:nvPr>
+            <p:ph type="sldNum" sz="quarter" idx="12"/>
+          </p:nvPr>
+        </p:nvSpPr>
+        <p:spPr/>
+        <p:txBody>
+          <a:bodyPr/>
+          <a:lstStyle/>
+          <a:p>
+            <a:fld id="{E5EDE275-BE14-4364-AEA2-5F5667C0FD49}" type="slidenum">
+              <a:rPr lang="en-US" smtClean="0"/>
+              <a:pPr/>
+              <a:t>‹#›</a:t>
+            </a:fld>
+            <a:endParaRPr lang="en-US"/>
+          </a:p>
+        </p:txBody>
+      </p:sp>
     </p:spTree>
     <p:extLst>
       <p:ext uri="{BB962C8B-B14F-4D97-AF65-F5344CB8AC3E}">
@@ -12581,6 +13685,30 @@
           </a:p>
         </p:txBody>
       </p:sp>
+      <p:sp>
+        <p:nvSpPr>
+          <p:cNvPr id="6" name="Slide Number Placeholder 5"/>
+          <p:cNvSpPr>
+            <a:spLocks noGrp="1"/>
+          </p:cNvSpPr>
+          <p:nvPr>
+            <p:ph type="sldNum" sz="quarter" idx="12"/>
+          </p:nvPr>
+        </p:nvSpPr>
+        <p:spPr/>
+        <p:txBody>
+          <a:bodyPr/>
+          <a:lstStyle/>
+          <a:p>
+            <a:fld id="{96E69268-9C8B-4EBF-A9EE-DC5DC2D48DC3}" type="slidenum">
+              <a:rPr lang="en-US" smtClean="0"/>
+              <a:pPr/>
+              <a:t>‹#›</a:t>
+            </a:fld>
+            <a:endParaRPr lang="en-US"/>
+          </a:p>
+        </p:txBody>
+      </p:sp>
     </p:spTree>
     <p:extLst>
       <p:ext uri="{BB962C8B-B14F-4D97-AF65-F5344CB8AC3E}">
@@ -12727,6 +13855,30 @@
           </a:p>
         </p:txBody>
       </p:sp>
+      <p:sp>
+        <p:nvSpPr>
+          <p:cNvPr id="6" name="Slide Number Placeholder 5"/>
+          <p:cNvSpPr>
+            <a:spLocks noGrp="1"/>
+          </p:cNvSpPr>
+          <p:nvPr>
+            <p:ph type="sldNum" sz="quarter" idx="12"/>
+          </p:nvPr>
+        </p:nvSpPr>
+        <p:spPr/>
+        <p:txBody>
+          <a:bodyPr/>
+          <a:lstStyle/>
+          <a:p>
+            <a:fld id="{96E69268-9C8B-4EBF-A9EE-DC5DC2D48DC3}" type="slidenum">
+              <a:rPr lang="en-US" smtClean="0"/>
+              <a:pPr/>
+              <a:t>‹#›</a:t>
+            </a:fld>
+            <a:endParaRPr lang="en-US"/>
+          </a:p>
+        </p:txBody>
+      </p:sp>
     </p:spTree>
     <p:extLst>
       <p:ext uri="{BB962C8B-B14F-4D97-AF65-F5344CB8AC3E}">
@@ -12950,6 +14102,30 @@
           </a:p>
         </p:txBody>
       </p:sp>
+      <p:sp>
+        <p:nvSpPr>
+          <p:cNvPr id="6" name="Slide Number Placeholder 5"/>
+          <p:cNvSpPr>
+            <a:spLocks noGrp="1"/>
+          </p:cNvSpPr>
+          <p:nvPr>
+            <p:ph type="sldNum" sz="quarter" idx="12"/>
+          </p:nvPr>
+        </p:nvSpPr>
+        <p:spPr/>
+        <p:txBody>
+          <a:bodyPr/>
+          <a:lstStyle/>
+          <a:p>
+            <a:fld id="{96E69268-9C8B-4EBF-A9EE-DC5DC2D48DC3}" type="slidenum">
+              <a:rPr lang="en-US" smtClean="0"/>
+              <a:pPr/>
+              <a:t>‹#›</a:t>
+            </a:fld>
+            <a:endParaRPr lang="en-US"/>
+          </a:p>
+        </p:txBody>
+      </p:sp>
     </p:spTree>
     <p:extLst>
       <p:ext uri="{BB962C8B-B14F-4D97-AF65-F5344CB8AC3E}">
@@ -13213,6 +14389,30 @@
           </a:p>
         </p:txBody>
       </p:sp>
+      <p:sp>
+        <p:nvSpPr>
+          <p:cNvPr id="7" name="Slide Number Placeholder 6"/>
+          <p:cNvSpPr>
+            <a:spLocks noGrp="1"/>
+          </p:cNvSpPr>
+          <p:nvPr>
+            <p:ph type="sldNum" sz="quarter" idx="12"/>
+          </p:nvPr>
+        </p:nvSpPr>
+        <p:spPr/>
+        <p:txBody>
+          <a:bodyPr/>
+          <a:lstStyle/>
+          <a:p>
+            <a:fld id="{96E69268-9C8B-4EBF-A9EE-DC5DC2D48DC3}" type="slidenum">
+              <a:rPr lang="en-US" smtClean="0"/>
+              <a:pPr/>
+              <a:t>‹#›</a:t>
+            </a:fld>
+            <a:endParaRPr lang="en-US"/>
+          </a:p>
+        </p:txBody>
+      </p:sp>
     </p:spTree>
     <p:extLst>
       <p:ext uri="{BB962C8B-B14F-4D97-AF65-F5344CB8AC3E}">
@@ -13610,6 +14810,30 @@
           </a:p>
         </p:txBody>
       </p:sp>
+      <p:sp>
+        <p:nvSpPr>
+          <p:cNvPr id="9" name="Slide Number Placeholder 8"/>
+          <p:cNvSpPr>
+            <a:spLocks noGrp="1"/>
+          </p:cNvSpPr>
+          <p:nvPr>
+            <p:ph type="sldNum" sz="quarter" idx="12"/>
+          </p:nvPr>
+        </p:nvSpPr>
+        <p:spPr/>
+        <p:txBody>
+          <a:bodyPr/>
+          <a:lstStyle/>
+          <a:p>
+            <a:fld id="{96E69268-9C8B-4EBF-A9EE-DC5DC2D48DC3}" type="slidenum">
+              <a:rPr lang="en-US" smtClean="0"/>
+              <a:pPr/>
+              <a:t>‹#›</a:t>
+            </a:fld>
+            <a:endParaRPr lang="en-US"/>
+          </a:p>
+        </p:txBody>
+      </p:sp>
     </p:spTree>
     <p:extLst>
       <p:ext uri="{BB962C8B-B14F-4D97-AF65-F5344CB8AC3E}">
@@ -13707,6 +14931,30 @@
           <a:bodyPr/>
           <a:lstStyle/>
           <a:p>
+            <a:endParaRPr lang="en-US"/>
+          </a:p>
+        </p:txBody>
+      </p:sp>
+      <p:sp>
+        <p:nvSpPr>
+          <p:cNvPr id="5" name="Slide Number Placeholder 4"/>
+          <p:cNvSpPr>
+            <a:spLocks noGrp="1"/>
+          </p:cNvSpPr>
+          <p:nvPr>
+            <p:ph type="sldNum" sz="quarter" idx="12"/>
+          </p:nvPr>
+        </p:nvSpPr>
+        <p:spPr/>
+        <p:txBody>
+          <a:bodyPr/>
+          <a:lstStyle/>
+          <a:p>
+            <a:fld id="{96E69268-9C8B-4EBF-A9EE-DC5DC2D48DC3}" type="slidenum">
+              <a:rPr lang="en-US" smtClean="0"/>
+              <a:pPr/>
+              <a:t>‹#›</a:t>
+            </a:fld>
             <a:endParaRPr lang="en-US"/>
           </a:p>
         </p:txBody>
@@ -13823,6 +15071,30 @@
           </a:p>
         </p:txBody>
       </p:sp>
+      <p:sp>
+        <p:nvSpPr>
+          <p:cNvPr id="5" name="Slide Number Placeholder 4"/>
+          <p:cNvSpPr>
+            <a:spLocks noGrp="1"/>
+          </p:cNvSpPr>
+          <p:nvPr>
+            <p:ph type="sldNum" sz="quarter" idx="12"/>
+          </p:nvPr>
+        </p:nvSpPr>
+        <p:spPr/>
+        <p:txBody>
+          <a:bodyPr/>
+          <a:lstStyle/>
+          <a:p>
+            <a:fld id="{96E69268-9C8B-4EBF-A9EE-DC5DC2D48DC3}" type="slidenum">
+              <a:rPr lang="en-US" smtClean="0"/>
+              <a:pPr/>
+              <a:t>‹#›</a:t>
+            </a:fld>
+            <a:endParaRPr lang="en-US"/>
+          </a:p>
+        </p:txBody>
+      </p:sp>
     </p:spTree>
     <p:extLst>
       <p:ext uri="{BB962C8B-B14F-4D97-AF65-F5344CB8AC3E}">
@@ -13896,6 +15168,30 @@
           </a:p>
         </p:txBody>
       </p:sp>
+      <p:sp>
+        <p:nvSpPr>
+          <p:cNvPr id="4" name="Slide Number Placeholder 3"/>
+          <p:cNvSpPr>
+            <a:spLocks noGrp="1"/>
+          </p:cNvSpPr>
+          <p:nvPr>
+            <p:ph type="sldNum" sz="quarter" idx="12"/>
+          </p:nvPr>
+        </p:nvSpPr>
+        <p:spPr/>
+        <p:txBody>
+          <a:bodyPr/>
+          <a:lstStyle/>
+          <a:p>
+            <a:fld id="{96E69268-9C8B-4EBF-A9EE-DC5DC2D48DC3}" type="slidenum">
+              <a:rPr lang="en-US" smtClean="0"/>
+              <a:pPr/>
+              <a:t>‹#›</a:t>
+            </a:fld>
+            <a:endParaRPr lang="en-US"/>
+          </a:p>
+        </p:txBody>
+      </p:sp>
     </p:spTree>
     <p:extLst>
       <p:ext uri="{BB962C8B-B14F-4D97-AF65-F5344CB8AC3E}">
@@ -14149,6 +15445,30 @@
           </a:p>
         </p:txBody>
       </p:sp>
+      <p:sp>
+        <p:nvSpPr>
+          <p:cNvPr id="7" name="Slide Number Placeholder 6"/>
+          <p:cNvSpPr>
+            <a:spLocks noGrp="1"/>
+          </p:cNvSpPr>
+          <p:nvPr>
+            <p:ph type="sldNum" sz="quarter" idx="12"/>
+          </p:nvPr>
+        </p:nvSpPr>
+        <p:spPr/>
+        <p:txBody>
+          <a:bodyPr/>
+          <a:lstStyle/>
+          <a:p>
+            <a:fld id="{96E69268-9C8B-4EBF-A9EE-DC5DC2D48DC3}" type="slidenum">
+              <a:rPr lang="en-US" smtClean="0"/>
+              <a:pPr/>
+              <a:t>‹#›</a:t>
+            </a:fld>
+            <a:endParaRPr lang="en-US"/>
+          </a:p>
+        </p:txBody>
+      </p:sp>
     </p:spTree>
     <p:extLst>
       <p:ext uri="{BB962C8B-B14F-4D97-AF65-F5344CB8AC3E}">
@@ -14402,6 +15722,30 @@
           </a:p>
         </p:txBody>
       </p:sp>
+      <p:sp>
+        <p:nvSpPr>
+          <p:cNvPr id="7" name="Slide Number Placeholder 6"/>
+          <p:cNvSpPr>
+            <a:spLocks noGrp="1"/>
+          </p:cNvSpPr>
+          <p:nvPr>
+            <p:ph type="sldNum" sz="quarter" idx="12"/>
+          </p:nvPr>
+        </p:nvSpPr>
+        <p:spPr/>
+        <p:txBody>
+          <a:bodyPr/>
+          <a:lstStyle/>
+          <a:p>
+            <a:fld id="{96E69268-9C8B-4EBF-A9EE-DC5DC2D48DC3}" type="slidenum">
+              <a:rPr lang="en-US" smtClean="0"/>
+              <a:pPr/>
+              <a:t>‹#›</a:t>
+            </a:fld>
+            <a:endParaRPr lang="en-US"/>
+          </a:p>
+        </p:txBody>
+      </p:sp>
     </p:spTree>
     <p:extLst>
       <p:ext uri="{BB962C8B-B14F-4D97-AF65-F5344CB8AC3E}">
@@ -14632,6 +15976,30 @@
           </a:p>
         </p:txBody>
       </p:sp>
+      <p:sp>
+        <p:nvSpPr>
+          <p:cNvPr id="7" name="Slide Number Placeholder 6"/>
+          <p:cNvSpPr>
+            <a:spLocks noGrp="1"/>
+          </p:cNvSpPr>
+          <p:nvPr>
+            <p:ph type="sldNum" sz="quarter" idx="12"/>
+          </p:nvPr>
+        </p:nvSpPr>
+        <p:spPr/>
+        <p:txBody>
+          <a:bodyPr/>
+          <a:lstStyle/>
+          <a:p>
+            <a:fld id="{96E69268-9C8B-4EBF-A9EE-DC5DC2D48DC3}" type="slidenum">
+              <a:rPr lang="en-US" smtClean="0"/>
+              <a:pPr/>
+              <a:t>‹#›</a:t>
+            </a:fld>
+            <a:endParaRPr lang="en-US"/>
+          </a:p>
+        </p:txBody>
+      </p:sp>
     </p:spTree>
     <p:extLst>
       <p:ext uri="{BB962C8B-B14F-4D97-AF65-F5344CB8AC3E}">
@@ -14778,6 +16146,30 @@
           </a:p>
         </p:txBody>
       </p:sp>
+      <p:sp>
+        <p:nvSpPr>
+          <p:cNvPr id="6" name="Slide Number Placeholder 5"/>
+          <p:cNvSpPr>
+            <a:spLocks noGrp="1"/>
+          </p:cNvSpPr>
+          <p:nvPr>
+            <p:ph type="sldNum" sz="quarter" idx="12"/>
+          </p:nvPr>
+        </p:nvSpPr>
+        <p:spPr/>
+        <p:txBody>
+          <a:bodyPr/>
+          <a:lstStyle/>
+          <a:p>
+            <a:fld id="{96E69268-9C8B-4EBF-A9EE-DC5DC2D48DC3}" type="slidenum">
+              <a:rPr lang="en-US" smtClean="0"/>
+              <a:pPr/>
+              <a:t>‹#›</a:t>
+            </a:fld>
+            <a:endParaRPr lang="en-US"/>
+          </a:p>
+        </p:txBody>
+      </p:sp>
     </p:spTree>
     <p:extLst>
       <p:ext uri="{BB962C8B-B14F-4D97-AF65-F5344CB8AC3E}">
@@ -14930,6 +16322,30 @@
           <a:bodyPr/>
           <a:lstStyle/>
           <a:p>
+            <a:endParaRPr lang="en-US"/>
+          </a:p>
+        </p:txBody>
+      </p:sp>
+      <p:sp>
+        <p:nvSpPr>
+          <p:cNvPr id="6" name="Slide Number Placeholder 5"/>
+          <p:cNvSpPr>
+            <a:spLocks noGrp="1"/>
+          </p:cNvSpPr>
+          <p:nvPr>
+            <p:ph type="sldNum" sz="quarter" idx="12"/>
+          </p:nvPr>
+        </p:nvSpPr>
+        <p:spPr/>
+        <p:txBody>
+          <a:bodyPr/>
+          <a:lstStyle/>
+          <a:p>
+            <a:fld id="{96E69268-9C8B-4EBF-A9EE-DC5DC2D48DC3}" type="slidenum">
+              <a:rPr lang="en-US" smtClean="0"/>
+              <a:pPr/>
+              <a:t>‹#›</a:t>
+            </a:fld>
             <a:endParaRPr lang="en-US"/>
           </a:p>
         </p:txBody>
@@ -15076,6 +16492,30 @@
           </a:p>
         </p:txBody>
       </p:sp>
+      <p:sp>
+        <p:nvSpPr>
+          <p:cNvPr id="5" name="Slide Number Placeholder 4"/>
+          <p:cNvSpPr>
+            <a:spLocks noGrp="1"/>
+          </p:cNvSpPr>
+          <p:nvPr>
+            <p:ph type="sldNum" sz="quarter" idx="12"/>
+          </p:nvPr>
+        </p:nvSpPr>
+        <p:spPr/>
+        <p:txBody>
+          <a:bodyPr/>
+          <a:lstStyle/>
+          <a:p>
+            <a:fld id="{96E69268-9C8B-4EBF-A9EE-DC5DC2D48DC3}" type="slidenum">
+              <a:rPr lang="en-US" smtClean="0"/>
+              <a:pPr/>
+              <a:t>‹#›</a:t>
+            </a:fld>
+            <a:endParaRPr lang="en-US"/>
+          </a:p>
+        </p:txBody>
+      </p:sp>
     </p:spTree>
     <p:extLst>
       <p:ext uri="{BB962C8B-B14F-4D97-AF65-F5344CB8AC3E}">
@@ -15380,6 +16820,30 @@
           </a:p>
         </p:txBody>
       </p:sp>
+      <p:sp>
+        <p:nvSpPr>
+          <p:cNvPr id="6" name="Slide Number Placeholder 5"/>
+          <p:cNvSpPr>
+            <a:spLocks noGrp="1"/>
+          </p:cNvSpPr>
+          <p:nvPr>
+            <p:ph type="sldNum" sz="quarter" idx="12"/>
+          </p:nvPr>
+        </p:nvSpPr>
+        <p:spPr/>
+        <p:txBody>
+          <a:bodyPr/>
+          <a:lstStyle/>
+          <a:p>
+            <a:fld id="{E5EDE275-BE14-4364-AEA2-5F5667C0FD49}" type="slidenum">
+              <a:rPr lang="en-US" smtClean="0"/>
+              <a:pPr/>
+              <a:t>‹#›</a:t>
+            </a:fld>
+            <a:endParaRPr lang="en-US"/>
+          </a:p>
+        </p:txBody>
+      </p:sp>
     </p:spTree>
     <p:extLst>
       <p:ext uri="{BB962C8B-B14F-4D97-AF65-F5344CB8AC3E}">
@@ -15598,6 +17062,30 @@
           </a:p>
         </p:txBody>
       </p:sp>
+      <p:sp>
+        <p:nvSpPr>
+          <p:cNvPr id="6" name="Slide Number Placeholder 5"/>
+          <p:cNvSpPr>
+            <a:spLocks noGrp="1"/>
+          </p:cNvSpPr>
+          <p:nvPr>
+            <p:ph type="sldNum" sz="quarter" idx="12"/>
+          </p:nvPr>
+        </p:nvSpPr>
+        <p:spPr/>
+        <p:txBody>
+          <a:bodyPr/>
+          <a:lstStyle/>
+          <a:p>
+            <a:fld id="{96E69268-9C8B-4EBF-A9EE-DC5DC2D48DC3}" type="slidenum">
+              <a:rPr lang="en-US" smtClean="0"/>
+              <a:pPr/>
+              <a:t>‹#›</a:t>
+            </a:fld>
+            <a:endParaRPr lang="en-US"/>
+          </a:p>
+        </p:txBody>
+      </p:sp>
     </p:spTree>
     <p:extLst>
       <p:ext uri="{BB962C8B-B14F-4D97-AF65-F5344CB8AC3E}">
@@ -15744,6 +17232,30 @@
           </a:p>
         </p:txBody>
       </p:sp>
+      <p:sp>
+        <p:nvSpPr>
+          <p:cNvPr id="6" name="Slide Number Placeholder 5"/>
+          <p:cNvSpPr>
+            <a:spLocks noGrp="1"/>
+          </p:cNvSpPr>
+          <p:nvPr>
+            <p:ph type="sldNum" sz="quarter" idx="12"/>
+          </p:nvPr>
+        </p:nvSpPr>
+        <p:spPr/>
+        <p:txBody>
+          <a:bodyPr/>
+          <a:lstStyle/>
+          <a:p>
+            <a:fld id="{96E69268-9C8B-4EBF-A9EE-DC5DC2D48DC3}" type="slidenum">
+              <a:rPr lang="en-US" smtClean="0"/>
+              <a:pPr/>
+              <a:t>‹#›</a:t>
+            </a:fld>
+            <a:endParaRPr lang="en-US"/>
+          </a:p>
+        </p:txBody>
+      </p:sp>
     </p:spTree>
     <p:extLst>
       <p:ext uri="{BB962C8B-B14F-4D97-AF65-F5344CB8AC3E}">
@@ -15967,6 +17479,30 @@
           </a:p>
         </p:txBody>
       </p:sp>
+      <p:sp>
+        <p:nvSpPr>
+          <p:cNvPr id="6" name="Slide Number Placeholder 5"/>
+          <p:cNvSpPr>
+            <a:spLocks noGrp="1"/>
+          </p:cNvSpPr>
+          <p:nvPr>
+            <p:ph type="sldNum" sz="quarter" idx="12"/>
+          </p:nvPr>
+        </p:nvSpPr>
+        <p:spPr/>
+        <p:txBody>
+          <a:bodyPr/>
+          <a:lstStyle/>
+          <a:p>
+            <a:fld id="{96E69268-9C8B-4EBF-A9EE-DC5DC2D48DC3}" type="slidenum">
+              <a:rPr lang="en-US" smtClean="0"/>
+              <a:pPr/>
+              <a:t>‹#›</a:t>
+            </a:fld>
+            <a:endParaRPr lang="en-US"/>
+          </a:p>
+        </p:txBody>
+      </p:sp>
     </p:spTree>
     <p:extLst>
       <p:ext uri="{BB962C8B-B14F-4D97-AF65-F5344CB8AC3E}">
@@ -16230,6 +17766,30 @@
           </a:p>
         </p:txBody>
       </p:sp>
+      <p:sp>
+        <p:nvSpPr>
+          <p:cNvPr id="7" name="Slide Number Placeholder 6"/>
+          <p:cNvSpPr>
+            <a:spLocks noGrp="1"/>
+          </p:cNvSpPr>
+          <p:nvPr>
+            <p:ph type="sldNum" sz="quarter" idx="12"/>
+          </p:nvPr>
+        </p:nvSpPr>
+        <p:spPr/>
+        <p:txBody>
+          <a:bodyPr/>
+          <a:lstStyle/>
+          <a:p>
+            <a:fld id="{96E69268-9C8B-4EBF-A9EE-DC5DC2D48DC3}" type="slidenum">
+              <a:rPr lang="en-US" smtClean="0"/>
+              <a:pPr/>
+              <a:t>‹#›</a:t>
+            </a:fld>
+            <a:endParaRPr lang="en-US"/>
+          </a:p>
+        </p:txBody>
+      </p:sp>
     </p:spTree>
     <p:extLst>
       <p:ext uri="{BB962C8B-B14F-4D97-AF65-F5344CB8AC3E}">
@@ -16627,6 +18187,30 @@
           </a:p>
         </p:txBody>
       </p:sp>
+      <p:sp>
+        <p:nvSpPr>
+          <p:cNvPr id="9" name="Slide Number Placeholder 8"/>
+          <p:cNvSpPr>
+            <a:spLocks noGrp="1"/>
+          </p:cNvSpPr>
+          <p:nvPr>
+            <p:ph type="sldNum" sz="quarter" idx="12"/>
+          </p:nvPr>
+        </p:nvSpPr>
+        <p:spPr/>
+        <p:txBody>
+          <a:bodyPr/>
+          <a:lstStyle/>
+          <a:p>
+            <a:fld id="{96E69268-9C8B-4EBF-A9EE-DC5DC2D48DC3}" type="slidenum">
+              <a:rPr lang="en-US" smtClean="0"/>
+              <a:pPr/>
+              <a:t>‹#›</a:t>
+            </a:fld>
+            <a:endParaRPr lang="en-US"/>
+          </a:p>
+        </p:txBody>
+      </p:sp>
     </p:spTree>
     <p:extLst>
       <p:ext uri="{BB962C8B-B14F-4D97-AF65-F5344CB8AC3E}">
@@ -16857,6 +18441,30 @@
           </a:p>
         </p:txBody>
       </p:sp>
+      <p:sp>
+        <p:nvSpPr>
+          <p:cNvPr id="7" name="Slide Number Placeholder 6"/>
+          <p:cNvSpPr>
+            <a:spLocks noGrp="1"/>
+          </p:cNvSpPr>
+          <p:nvPr>
+            <p:ph type="sldNum" sz="quarter" idx="12"/>
+          </p:nvPr>
+        </p:nvSpPr>
+        <p:spPr/>
+        <p:txBody>
+          <a:bodyPr/>
+          <a:lstStyle/>
+          <a:p>
+            <a:fld id="{96E69268-9C8B-4EBF-A9EE-DC5DC2D48DC3}" type="slidenum">
+              <a:rPr lang="en-US" smtClean="0"/>
+              <a:pPr/>
+              <a:t>‹#›</a:t>
+            </a:fld>
+            <a:endParaRPr lang="en-US"/>
+          </a:p>
+        </p:txBody>
+      </p:sp>
     </p:spTree>
     <p:extLst>
       <p:ext uri="{BB962C8B-B14F-4D97-AF65-F5344CB8AC3E}">
@@ -16954,6 +18562,30 @@
           <a:bodyPr/>
           <a:lstStyle/>
           <a:p>
+            <a:endParaRPr lang="en-US"/>
+          </a:p>
+        </p:txBody>
+      </p:sp>
+      <p:sp>
+        <p:nvSpPr>
+          <p:cNvPr id="5" name="Slide Number Placeholder 4"/>
+          <p:cNvSpPr>
+            <a:spLocks noGrp="1"/>
+          </p:cNvSpPr>
+          <p:nvPr>
+            <p:ph type="sldNum" sz="quarter" idx="12"/>
+          </p:nvPr>
+        </p:nvSpPr>
+        <p:spPr/>
+        <p:txBody>
+          <a:bodyPr/>
+          <a:lstStyle/>
+          <a:p>
+            <a:fld id="{96E69268-9C8B-4EBF-A9EE-DC5DC2D48DC3}" type="slidenum">
+              <a:rPr lang="en-US" smtClean="0"/>
+              <a:pPr/>
+              <a:t>‹#›</a:t>
+            </a:fld>
             <a:endParaRPr lang="en-US"/>
           </a:p>
         </p:txBody>
@@ -17070,6 +18702,30 @@
           </a:p>
         </p:txBody>
       </p:sp>
+      <p:sp>
+        <p:nvSpPr>
+          <p:cNvPr id="5" name="Slide Number Placeholder 4"/>
+          <p:cNvSpPr>
+            <a:spLocks noGrp="1"/>
+          </p:cNvSpPr>
+          <p:nvPr>
+            <p:ph type="sldNum" sz="quarter" idx="12"/>
+          </p:nvPr>
+        </p:nvSpPr>
+        <p:spPr/>
+        <p:txBody>
+          <a:bodyPr/>
+          <a:lstStyle/>
+          <a:p>
+            <a:fld id="{96E69268-9C8B-4EBF-A9EE-DC5DC2D48DC3}" type="slidenum">
+              <a:rPr lang="en-US" smtClean="0"/>
+              <a:pPr/>
+              <a:t>‹#›</a:t>
+            </a:fld>
+            <a:endParaRPr lang="en-US"/>
+          </a:p>
+        </p:txBody>
+      </p:sp>
     </p:spTree>
     <p:extLst>
       <p:ext uri="{BB962C8B-B14F-4D97-AF65-F5344CB8AC3E}">
@@ -17143,6 +18799,30 @@
           </a:p>
         </p:txBody>
       </p:sp>
+      <p:sp>
+        <p:nvSpPr>
+          <p:cNvPr id="4" name="Slide Number Placeholder 3"/>
+          <p:cNvSpPr>
+            <a:spLocks noGrp="1"/>
+          </p:cNvSpPr>
+          <p:nvPr>
+            <p:ph type="sldNum" sz="quarter" idx="12"/>
+          </p:nvPr>
+        </p:nvSpPr>
+        <p:spPr/>
+        <p:txBody>
+          <a:bodyPr/>
+          <a:lstStyle/>
+          <a:p>
+            <a:fld id="{96E69268-9C8B-4EBF-A9EE-DC5DC2D48DC3}" type="slidenum">
+              <a:rPr lang="en-US" smtClean="0"/>
+              <a:pPr/>
+              <a:t>‹#›</a:t>
+            </a:fld>
+            <a:endParaRPr lang="en-US"/>
+          </a:p>
+        </p:txBody>
+      </p:sp>
     </p:spTree>
     <p:extLst>
       <p:ext uri="{BB962C8B-B14F-4D97-AF65-F5344CB8AC3E}">
@@ -17396,6 +19076,30 @@
           </a:p>
         </p:txBody>
       </p:sp>
+      <p:sp>
+        <p:nvSpPr>
+          <p:cNvPr id="7" name="Slide Number Placeholder 6"/>
+          <p:cNvSpPr>
+            <a:spLocks noGrp="1"/>
+          </p:cNvSpPr>
+          <p:nvPr>
+            <p:ph type="sldNum" sz="quarter" idx="12"/>
+          </p:nvPr>
+        </p:nvSpPr>
+        <p:spPr/>
+        <p:txBody>
+          <a:bodyPr/>
+          <a:lstStyle/>
+          <a:p>
+            <a:fld id="{96E69268-9C8B-4EBF-A9EE-DC5DC2D48DC3}" type="slidenum">
+              <a:rPr lang="en-US" smtClean="0"/>
+              <a:pPr/>
+              <a:t>‹#›</a:t>
+            </a:fld>
+            <a:endParaRPr lang="en-US"/>
+          </a:p>
+        </p:txBody>
+      </p:sp>
     </p:spTree>
     <p:extLst>
       <p:ext uri="{BB962C8B-B14F-4D97-AF65-F5344CB8AC3E}">
@@ -17626,6 +19330,30 @@
           </a:p>
         </p:txBody>
       </p:sp>
+      <p:sp>
+        <p:nvSpPr>
+          <p:cNvPr id="7" name="Slide Number Placeholder 6"/>
+          <p:cNvSpPr>
+            <a:spLocks noGrp="1"/>
+          </p:cNvSpPr>
+          <p:nvPr>
+            <p:ph type="sldNum" sz="quarter" idx="12"/>
+          </p:nvPr>
+        </p:nvSpPr>
+        <p:spPr/>
+        <p:txBody>
+          <a:bodyPr/>
+          <a:lstStyle/>
+          <a:p>
+            <a:fld id="{96E69268-9C8B-4EBF-A9EE-DC5DC2D48DC3}" type="slidenum">
+              <a:rPr lang="en-US" smtClean="0"/>
+              <a:pPr/>
+              <a:t>‹#›</a:t>
+            </a:fld>
+            <a:endParaRPr lang="en-US"/>
+          </a:p>
+        </p:txBody>
+      </p:sp>
     </p:spTree>
     <p:extLst>
       <p:ext uri="{BB962C8B-B14F-4D97-AF65-F5344CB8AC3E}">
@@ -17772,6 +19500,30 @@
           </a:p>
         </p:txBody>
       </p:sp>
+      <p:sp>
+        <p:nvSpPr>
+          <p:cNvPr id="6" name="Slide Number Placeholder 5"/>
+          <p:cNvSpPr>
+            <a:spLocks noGrp="1"/>
+          </p:cNvSpPr>
+          <p:nvPr>
+            <p:ph type="sldNum" sz="quarter" idx="12"/>
+          </p:nvPr>
+        </p:nvSpPr>
+        <p:spPr/>
+        <p:txBody>
+          <a:bodyPr/>
+          <a:lstStyle/>
+          <a:p>
+            <a:fld id="{96E69268-9C8B-4EBF-A9EE-DC5DC2D48DC3}" type="slidenum">
+              <a:rPr lang="en-US" smtClean="0"/>
+              <a:pPr/>
+              <a:t>‹#›</a:t>
+            </a:fld>
+            <a:endParaRPr lang="en-US"/>
+          </a:p>
+        </p:txBody>
+      </p:sp>
     </p:spTree>
     <p:extLst>
       <p:ext uri="{BB962C8B-B14F-4D97-AF65-F5344CB8AC3E}">
@@ -17924,6 +19676,30 @@
           <a:bodyPr/>
           <a:lstStyle/>
           <a:p>
+            <a:endParaRPr lang="en-US"/>
+          </a:p>
+        </p:txBody>
+      </p:sp>
+      <p:sp>
+        <p:nvSpPr>
+          <p:cNvPr id="6" name="Slide Number Placeholder 5"/>
+          <p:cNvSpPr>
+            <a:spLocks noGrp="1"/>
+          </p:cNvSpPr>
+          <p:nvPr>
+            <p:ph type="sldNum" sz="quarter" idx="12"/>
+          </p:nvPr>
+        </p:nvSpPr>
+        <p:spPr/>
+        <p:txBody>
+          <a:bodyPr/>
+          <a:lstStyle/>
+          <a:p>
+            <a:fld id="{96E69268-9C8B-4EBF-A9EE-DC5DC2D48DC3}" type="slidenum">
+              <a:rPr lang="en-US" smtClean="0"/>
+              <a:pPr/>
+              <a:t>‹#›</a:t>
+            </a:fld>
             <a:endParaRPr lang="en-US"/>
           </a:p>
         </p:txBody>
@@ -18070,6 +19846,30 @@
           </a:p>
         </p:txBody>
       </p:sp>
+      <p:sp>
+        <p:nvSpPr>
+          <p:cNvPr id="5" name="Slide Number Placeholder 4"/>
+          <p:cNvSpPr>
+            <a:spLocks noGrp="1"/>
+          </p:cNvSpPr>
+          <p:nvPr>
+            <p:ph type="sldNum" sz="quarter" idx="12"/>
+          </p:nvPr>
+        </p:nvSpPr>
+        <p:spPr/>
+        <p:txBody>
+          <a:bodyPr/>
+          <a:lstStyle/>
+          <a:p>
+            <a:fld id="{96E69268-9C8B-4EBF-A9EE-DC5DC2D48DC3}" type="slidenum">
+              <a:rPr lang="en-US" smtClean="0"/>
+              <a:pPr/>
+              <a:t>‹#›</a:t>
+            </a:fld>
+            <a:endParaRPr lang="en-US"/>
+          </a:p>
+        </p:txBody>
+      </p:sp>
     </p:spTree>
     <p:extLst>
       <p:ext uri="{BB962C8B-B14F-4D97-AF65-F5344CB8AC3E}">
@@ -18308,6 +20108,30 @@
           </a:p>
         </p:txBody>
       </p:sp>
+      <p:sp>
+        <p:nvSpPr>
+          <p:cNvPr id="6" name="Slide Number Placeholder 5"/>
+          <p:cNvSpPr>
+            <a:spLocks noGrp="1"/>
+          </p:cNvSpPr>
+          <p:nvPr>
+            <p:ph type="sldNum" sz="quarter" idx="12"/>
+          </p:nvPr>
+        </p:nvSpPr>
+        <p:spPr/>
+        <p:txBody>
+          <a:bodyPr/>
+          <a:lstStyle/>
+          <a:p>
+            <a:fld id="{E5EDE275-BE14-4364-AEA2-5F5667C0FD49}" type="slidenum">
+              <a:rPr lang="en-US" smtClean="0"/>
+              <a:pPr/>
+              <a:t>‹#›</a:t>
+            </a:fld>
+            <a:endParaRPr lang="en-US"/>
+          </a:p>
+        </p:txBody>
+      </p:sp>
     </p:spTree>
     <p:extLst>
       <p:ext uri="{BB962C8B-B14F-4D97-AF65-F5344CB8AC3E}">
@@ -18526,6 +20350,30 @@
           </a:p>
         </p:txBody>
       </p:sp>
+      <p:sp>
+        <p:nvSpPr>
+          <p:cNvPr id="6" name="Slide Number Placeholder 5"/>
+          <p:cNvSpPr>
+            <a:spLocks noGrp="1"/>
+          </p:cNvSpPr>
+          <p:nvPr>
+            <p:ph type="sldNum" sz="quarter" idx="12"/>
+          </p:nvPr>
+        </p:nvSpPr>
+        <p:spPr/>
+        <p:txBody>
+          <a:bodyPr/>
+          <a:lstStyle/>
+          <a:p>
+            <a:fld id="{96E69268-9C8B-4EBF-A9EE-DC5DC2D48DC3}" type="slidenum">
+              <a:rPr lang="en-US" smtClean="0"/>
+              <a:pPr/>
+              <a:t>‹#›</a:t>
+            </a:fld>
+            <a:endParaRPr lang="en-US"/>
+          </a:p>
+        </p:txBody>
+      </p:sp>
     </p:spTree>
     <p:extLst>
       <p:ext uri="{BB962C8B-B14F-4D97-AF65-F5344CB8AC3E}">
@@ -18672,6 +20520,30 @@
           </a:p>
         </p:txBody>
       </p:sp>
+      <p:sp>
+        <p:nvSpPr>
+          <p:cNvPr id="6" name="Slide Number Placeholder 5"/>
+          <p:cNvSpPr>
+            <a:spLocks noGrp="1"/>
+          </p:cNvSpPr>
+          <p:nvPr>
+            <p:ph type="sldNum" sz="quarter" idx="12"/>
+          </p:nvPr>
+        </p:nvSpPr>
+        <p:spPr/>
+        <p:txBody>
+          <a:bodyPr/>
+          <a:lstStyle/>
+          <a:p>
+            <a:fld id="{96E69268-9C8B-4EBF-A9EE-DC5DC2D48DC3}" type="slidenum">
+              <a:rPr lang="en-US" smtClean="0"/>
+              <a:pPr/>
+              <a:t>‹#›</a:t>
+            </a:fld>
+            <a:endParaRPr lang="en-US"/>
+          </a:p>
+        </p:txBody>
+      </p:sp>
     </p:spTree>
     <p:extLst>
       <p:ext uri="{BB962C8B-B14F-4D97-AF65-F5344CB8AC3E}">
@@ -18818,6 +20690,30 @@
           </a:p>
         </p:txBody>
       </p:sp>
+      <p:sp>
+        <p:nvSpPr>
+          <p:cNvPr id="6" name="Slide Number Placeholder 5"/>
+          <p:cNvSpPr>
+            <a:spLocks noGrp="1"/>
+          </p:cNvSpPr>
+          <p:nvPr>
+            <p:ph type="sldNum" sz="quarter" idx="12"/>
+          </p:nvPr>
+        </p:nvSpPr>
+        <p:spPr/>
+        <p:txBody>
+          <a:bodyPr/>
+          <a:lstStyle/>
+          <a:p>
+            <a:fld id="{96E69268-9C8B-4EBF-A9EE-DC5DC2D48DC3}" type="slidenum">
+              <a:rPr lang="en-US" smtClean="0"/>
+              <a:pPr/>
+              <a:t>‹#›</a:t>
+            </a:fld>
+            <a:endParaRPr lang="en-US"/>
+          </a:p>
+        </p:txBody>
+      </p:sp>
     </p:spTree>
     <p:extLst>
       <p:ext uri="{BB962C8B-B14F-4D97-AF65-F5344CB8AC3E}">
@@ -19041,6 +20937,30 @@
           </a:p>
         </p:txBody>
       </p:sp>
+      <p:sp>
+        <p:nvSpPr>
+          <p:cNvPr id="6" name="Slide Number Placeholder 5"/>
+          <p:cNvSpPr>
+            <a:spLocks noGrp="1"/>
+          </p:cNvSpPr>
+          <p:nvPr>
+            <p:ph type="sldNum" sz="quarter" idx="12"/>
+          </p:nvPr>
+        </p:nvSpPr>
+        <p:spPr/>
+        <p:txBody>
+          <a:bodyPr/>
+          <a:lstStyle/>
+          <a:p>
+            <a:fld id="{96E69268-9C8B-4EBF-A9EE-DC5DC2D48DC3}" type="slidenum">
+              <a:rPr lang="en-US" smtClean="0"/>
+              <a:pPr/>
+              <a:t>‹#›</a:t>
+            </a:fld>
+            <a:endParaRPr lang="en-US"/>
+          </a:p>
+        </p:txBody>
+      </p:sp>
     </p:spTree>
     <p:extLst>
       <p:ext uri="{BB962C8B-B14F-4D97-AF65-F5344CB8AC3E}">
@@ -19304,6 +21224,30 @@
           </a:p>
         </p:txBody>
       </p:sp>
+      <p:sp>
+        <p:nvSpPr>
+          <p:cNvPr id="7" name="Slide Number Placeholder 6"/>
+          <p:cNvSpPr>
+            <a:spLocks noGrp="1"/>
+          </p:cNvSpPr>
+          <p:nvPr>
+            <p:ph type="sldNum" sz="quarter" idx="12"/>
+          </p:nvPr>
+        </p:nvSpPr>
+        <p:spPr/>
+        <p:txBody>
+          <a:bodyPr/>
+          <a:lstStyle/>
+          <a:p>
+            <a:fld id="{96E69268-9C8B-4EBF-A9EE-DC5DC2D48DC3}" type="slidenum">
+              <a:rPr lang="en-US" smtClean="0"/>
+              <a:pPr/>
+              <a:t>‹#›</a:t>
+            </a:fld>
+            <a:endParaRPr lang="en-US"/>
+          </a:p>
+        </p:txBody>
+      </p:sp>
     </p:spTree>
     <p:extLst>
       <p:ext uri="{BB962C8B-B14F-4D97-AF65-F5344CB8AC3E}">
@@ -19701,6 +21645,30 @@
           </a:p>
         </p:txBody>
       </p:sp>
+      <p:sp>
+        <p:nvSpPr>
+          <p:cNvPr id="9" name="Slide Number Placeholder 8"/>
+          <p:cNvSpPr>
+            <a:spLocks noGrp="1"/>
+          </p:cNvSpPr>
+          <p:nvPr>
+            <p:ph type="sldNum" sz="quarter" idx="12"/>
+          </p:nvPr>
+        </p:nvSpPr>
+        <p:spPr/>
+        <p:txBody>
+          <a:bodyPr/>
+          <a:lstStyle/>
+          <a:p>
+            <a:fld id="{96E69268-9C8B-4EBF-A9EE-DC5DC2D48DC3}" type="slidenum">
+              <a:rPr lang="en-US" smtClean="0"/>
+              <a:pPr/>
+              <a:t>‹#›</a:t>
+            </a:fld>
+            <a:endParaRPr lang="en-US"/>
+          </a:p>
+        </p:txBody>
+      </p:sp>
     </p:spTree>
     <p:extLst>
       <p:ext uri="{BB962C8B-B14F-4D97-AF65-F5344CB8AC3E}">
@@ -19802,6 +21770,30 @@
           </a:p>
         </p:txBody>
       </p:sp>
+      <p:sp>
+        <p:nvSpPr>
+          <p:cNvPr id="5" name="Slide Number Placeholder 4"/>
+          <p:cNvSpPr>
+            <a:spLocks noGrp="1"/>
+          </p:cNvSpPr>
+          <p:nvPr>
+            <p:ph type="sldNum" sz="quarter" idx="12"/>
+          </p:nvPr>
+        </p:nvSpPr>
+        <p:spPr/>
+        <p:txBody>
+          <a:bodyPr/>
+          <a:lstStyle/>
+          <a:p>
+            <a:fld id="{96E69268-9C8B-4EBF-A9EE-DC5DC2D48DC3}" type="slidenum">
+              <a:rPr lang="en-US" smtClean="0"/>
+              <a:pPr/>
+              <a:t>‹#›</a:t>
+            </a:fld>
+            <a:endParaRPr lang="en-US"/>
+          </a:p>
+        </p:txBody>
+      </p:sp>
     </p:spTree>
     <p:extLst>
       <p:ext uri="{BB962C8B-B14F-4D97-AF65-F5344CB8AC3E}">
@@ -19875,6 +21867,30 @@
           </a:p>
         </p:txBody>
       </p:sp>
+      <p:sp>
+        <p:nvSpPr>
+          <p:cNvPr id="4" name="Slide Number Placeholder 3"/>
+          <p:cNvSpPr>
+            <a:spLocks noGrp="1"/>
+          </p:cNvSpPr>
+          <p:nvPr>
+            <p:ph type="sldNum" sz="quarter" idx="12"/>
+          </p:nvPr>
+        </p:nvSpPr>
+        <p:spPr/>
+        <p:txBody>
+          <a:bodyPr/>
+          <a:lstStyle/>
+          <a:p>
+            <a:fld id="{96E69268-9C8B-4EBF-A9EE-DC5DC2D48DC3}" type="slidenum">
+              <a:rPr lang="en-US" smtClean="0"/>
+              <a:pPr/>
+              <a:t>‹#›</a:t>
+            </a:fld>
+            <a:endParaRPr lang="en-US"/>
+          </a:p>
+        </p:txBody>
+      </p:sp>
     </p:spTree>
     <p:extLst>
       <p:ext uri="{BB962C8B-B14F-4D97-AF65-F5344CB8AC3E}">
@@ -20128,6 +22144,30 @@
           </a:p>
         </p:txBody>
       </p:sp>
+      <p:sp>
+        <p:nvSpPr>
+          <p:cNvPr id="7" name="Slide Number Placeholder 6"/>
+          <p:cNvSpPr>
+            <a:spLocks noGrp="1"/>
+          </p:cNvSpPr>
+          <p:nvPr>
+            <p:ph type="sldNum" sz="quarter" idx="12"/>
+          </p:nvPr>
+        </p:nvSpPr>
+        <p:spPr/>
+        <p:txBody>
+          <a:bodyPr/>
+          <a:lstStyle/>
+          <a:p>
+            <a:fld id="{96E69268-9C8B-4EBF-A9EE-DC5DC2D48DC3}" type="slidenum">
+              <a:rPr lang="en-US" smtClean="0"/>
+              <a:pPr/>
+              <a:t>‹#›</a:t>
+            </a:fld>
+            <a:endParaRPr lang="en-US"/>
+          </a:p>
+        </p:txBody>
+      </p:sp>
     </p:spTree>
     <p:extLst>
       <p:ext uri="{BB962C8B-B14F-4D97-AF65-F5344CB8AC3E}">
@@ -20358,6 +22398,30 @@
           </a:p>
         </p:txBody>
       </p:sp>
+      <p:sp>
+        <p:nvSpPr>
+          <p:cNvPr id="7" name="Slide Number Placeholder 6"/>
+          <p:cNvSpPr>
+            <a:spLocks noGrp="1"/>
+          </p:cNvSpPr>
+          <p:nvPr>
+            <p:ph type="sldNum" sz="quarter" idx="12"/>
+          </p:nvPr>
+        </p:nvSpPr>
+        <p:spPr/>
+        <p:txBody>
+          <a:bodyPr/>
+          <a:lstStyle/>
+          <a:p>
+            <a:fld id="{96E69268-9C8B-4EBF-A9EE-DC5DC2D48DC3}" type="slidenum">
+              <a:rPr lang="en-US" smtClean="0"/>
+              <a:pPr/>
+              <a:t>‹#›</a:t>
+            </a:fld>
+            <a:endParaRPr lang="en-US"/>
+          </a:p>
+        </p:txBody>
+      </p:sp>
     </p:spTree>
     <p:extLst>
       <p:ext uri="{BB962C8B-B14F-4D97-AF65-F5344CB8AC3E}">
@@ -20504,6 +22568,30 @@
           </a:p>
         </p:txBody>
       </p:sp>
+      <p:sp>
+        <p:nvSpPr>
+          <p:cNvPr id="6" name="Slide Number Placeholder 5"/>
+          <p:cNvSpPr>
+            <a:spLocks noGrp="1"/>
+          </p:cNvSpPr>
+          <p:nvPr>
+            <p:ph type="sldNum" sz="quarter" idx="12"/>
+          </p:nvPr>
+        </p:nvSpPr>
+        <p:spPr/>
+        <p:txBody>
+          <a:bodyPr/>
+          <a:lstStyle/>
+          <a:p>
+            <a:fld id="{96E69268-9C8B-4EBF-A9EE-DC5DC2D48DC3}" type="slidenum">
+              <a:rPr lang="en-US" smtClean="0"/>
+              <a:pPr/>
+              <a:t>‹#›</a:t>
+            </a:fld>
+            <a:endParaRPr lang="en-US"/>
+          </a:p>
+        </p:txBody>
+      </p:sp>
     </p:spTree>
     <p:extLst>
       <p:ext uri="{BB962C8B-B14F-4D97-AF65-F5344CB8AC3E}">
@@ -20660,6 +22748,30 @@
           </a:p>
         </p:txBody>
       </p:sp>
+      <p:sp>
+        <p:nvSpPr>
+          <p:cNvPr id="6" name="Slide Number Placeholder 5"/>
+          <p:cNvSpPr>
+            <a:spLocks noGrp="1"/>
+          </p:cNvSpPr>
+          <p:nvPr>
+            <p:ph type="sldNum" sz="quarter" idx="12"/>
+          </p:nvPr>
+        </p:nvSpPr>
+        <p:spPr/>
+        <p:txBody>
+          <a:bodyPr/>
+          <a:lstStyle/>
+          <a:p>
+            <a:fld id="{96E69268-9C8B-4EBF-A9EE-DC5DC2D48DC3}" type="slidenum">
+              <a:rPr lang="en-US" smtClean="0"/>
+              <a:pPr/>
+              <a:t>‹#›</a:t>
+            </a:fld>
+            <a:endParaRPr lang="en-US"/>
+          </a:p>
+        </p:txBody>
+      </p:sp>
     </p:spTree>
     <p:extLst>
       <p:ext uri="{BB962C8B-B14F-4D97-AF65-F5344CB8AC3E}">
@@ -20812,6 +22924,30 @@
           <a:bodyPr/>
           <a:lstStyle/>
           <a:p>
+            <a:endParaRPr lang="en-US"/>
+          </a:p>
+        </p:txBody>
+      </p:sp>
+      <p:sp>
+        <p:nvSpPr>
+          <p:cNvPr id="6" name="Slide Number Placeholder 5"/>
+          <p:cNvSpPr>
+            <a:spLocks noGrp="1"/>
+          </p:cNvSpPr>
+          <p:nvPr>
+            <p:ph type="sldNum" sz="quarter" idx="12"/>
+          </p:nvPr>
+        </p:nvSpPr>
+        <p:spPr/>
+        <p:txBody>
+          <a:bodyPr/>
+          <a:lstStyle/>
+          <a:p>
+            <a:fld id="{96E69268-9C8B-4EBF-A9EE-DC5DC2D48DC3}" type="slidenum">
+              <a:rPr lang="en-US" smtClean="0"/>
+              <a:pPr/>
+              <a:t>‹#›</a:t>
+            </a:fld>
             <a:endParaRPr lang="en-US"/>
           </a:p>
         </p:txBody>
@@ -20958,6 +23094,30 @@
           </a:p>
         </p:txBody>
       </p:sp>
+      <p:sp>
+        <p:nvSpPr>
+          <p:cNvPr id="5" name="Slide Number Placeholder 4"/>
+          <p:cNvSpPr>
+            <a:spLocks noGrp="1"/>
+          </p:cNvSpPr>
+          <p:nvPr>
+            <p:ph type="sldNum" sz="quarter" idx="12"/>
+          </p:nvPr>
+        </p:nvSpPr>
+        <p:spPr/>
+        <p:txBody>
+          <a:bodyPr/>
+          <a:lstStyle/>
+          <a:p>
+            <a:fld id="{96E69268-9C8B-4EBF-A9EE-DC5DC2D48DC3}" type="slidenum">
+              <a:rPr lang="en-US" smtClean="0"/>
+              <a:pPr/>
+              <a:t>‹#›</a:t>
+            </a:fld>
+            <a:endParaRPr lang="en-US"/>
+          </a:p>
+        </p:txBody>
+      </p:sp>
     </p:spTree>
     <p:extLst>
       <p:ext uri="{BB962C8B-B14F-4D97-AF65-F5344CB8AC3E}">
@@ -21196,6 +23356,30 @@
           </a:p>
         </p:txBody>
       </p:sp>
+      <p:sp>
+        <p:nvSpPr>
+          <p:cNvPr id="6" name="Slide Number Placeholder 5"/>
+          <p:cNvSpPr>
+            <a:spLocks noGrp="1"/>
+          </p:cNvSpPr>
+          <p:nvPr>
+            <p:ph type="sldNum" sz="quarter" idx="12"/>
+          </p:nvPr>
+        </p:nvSpPr>
+        <p:spPr/>
+        <p:txBody>
+          <a:bodyPr/>
+          <a:lstStyle/>
+          <a:p>
+            <a:fld id="{E5EDE275-BE14-4364-AEA2-5F5667C0FD49}" type="slidenum">
+              <a:rPr lang="en-US" smtClean="0"/>
+              <a:pPr/>
+              <a:t>‹#›</a:t>
+            </a:fld>
+            <a:endParaRPr lang="en-US"/>
+          </a:p>
+        </p:txBody>
+      </p:sp>
     </p:spTree>
     <p:extLst>
       <p:ext uri="{BB962C8B-B14F-4D97-AF65-F5344CB8AC3E}">
@@ -21414,6 +23598,30 @@
           </a:p>
         </p:txBody>
       </p:sp>
+      <p:sp>
+        <p:nvSpPr>
+          <p:cNvPr id="6" name="Slide Number Placeholder 5"/>
+          <p:cNvSpPr>
+            <a:spLocks noGrp="1"/>
+          </p:cNvSpPr>
+          <p:nvPr>
+            <p:ph type="sldNum" sz="quarter" idx="12"/>
+          </p:nvPr>
+        </p:nvSpPr>
+        <p:spPr/>
+        <p:txBody>
+          <a:bodyPr/>
+          <a:lstStyle/>
+          <a:p>
+            <a:fld id="{96E69268-9C8B-4EBF-A9EE-DC5DC2D48DC3}" type="slidenum">
+              <a:rPr lang="en-US" smtClean="0"/>
+              <a:pPr/>
+              <a:t>‹#›</a:t>
+            </a:fld>
+            <a:endParaRPr lang="en-US"/>
+          </a:p>
+        </p:txBody>
+      </p:sp>
     </p:spTree>
     <p:extLst>
       <p:ext uri="{BB962C8B-B14F-4D97-AF65-F5344CB8AC3E}">
@@ -21560,6 +23768,30 @@
           </a:p>
         </p:txBody>
       </p:sp>
+      <p:sp>
+        <p:nvSpPr>
+          <p:cNvPr id="6" name="Slide Number Placeholder 5"/>
+          <p:cNvSpPr>
+            <a:spLocks noGrp="1"/>
+          </p:cNvSpPr>
+          <p:nvPr>
+            <p:ph type="sldNum" sz="quarter" idx="12"/>
+          </p:nvPr>
+        </p:nvSpPr>
+        <p:spPr/>
+        <p:txBody>
+          <a:bodyPr/>
+          <a:lstStyle/>
+          <a:p>
+            <a:fld id="{96E69268-9C8B-4EBF-A9EE-DC5DC2D48DC3}" type="slidenum">
+              <a:rPr lang="en-US" smtClean="0"/>
+              <a:pPr/>
+              <a:t>‹#›</a:t>
+            </a:fld>
+            <a:endParaRPr lang="en-US"/>
+          </a:p>
+        </p:txBody>
+      </p:sp>
     </p:spTree>
     <p:extLst>
       <p:ext uri="{BB962C8B-B14F-4D97-AF65-F5344CB8AC3E}">
@@ -21783,6 +24015,30 @@
           </a:p>
         </p:txBody>
       </p:sp>
+      <p:sp>
+        <p:nvSpPr>
+          <p:cNvPr id="6" name="Slide Number Placeholder 5"/>
+          <p:cNvSpPr>
+            <a:spLocks noGrp="1"/>
+          </p:cNvSpPr>
+          <p:nvPr>
+            <p:ph type="sldNum" sz="quarter" idx="12"/>
+          </p:nvPr>
+        </p:nvSpPr>
+        <p:spPr/>
+        <p:txBody>
+          <a:bodyPr/>
+          <a:lstStyle/>
+          <a:p>
+            <a:fld id="{96E69268-9C8B-4EBF-A9EE-DC5DC2D48DC3}" type="slidenum">
+              <a:rPr lang="en-US" smtClean="0"/>
+              <a:pPr/>
+              <a:t>‹#›</a:t>
+            </a:fld>
+            <a:endParaRPr lang="en-US"/>
+          </a:p>
+        </p:txBody>
+      </p:sp>
     </p:spTree>
     <p:extLst>
       <p:ext uri="{BB962C8B-B14F-4D97-AF65-F5344CB8AC3E}">
@@ -22046,6 +24302,30 @@
           </a:p>
         </p:txBody>
       </p:sp>
+      <p:sp>
+        <p:nvSpPr>
+          <p:cNvPr id="7" name="Slide Number Placeholder 6"/>
+          <p:cNvSpPr>
+            <a:spLocks noGrp="1"/>
+          </p:cNvSpPr>
+          <p:nvPr>
+            <p:ph type="sldNum" sz="quarter" idx="12"/>
+          </p:nvPr>
+        </p:nvSpPr>
+        <p:spPr/>
+        <p:txBody>
+          <a:bodyPr/>
+          <a:lstStyle/>
+          <a:p>
+            <a:fld id="{96E69268-9C8B-4EBF-A9EE-DC5DC2D48DC3}" type="slidenum">
+              <a:rPr lang="en-US" smtClean="0"/>
+              <a:pPr/>
+              <a:t>‹#›</a:t>
+            </a:fld>
+            <a:endParaRPr lang="en-US"/>
+          </a:p>
+        </p:txBody>
+      </p:sp>
     </p:spTree>
     <p:extLst>
       <p:ext uri="{BB962C8B-B14F-4D97-AF65-F5344CB8AC3E}">
@@ -22443,6 +24723,30 @@
           </a:p>
         </p:txBody>
       </p:sp>
+      <p:sp>
+        <p:nvSpPr>
+          <p:cNvPr id="9" name="Slide Number Placeholder 8"/>
+          <p:cNvSpPr>
+            <a:spLocks noGrp="1"/>
+          </p:cNvSpPr>
+          <p:nvPr>
+            <p:ph type="sldNum" sz="quarter" idx="12"/>
+          </p:nvPr>
+        </p:nvSpPr>
+        <p:spPr/>
+        <p:txBody>
+          <a:bodyPr/>
+          <a:lstStyle/>
+          <a:p>
+            <a:fld id="{96E69268-9C8B-4EBF-A9EE-DC5DC2D48DC3}" type="slidenum">
+              <a:rPr lang="en-US" smtClean="0"/>
+              <a:pPr/>
+              <a:t>‹#›</a:t>
+            </a:fld>
+            <a:endParaRPr lang="en-US"/>
+          </a:p>
+        </p:txBody>
+      </p:sp>
     </p:spTree>
     <p:extLst>
       <p:ext uri="{BB962C8B-B14F-4D97-AF65-F5344CB8AC3E}">
@@ -22544,6 +24848,30 @@
           </a:p>
         </p:txBody>
       </p:sp>
+      <p:sp>
+        <p:nvSpPr>
+          <p:cNvPr id="5" name="Slide Number Placeholder 4"/>
+          <p:cNvSpPr>
+            <a:spLocks noGrp="1"/>
+          </p:cNvSpPr>
+          <p:nvPr>
+            <p:ph type="sldNum" sz="quarter" idx="12"/>
+          </p:nvPr>
+        </p:nvSpPr>
+        <p:spPr/>
+        <p:txBody>
+          <a:bodyPr/>
+          <a:lstStyle/>
+          <a:p>
+            <a:fld id="{96E69268-9C8B-4EBF-A9EE-DC5DC2D48DC3}" type="slidenum">
+              <a:rPr lang="en-US" smtClean="0"/>
+              <a:pPr/>
+              <a:t>‹#›</a:t>
+            </a:fld>
+            <a:endParaRPr lang="en-US"/>
+          </a:p>
+        </p:txBody>
+      </p:sp>
     </p:spTree>
     <p:extLst>
       <p:ext uri="{BB962C8B-B14F-4D97-AF65-F5344CB8AC3E}">
@@ -22617,6 +24945,30 @@
           </a:p>
         </p:txBody>
       </p:sp>
+      <p:sp>
+        <p:nvSpPr>
+          <p:cNvPr id="4" name="Slide Number Placeholder 3"/>
+          <p:cNvSpPr>
+            <a:spLocks noGrp="1"/>
+          </p:cNvSpPr>
+          <p:nvPr>
+            <p:ph type="sldNum" sz="quarter" idx="12"/>
+          </p:nvPr>
+        </p:nvSpPr>
+        <p:spPr/>
+        <p:txBody>
+          <a:bodyPr/>
+          <a:lstStyle/>
+          <a:p>
+            <a:fld id="{96E69268-9C8B-4EBF-A9EE-DC5DC2D48DC3}" type="slidenum">
+              <a:rPr lang="en-US" smtClean="0"/>
+              <a:pPr/>
+              <a:t>‹#›</a:t>
+            </a:fld>
+            <a:endParaRPr lang="en-US"/>
+          </a:p>
+        </p:txBody>
+      </p:sp>
     </p:spTree>
     <p:extLst>
       <p:ext uri="{BB962C8B-B14F-4D97-AF65-F5344CB8AC3E}">
@@ -22866,6 +25218,30 @@
           <a:bodyPr/>
           <a:lstStyle/>
           <a:p>
+            <a:endParaRPr lang="en-US"/>
+          </a:p>
+        </p:txBody>
+      </p:sp>
+      <p:sp>
+        <p:nvSpPr>
+          <p:cNvPr id="7" name="Slide Number Placeholder 6"/>
+          <p:cNvSpPr>
+            <a:spLocks noGrp="1"/>
+          </p:cNvSpPr>
+          <p:nvPr>
+            <p:ph type="sldNum" sz="quarter" idx="12"/>
+          </p:nvPr>
+        </p:nvSpPr>
+        <p:spPr/>
+        <p:txBody>
+          <a:bodyPr/>
+          <a:lstStyle/>
+          <a:p>
+            <a:fld id="{96E69268-9C8B-4EBF-A9EE-DC5DC2D48DC3}" type="slidenum">
+              <a:rPr lang="en-US" smtClean="0"/>
+              <a:pPr/>
+              <a:t>‹#›</a:t>
+            </a:fld>
             <a:endParaRPr lang="en-US"/>
           </a:p>
         </p:txBody>
@@ -23012,6 +25388,30 @@
           </a:p>
         </p:txBody>
       </p:sp>
+      <p:sp>
+        <p:nvSpPr>
+          <p:cNvPr id="5" name="Slide Number Placeholder 4"/>
+          <p:cNvSpPr>
+            <a:spLocks noGrp="1"/>
+          </p:cNvSpPr>
+          <p:nvPr>
+            <p:ph type="sldNum" sz="quarter" idx="12"/>
+          </p:nvPr>
+        </p:nvSpPr>
+        <p:spPr/>
+        <p:txBody>
+          <a:bodyPr/>
+          <a:lstStyle/>
+          <a:p>
+            <a:fld id="{96E69268-9C8B-4EBF-A9EE-DC5DC2D48DC3}" type="slidenum">
+              <a:rPr lang="en-US" smtClean="0"/>
+              <a:pPr/>
+              <a:t>‹#›</a:t>
+            </a:fld>
+            <a:endParaRPr lang="en-US"/>
+          </a:p>
+        </p:txBody>
+      </p:sp>
     </p:spTree>
     <p:extLst>
       <p:ext uri="{BB962C8B-B14F-4D97-AF65-F5344CB8AC3E}">
@@ -23242,6 +25642,30 @@
           </a:p>
         </p:txBody>
       </p:sp>
+      <p:sp>
+        <p:nvSpPr>
+          <p:cNvPr id="7" name="Slide Number Placeholder 6"/>
+          <p:cNvSpPr>
+            <a:spLocks noGrp="1"/>
+          </p:cNvSpPr>
+          <p:nvPr>
+            <p:ph type="sldNum" sz="quarter" idx="12"/>
+          </p:nvPr>
+        </p:nvSpPr>
+        <p:spPr/>
+        <p:txBody>
+          <a:bodyPr/>
+          <a:lstStyle/>
+          <a:p>
+            <a:fld id="{96E69268-9C8B-4EBF-A9EE-DC5DC2D48DC3}" type="slidenum">
+              <a:rPr lang="en-US" smtClean="0"/>
+              <a:pPr/>
+              <a:t>‹#›</a:t>
+            </a:fld>
+            <a:endParaRPr lang="en-US"/>
+          </a:p>
+        </p:txBody>
+      </p:sp>
     </p:spTree>
     <p:extLst>
       <p:ext uri="{BB962C8B-B14F-4D97-AF65-F5344CB8AC3E}">
@@ -23388,6 +25812,30 @@
           </a:p>
         </p:txBody>
       </p:sp>
+      <p:sp>
+        <p:nvSpPr>
+          <p:cNvPr id="6" name="Slide Number Placeholder 5"/>
+          <p:cNvSpPr>
+            <a:spLocks noGrp="1"/>
+          </p:cNvSpPr>
+          <p:nvPr>
+            <p:ph type="sldNum" sz="quarter" idx="12"/>
+          </p:nvPr>
+        </p:nvSpPr>
+        <p:spPr/>
+        <p:txBody>
+          <a:bodyPr/>
+          <a:lstStyle/>
+          <a:p>
+            <a:fld id="{96E69268-9C8B-4EBF-A9EE-DC5DC2D48DC3}" type="slidenum">
+              <a:rPr lang="en-US" smtClean="0"/>
+              <a:pPr/>
+              <a:t>‹#›</a:t>
+            </a:fld>
+            <a:endParaRPr lang="en-US"/>
+          </a:p>
+        </p:txBody>
+      </p:sp>
     </p:spTree>
     <p:extLst>
       <p:ext uri="{BB962C8B-B14F-4D97-AF65-F5344CB8AC3E}">
@@ -23540,6 +25988,30 @@
           <a:bodyPr/>
           <a:lstStyle/>
           <a:p>
+            <a:endParaRPr lang="en-US"/>
+          </a:p>
+        </p:txBody>
+      </p:sp>
+      <p:sp>
+        <p:nvSpPr>
+          <p:cNvPr id="6" name="Slide Number Placeholder 5"/>
+          <p:cNvSpPr>
+            <a:spLocks noGrp="1"/>
+          </p:cNvSpPr>
+          <p:nvPr>
+            <p:ph type="sldNum" sz="quarter" idx="12"/>
+          </p:nvPr>
+        </p:nvSpPr>
+        <p:spPr/>
+        <p:txBody>
+          <a:bodyPr/>
+          <a:lstStyle/>
+          <a:p>
+            <a:fld id="{96E69268-9C8B-4EBF-A9EE-DC5DC2D48DC3}" type="slidenum">
+              <a:rPr lang="en-US" smtClean="0"/>
+              <a:pPr/>
+              <a:t>‹#›</a:t>
+            </a:fld>
             <a:endParaRPr lang="en-US"/>
           </a:p>
         </p:txBody>
@@ -23686,6 +26158,30 @@
           </a:p>
         </p:txBody>
       </p:sp>
+      <p:sp>
+        <p:nvSpPr>
+          <p:cNvPr id="5" name="Slide Number Placeholder 4"/>
+          <p:cNvSpPr>
+            <a:spLocks noGrp="1"/>
+          </p:cNvSpPr>
+          <p:nvPr>
+            <p:ph type="sldNum" sz="quarter" idx="12"/>
+          </p:nvPr>
+        </p:nvSpPr>
+        <p:spPr/>
+        <p:txBody>
+          <a:bodyPr/>
+          <a:lstStyle/>
+          <a:p>
+            <a:fld id="{96E69268-9C8B-4EBF-A9EE-DC5DC2D48DC3}" type="slidenum">
+              <a:rPr lang="en-US" smtClean="0"/>
+              <a:pPr/>
+              <a:t>‹#›</a:t>
+            </a:fld>
+            <a:endParaRPr lang="en-US"/>
+          </a:p>
+        </p:txBody>
+      </p:sp>
     </p:spTree>
     <p:extLst>
       <p:ext uri="{BB962C8B-B14F-4D97-AF65-F5344CB8AC3E}">
@@ -23716,6 +26212,50 @@
           <a:chExt cx="0" cy="0"/>
         </a:xfrm>
       </p:grpSpPr>
+      <p:sp>
+        <p:nvSpPr>
+          <p:cNvPr id="4" name="正方形/長方形 3">
+            <a:extLst>
+              <a:ext uri="{FF2B5EF4-FFF2-40B4-BE49-F238E27FC236}">
+                <a16:creationId xmlns:a16="http://schemas.microsoft.com/office/drawing/2014/main" id="{97592267-AFE0-48A2-BD7B-22929B4C73D1}"/>
+              </a:ext>
+            </a:extLst>
+          </p:cNvPr>
+          <p:cNvSpPr/>
+          <p:nvPr userDrawn="1"/>
+        </p:nvSpPr>
+        <p:spPr bwMode="gray">
+          <a:xfrm>
+            <a:off x="422636" y="1"/>
+            <a:ext cx="4098316" cy="302113"/>
+          </a:xfrm>
+          <a:prstGeom prst="rect">
+            <a:avLst/>
+          </a:prstGeom>
+          <a:solidFill>
+            <a:srgbClr val="004CA0"/>
+          </a:solidFill>
+          <a:ln w="12700" algn="ctr">
+            <a:solidFill>
+              <a:srgbClr val="004CA0"/>
+            </a:solidFill>
+            <a:miter lim="800000"/>
+            <a:headEnd/>
+            <a:tailEnd/>
+          </a:ln>
+        </p:spPr>
+        <p:txBody>
+          <a:bodyPr wrap="square" lIns="88900" tIns="88900" rIns="88900" bIns="88900" rtlCol="0" anchor="ctr"/>
+          <a:lstStyle/>
+          <a:p>
+            <a:pPr algn="ctr">
+              <a:buFont typeface="Wingdings 2" pitchFamily="18" charset="2"/>
+              <a:buNone/>
+            </a:pPr>
+            <a:endParaRPr kumimoji="1" lang="ja-JP" altLang="en-US" sz="1200" dirty="0"/>
+          </a:p>
+        </p:txBody>
+      </p:sp>
       <p:graphicFrame>
         <p:nvGraphicFramePr>
           <p:cNvPr id="3" name="オブジェクト 2" hidden="1"/>
@@ -24001,6 +26541,50 @@
           </a:p>
         </p:txBody>
       </p:sp>
+      <p:sp>
+        <p:nvSpPr>
+          <p:cNvPr id="5" name="正方形/長方形 4">
+            <a:extLst>
+              <a:ext uri="{FF2B5EF4-FFF2-40B4-BE49-F238E27FC236}">
+                <a16:creationId xmlns:a16="http://schemas.microsoft.com/office/drawing/2014/main" id="{F7DDB4C1-4417-4C78-93DE-58AB1D267C10}"/>
+              </a:ext>
+            </a:extLst>
+          </p:cNvPr>
+          <p:cNvSpPr/>
+          <p:nvPr userDrawn="1"/>
+        </p:nvSpPr>
+        <p:spPr bwMode="gray">
+          <a:xfrm>
+            <a:off x="5388143" y="6777038"/>
+            <a:ext cx="4098316" cy="80962"/>
+          </a:xfrm>
+          <a:prstGeom prst="rect">
+            <a:avLst/>
+          </a:prstGeom>
+          <a:solidFill>
+            <a:srgbClr val="004CA0"/>
+          </a:solidFill>
+          <a:ln w="12700" algn="ctr">
+            <a:solidFill>
+              <a:srgbClr val="004CA0"/>
+            </a:solidFill>
+            <a:miter lim="800000"/>
+            <a:headEnd/>
+            <a:tailEnd/>
+          </a:ln>
+        </p:spPr>
+        <p:txBody>
+          <a:bodyPr wrap="square" lIns="88900" tIns="88900" rIns="88900" bIns="88900" rtlCol="0" anchor="ctr"/>
+          <a:lstStyle/>
+          <a:p>
+            <a:pPr algn="ctr">
+              <a:buFont typeface="Wingdings 2" pitchFamily="18" charset="2"/>
+              <a:buNone/>
+            </a:pPr>
+            <a:endParaRPr kumimoji="1" lang="ja-JP" altLang="en-US" sz="1200" dirty="0"/>
+          </a:p>
+        </p:txBody>
+      </p:sp>
     </p:spTree>
     <p:extLst>
       <p:ext uri="{BB962C8B-B14F-4D97-AF65-F5344CB8AC3E}">
@@ -24239,6 +26823,30 @@
           </a:p>
         </p:txBody>
       </p:sp>
+      <p:sp>
+        <p:nvSpPr>
+          <p:cNvPr id="6" name="Slide Number Placeholder 5"/>
+          <p:cNvSpPr>
+            <a:spLocks noGrp="1"/>
+          </p:cNvSpPr>
+          <p:nvPr>
+            <p:ph type="sldNum" sz="quarter" idx="12"/>
+          </p:nvPr>
+        </p:nvSpPr>
+        <p:spPr/>
+        <p:txBody>
+          <a:bodyPr/>
+          <a:lstStyle/>
+          <a:p>
+            <a:fld id="{E5EDE275-BE14-4364-AEA2-5F5667C0FD49}" type="slidenum">
+              <a:rPr lang="en-US" smtClean="0"/>
+              <a:pPr/>
+              <a:t>‹#›</a:t>
+            </a:fld>
+            <a:endParaRPr lang="en-US"/>
+          </a:p>
+        </p:txBody>
+      </p:sp>
     </p:spTree>
     <p:extLst>
       <p:ext uri="{BB962C8B-B14F-4D97-AF65-F5344CB8AC3E}">
@@ -24457,6 +27065,30 @@
           </a:p>
         </p:txBody>
       </p:sp>
+      <p:sp>
+        <p:nvSpPr>
+          <p:cNvPr id="6" name="Slide Number Placeholder 5"/>
+          <p:cNvSpPr>
+            <a:spLocks noGrp="1"/>
+          </p:cNvSpPr>
+          <p:nvPr>
+            <p:ph type="sldNum" sz="quarter" idx="12"/>
+          </p:nvPr>
+        </p:nvSpPr>
+        <p:spPr/>
+        <p:txBody>
+          <a:bodyPr/>
+          <a:lstStyle/>
+          <a:p>
+            <a:fld id="{96E69268-9C8B-4EBF-A9EE-DC5DC2D48DC3}" type="slidenum">
+              <a:rPr lang="en-US" smtClean="0"/>
+              <a:pPr/>
+              <a:t>‹#›</a:t>
+            </a:fld>
+            <a:endParaRPr lang="en-US"/>
+          </a:p>
+        </p:txBody>
+      </p:sp>
     </p:spTree>
     <p:extLst>
       <p:ext uri="{BB962C8B-B14F-4D97-AF65-F5344CB8AC3E}">
@@ -24603,6 +27235,30 @@
           </a:p>
         </p:txBody>
       </p:sp>
+      <p:sp>
+        <p:nvSpPr>
+          <p:cNvPr id="6" name="Slide Number Placeholder 5"/>
+          <p:cNvSpPr>
+            <a:spLocks noGrp="1"/>
+          </p:cNvSpPr>
+          <p:nvPr>
+            <p:ph type="sldNum" sz="quarter" idx="12"/>
+          </p:nvPr>
+        </p:nvSpPr>
+        <p:spPr/>
+        <p:txBody>
+          <a:bodyPr/>
+          <a:lstStyle/>
+          <a:p>
+            <a:fld id="{96E69268-9C8B-4EBF-A9EE-DC5DC2D48DC3}" type="slidenum">
+              <a:rPr lang="en-US" smtClean="0"/>
+              <a:pPr/>
+              <a:t>‹#›</a:t>
+            </a:fld>
+            <a:endParaRPr lang="en-US"/>
+          </a:p>
+        </p:txBody>
+      </p:sp>
     </p:spTree>
     <p:extLst>
       <p:ext uri="{BB962C8B-B14F-4D97-AF65-F5344CB8AC3E}">
@@ -24826,6 +27482,30 @@
           </a:p>
         </p:txBody>
       </p:sp>
+      <p:sp>
+        <p:nvSpPr>
+          <p:cNvPr id="6" name="Slide Number Placeholder 5"/>
+          <p:cNvSpPr>
+            <a:spLocks noGrp="1"/>
+          </p:cNvSpPr>
+          <p:nvPr>
+            <p:ph type="sldNum" sz="quarter" idx="12"/>
+          </p:nvPr>
+        </p:nvSpPr>
+        <p:spPr/>
+        <p:txBody>
+          <a:bodyPr/>
+          <a:lstStyle/>
+          <a:p>
+            <a:fld id="{96E69268-9C8B-4EBF-A9EE-DC5DC2D48DC3}" type="slidenum">
+              <a:rPr lang="en-US" smtClean="0"/>
+              <a:pPr/>
+              <a:t>‹#›</a:t>
+            </a:fld>
+            <a:endParaRPr lang="en-US"/>
+          </a:p>
+        </p:txBody>
+      </p:sp>
     </p:spTree>
     <p:extLst>
       <p:ext uri="{BB962C8B-B14F-4D97-AF65-F5344CB8AC3E}">
@@ -25089,6 +27769,30 @@
           </a:p>
         </p:txBody>
       </p:sp>
+      <p:sp>
+        <p:nvSpPr>
+          <p:cNvPr id="7" name="Slide Number Placeholder 6"/>
+          <p:cNvSpPr>
+            <a:spLocks noGrp="1"/>
+          </p:cNvSpPr>
+          <p:nvPr>
+            <p:ph type="sldNum" sz="quarter" idx="12"/>
+          </p:nvPr>
+        </p:nvSpPr>
+        <p:spPr/>
+        <p:txBody>
+          <a:bodyPr/>
+          <a:lstStyle/>
+          <a:p>
+            <a:fld id="{96E69268-9C8B-4EBF-A9EE-DC5DC2D48DC3}" type="slidenum">
+              <a:rPr lang="en-US" smtClean="0"/>
+              <a:pPr/>
+              <a:t>‹#›</a:t>
+            </a:fld>
+            <a:endParaRPr lang="en-US"/>
+          </a:p>
+        </p:txBody>
+      </p:sp>
     </p:spTree>
     <p:extLst>
       <p:ext uri="{BB962C8B-B14F-4D97-AF65-F5344CB8AC3E}">
@@ -25486,6 +28190,30 @@
           </a:p>
         </p:txBody>
       </p:sp>
+      <p:sp>
+        <p:nvSpPr>
+          <p:cNvPr id="9" name="Slide Number Placeholder 8"/>
+          <p:cNvSpPr>
+            <a:spLocks noGrp="1"/>
+          </p:cNvSpPr>
+          <p:nvPr>
+            <p:ph type="sldNum" sz="quarter" idx="12"/>
+          </p:nvPr>
+        </p:nvSpPr>
+        <p:spPr/>
+        <p:txBody>
+          <a:bodyPr/>
+          <a:lstStyle/>
+          <a:p>
+            <a:fld id="{96E69268-9C8B-4EBF-A9EE-DC5DC2D48DC3}" type="slidenum">
+              <a:rPr lang="en-US" smtClean="0"/>
+              <a:pPr/>
+              <a:t>‹#›</a:t>
+            </a:fld>
+            <a:endParaRPr lang="en-US"/>
+          </a:p>
+        </p:txBody>
+      </p:sp>
     </p:spTree>
     <p:extLst>
       <p:ext uri="{BB962C8B-B14F-4D97-AF65-F5344CB8AC3E}">
@@ -25587,6 +28315,30 @@
           </a:p>
         </p:txBody>
       </p:sp>
+      <p:sp>
+        <p:nvSpPr>
+          <p:cNvPr id="5" name="Slide Number Placeholder 4"/>
+          <p:cNvSpPr>
+            <a:spLocks noGrp="1"/>
+          </p:cNvSpPr>
+          <p:nvPr>
+            <p:ph type="sldNum" sz="quarter" idx="12"/>
+          </p:nvPr>
+        </p:nvSpPr>
+        <p:spPr/>
+        <p:txBody>
+          <a:bodyPr/>
+          <a:lstStyle/>
+          <a:p>
+            <a:fld id="{96E69268-9C8B-4EBF-A9EE-DC5DC2D48DC3}" type="slidenum">
+              <a:rPr lang="en-US" smtClean="0"/>
+              <a:pPr/>
+              <a:t>‹#›</a:t>
+            </a:fld>
+            <a:endParaRPr lang="en-US"/>
+          </a:p>
+        </p:txBody>
+      </p:sp>
     </p:spTree>
     <p:extLst>
       <p:ext uri="{BB962C8B-B14F-4D97-AF65-F5344CB8AC3E}">
@@ -25660,6 +28412,30 @@
           </a:p>
         </p:txBody>
       </p:sp>
+      <p:sp>
+        <p:nvSpPr>
+          <p:cNvPr id="4" name="Slide Number Placeholder 3"/>
+          <p:cNvSpPr>
+            <a:spLocks noGrp="1"/>
+          </p:cNvSpPr>
+          <p:nvPr>
+            <p:ph type="sldNum" sz="quarter" idx="12"/>
+          </p:nvPr>
+        </p:nvSpPr>
+        <p:spPr/>
+        <p:txBody>
+          <a:bodyPr/>
+          <a:lstStyle/>
+          <a:p>
+            <a:fld id="{96E69268-9C8B-4EBF-A9EE-DC5DC2D48DC3}" type="slidenum">
+              <a:rPr lang="en-US" smtClean="0"/>
+              <a:pPr/>
+              <a:t>‹#›</a:t>
+            </a:fld>
+            <a:endParaRPr lang="en-US"/>
+          </a:p>
+        </p:txBody>
+      </p:sp>
     </p:spTree>
     <p:extLst>
       <p:ext uri="{BB962C8B-B14F-4D97-AF65-F5344CB8AC3E}">
@@ -25913,6 +28689,30 @@
           </a:p>
         </p:txBody>
       </p:sp>
+      <p:sp>
+        <p:nvSpPr>
+          <p:cNvPr id="7" name="Slide Number Placeholder 6"/>
+          <p:cNvSpPr>
+            <a:spLocks noGrp="1"/>
+          </p:cNvSpPr>
+          <p:nvPr>
+            <p:ph type="sldNum" sz="quarter" idx="12"/>
+          </p:nvPr>
+        </p:nvSpPr>
+        <p:spPr/>
+        <p:txBody>
+          <a:bodyPr/>
+          <a:lstStyle/>
+          <a:p>
+            <a:fld id="{96E69268-9C8B-4EBF-A9EE-DC5DC2D48DC3}" type="slidenum">
+              <a:rPr lang="en-US" smtClean="0"/>
+              <a:pPr/>
+              <a:t>‹#›</a:t>
+            </a:fld>
+            <a:endParaRPr lang="en-US"/>
+          </a:p>
+        </p:txBody>
+      </p:sp>
     </p:spTree>
     <p:extLst>
       <p:ext uri="{BB962C8B-B14F-4D97-AF65-F5344CB8AC3E}">
@@ -26139,6 +28939,30 @@
           <a:bodyPr/>
           <a:lstStyle/>
           <a:p>
+            <a:endParaRPr lang="en-US"/>
+          </a:p>
+        </p:txBody>
+      </p:sp>
+      <p:sp>
+        <p:nvSpPr>
+          <p:cNvPr id="7" name="Slide Number Placeholder 6"/>
+          <p:cNvSpPr>
+            <a:spLocks noGrp="1"/>
+          </p:cNvSpPr>
+          <p:nvPr>
+            <p:ph type="sldNum" sz="quarter" idx="12"/>
+          </p:nvPr>
+        </p:nvSpPr>
+        <p:spPr/>
+        <p:txBody>
+          <a:bodyPr/>
+          <a:lstStyle/>
+          <a:p>
+            <a:fld id="{96E69268-9C8B-4EBF-A9EE-DC5DC2D48DC3}" type="slidenum">
+              <a:rPr lang="en-US" smtClean="0"/>
+              <a:pPr/>
+              <a:t>‹#›</a:t>
+            </a:fld>
             <a:endParaRPr lang="en-US"/>
           </a:p>
         </p:txBody>
@@ -26307,6 +29131,33 @@
       </p:sp>
       <p:sp>
         <p:nvSpPr>
+          <p:cNvPr id="4" name="スライド番号プレースホルダ 3"/>
+          <p:cNvSpPr>
+            <a:spLocks noGrp="1"/>
+          </p:cNvSpPr>
+          <p:nvPr>
+            <p:ph type="sldNum" sz="quarter" idx="11"/>
+          </p:nvPr>
+        </p:nvSpPr>
+        <p:spPr bwMode="gray"/>
+        <p:txBody>
+          <a:bodyPr/>
+          <a:lstStyle>
+            <a:lvl1pPr>
+              <a:defRPr>
+                <a:solidFill>
+                  <a:schemeClr val="tx2"/>
+                </a:solidFill>
+              </a:defRPr>
+            </a:lvl1pPr>
+          </a:lstStyle>
+          <a:p>
+            <a:endParaRPr lang="ja-JP" altLang="en-US"/>
+          </a:p>
+        </p:txBody>
+      </p:sp>
+      <p:sp>
+        <p:nvSpPr>
           <p:cNvPr id="9" name="テキスト プレースホルダー 2"/>
           <p:cNvSpPr>
             <a:spLocks noGrp="1"/>
@@ -26493,6 +29344,30 @@
           </a:p>
         </p:txBody>
       </p:sp>
+      <p:sp>
+        <p:nvSpPr>
+          <p:cNvPr id="6" name="Slide Number Placeholder 5"/>
+          <p:cNvSpPr>
+            <a:spLocks noGrp="1"/>
+          </p:cNvSpPr>
+          <p:nvPr>
+            <p:ph type="sldNum" sz="quarter" idx="12"/>
+          </p:nvPr>
+        </p:nvSpPr>
+        <p:spPr/>
+        <p:txBody>
+          <a:bodyPr/>
+          <a:lstStyle/>
+          <a:p>
+            <a:fld id="{96E69268-9C8B-4EBF-A9EE-DC5DC2D48DC3}" type="slidenum">
+              <a:rPr lang="en-US" smtClean="0"/>
+              <a:pPr/>
+              <a:t>‹#›</a:t>
+            </a:fld>
+            <a:endParaRPr lang="en-US"/>
+          </a:p>
+        </p:txBody>
+      </p:sp>
     </p:spTree>
     <p:extLst>
       <p:ext uri="{BB962C8B-B14F-4D97-AF65-F5344CB8AC3E}">
@@ -26645,6 +29520,30 @@
           <a:bodyPr/>
           <a:lstStyle/>
           <a:p>
+            <a:endParaRPr lang="en-US"/>
+          </a:p>
+        </p:txBody>
+      </p:sp>
+      <p:sp>
+        <p:nvSpPr>
+          <p:cNvPr id="6" name="Slide Number Placeholder 5"/>
+          <p:cNvSpPr>
+            <a:spLocks noGrp="1"/>
+          </p:cNvSpPr>
+          <p:nvPr>
+            <p:ph type="sldNum" sz="quarter" idx="12"/>
+          </p:nvPr>
+        </p:nvSpPr>
+        <p:spPr/>
+        <p:txBody>
+          <a:bodyPr/>
+          <a:lstStyle/>
+          <a:p>
+            <a:fld id="{96E69268-9C8B-4EBF-A9EE-DC5DC2D48DC3}" type="slidenum">
+              <a:rPr lang="en-US" smtClean="0"/>
+              <a:pPr/>
+              <a:t>‹#›</a:t>
+            </a:fld>
             <a:endParaRPr lang="en-US"/>
           </a:p>
         </p:txBody>
@@ -26787,6 +29686,30 @@
           <a:bodyPr/>
           <a:lstStyle/>
           <a:p>
+            <a:endParaRPr lang="en-US"/>
+          </a:p>
+        </p:txBody>
+      </p:sp>
+      <p:sp>
+        <p:nvSpPr>
+          <p:cNvPr id="5" name="Slide Number Placeholder 4"/>
+          <p:cNvSpPr>
+            <a:spLocks noGrp="1"/>
+          </p:cNvSpPr>
+          <p:nvPr>
+            <p:ph type="sldNum" sz="quarter" idx="12"/>
+          </p:nvPr>
+        </p:nvSpPr>
+        <p:spPr/>
+        <p:txBody>
+          <a:bodyPr/>
+          <a:lstStyle/>
+          <a:p>
+            <a:fld id="{96E69268-9C8B-4EBF-A9EE-DC5DC2D48DC3}" type="slidenum">
+              <a:rPr lang="en-US" smtClean="0"/>
+              <a:pPr/>
+              <a:t>‹#›</a:t>
+            </a:fld>
             <a:endParaRPr lang="en-US"/>
           </a:p>
         </p:txBody>
@@ -26889,6 +29812,30 @@
       </p:sp>
       <p:sp>
         <p:nvSpPr>
+          <p:cNvPr id="6" name="Slide Number Placeholder 5"/>
+          <p:cNvSpPr>
+            <a:spLocks noGrp="1"/>
+          </p:cNvSpPr>
+          <p:nvPr>
+            <p:ph type="sldNum" sz="quarter" idx="12"/>
+          </p:nvPr>
+        </p:nvSpPr>
+        <p:spPr/>
+        <p:txBody>
+          <a:bodyPr/>
+          <a:lstStyle/>
+          <a:p>
+            <a:fld id="{E5EDE275-BE14-4364-AEA2-5F5667C0FD49}" type="slidenum">
+              <a:rPr lang="en-US" smtClean="0"/>
+              <a:pPr/>
+              <a:t>‹#›</a:t>
+            </a:fld>
+            <a:endParaRPr lang="en-US"/>
+          </a:p>
+        </p:txBody>
+      </p:sp>
+      <p:sp>
+        <p:nvSpPr>
           <p:cNvPr id="7" name="Title 1"/>
           <p:cNvSpPr>
             <a:spLocks noGrp="1"/>
@@ -27273,6 +30220,30 @@
           </a:p>
         </p:txBody>
       </p:sp>
+      <p:sp>
+        <p:nvSpPr>
+          <p:cNvPr id="6" name="Slide Number Placeholder 5"/>
+          <p:cNvSpPr>
+            <a:spLocks noGrp="1"/>
+          </p:cNvSpPr>
+          <p:nvPr>
+            <p:ph type="sldNum" sz="quarter" idx="12"/>
+          </p:nvPr>
+        </p:nvSpPr>
+        <p:spPr/>
+        <p:txBody>
+          <a:bodyPr/>
+          <a:lstStyle/>
+          <a:p>
+            <a:fld id="{E5EDE275-BE14-4364-AEA2-5F5667C0FD49}" type="slidenum">
+              <a:rPr lang="en-US" smtClean="0"/>
+              <a:pPr/>
+              <a:t>‹#›</a:t>
+            </a:fld>
+            <a:endParaRPr lang="en-US"/>
+          </a:p>
+        </p:txBody>
+      </p:sp>
     </p:spTree>
     <p:extLst>
       <p:ext uri="{BB962C8B-B14F-4D97-AF65-F5344CB8AC3E}">
@@ -27491,6 +30462,30 @@
           </a:p>
         </p:txBody>
       </p:sp>
+      <p:sp>
+        <p:nvSpPr>
+          <p:cNvPr id="6" name="Slide Number Placeholder 5"/>
+          <p:cNvSpPr>
+            <a:spLocks noGrp="1"/>
+          </p:cNvSpPr>
+          <p:nvPr>
+            <p:ph type="sldNum" sz="quarter" idx="12"/>
+          </p:nvPr>
+        </p:nvSpPr>
+        <p:spPr/>
+        <p:txBody>
+          <a:bodyPr/>
+          <a:lstStyle/>
+          <a:p>
+            <a:fld id="{96E69268-9C8B-4EBF-A9EE-DC5DC2D48DC3}" type="slidenum">
+              <a:rPr lang="en-US" smtClean="0"/>
+              <a:pPr/>
+              <a:t>‹#›</a:t>
+            </a:fld>
+            <a:endParaRPr lang="en-US"/>
+          </a:p>
+        </p:txBody>
+      </p:sp>
     </p:spTree>
     <p:extLst>
       <p:ext uri="{BB962C8B-B14F-4D97-AF65-F5344CB8AC3E}">
@@ -27637,6 +30632,30 @@
           </a:p>
         </p:txBody>
       </p:sp>
+      <p:sp>
+        <p:nvSpPr>
+          <p:cNvPr id="6" name="Slide Number Placeholder 5"/>
+          <p:cNvSpPr>
+            <a:spLocks noGrp="1"/>
+          </p:cNvSpPr>
+          <p:nvPr>
+            <p:ph type="sldNum" sz="quarter" idx="12"/>
+          </p:nvPr>
+        </p:nvSpPr>
+        <p:spPr/>
+        <p:txBody>
+          <a:bodyPr/>
+          <a:lstStyle/>
+          <a:p>
+            <a:fld id="{96E69268-9C8B-4EBF-A9EE-DC5DC2D48DC3}" type="slidenum">
+              <a:rPr lang="en-US" smtClean="0"/>
+              <a:pPr/>
+              <a:t>‹#›</a:t>
+            </a:fld>
+            <a:endParaRPr lang="en-US"/>
+          </a:p>
+        </p:txBody>
+      </p:sp>
     </p:spTree>
     <p:extLst>
       <p:ext uri="{BB962C8B-B14F-4D97-AF65-F5344CB8AC3E}">
@@ -27860,6 +30879,30 @@
           </a:p>
         </p:txBody>
       </p:sp>
+      <p:sp>
+        <p:nvSpPr>
+          <p:cNvPr id="6" name="Slide Number Placeholder 5"/>
+          <p:cNvSpPr>
+            <a:spLocks noGrp="1"/>
+          </p:cNvSpPr>
+          <p:nvPr>
+            <p:ph type="sldNum" sz="quarter" idx="12"/>
+          </p:nvPr>
+        </p:nvSpPr>
+        <p:spPr/>
+        <p:txBody>
+          <a:bodyPr/>
+          <a:lstStyle/>
+          <a:p>
+            <a:fld id="{96E69268-9C8B-4EBF-A9EE-DC5DC2D48DC3}" type="slidenum">
+              <a:rPr lang="en-US" smtClean="0"/>
+              <a:pPr/>
+              <a:t>‹#›</a:t>
+            </a:fld>
+            <a:endParaRPr lang="en-US"/>
+          </a:p>
+        </p:txBody>
+      </p:sp>
     </p:spTree>
     <p:extLst>
       <p:ext uri="{BB962C8B-B14F-4D97-AF65-F5344CB8AC3E}">
@@ -28123,6 +31166,30 @@
           </a:p>
         </p:txBody>
       </p:sp>
+      <p:sp>
+        <p:nvSpPr>
+          <p:cNvPr id="7" name="Slide Number Placeholder 6"/>
+          <p:cNvSpPr>
+            <a:spLocks noGrp="1"/>
+          </p:cNvSpPr>
+          <p:nvPr>
+            <p:ph type="sldNum" sz="quarter" idx="12"/>
+          </p:nvPr>
+        </p:nvSpPr>
+        <p:spPr/>
+        <p:txBody>
+          <a:bodyPr/>
+          <a:lstStyle/>
+          <a:p>
+            <a:fld id="{96E69268-9C8B-4EBF-A9EE-DC5DC2D48DC3}" type="slidenum">
+              <a:rPr lang="en-US" smtClean="0"/>
+              <a:pPr/>
+              <a:t>‹#›</a:t>
+            </a:fld>
+            <a:endParaRPr lang="en-US"/>
+          </a:p>
+        </p:txBody>
+      </p:sp>
     </p:spTree>
     <p:extLst>
       <p:ext uri="{BB962C8B-B14F-4D97-AF65-F5344CB8AC3E}">
@@ -28516,6 +31583,30 @@
           <a:bodyPr/>
           <a:lstStyle/>
           <a:p>
+            <a:endParaRPr lang="en-US"/>
+          </a:p>
+        </p:txBody>
+      </p:sp>
+      <p:sp>
+        <p:nvSpPr>
+          <p:cNvPr id="9" name="Slide Number Placeholder 8"/>
+          <p:cNvSpPr>
+            <a:spLocks noGrp="1"/>
+          </p:cNvSpPr>
+          <p:nvPr>
+            <p:ph type="sldNum" sz="quarter" idx="12"/>
+          </p:nvPr>
+        </p:nvSpPr>
+        <p:spPr/>
+        <p:txBody>
+          <a:bodyPr/>
+          <a:lstStyle/>
+          <a:p>
+            <a:fld id="{96E69268-9C8B-4EBF-A9EE-DC5DC2D48DC3}" type="slidenum">
+              <a:rPr lang="en-US" smtClean="0"/>
+              <a:pPr/>
+              <a:t>‹#›</a:t>
+            </a:fld>
             <a:endParaRPr lang="en-US"/>
           </a:p>
         </p:txBody>
@@ -28683,6 +31774,38 @@
       </p:sp>
       <p:sp>
         <p:nvSpPr>
+          <p:cNvPr id="9" name="スライド番号プレースホルダ 8"/>
+          <p:cNvSpPr>
+            <a:spLocks noGrp="1"/>
+          </p:cNvSpPr>
+          <p:nvPr>
+            <p:ph type="sldNum" sz="quarter" idx="10"/>
+          </p:nvPr>
+        </p:nvSpPr>
+        <p:spPr bwMode="gray"/>
+        <p:txBody>
+          <a:bodyPr/>
+          <a:lstStyle>
+            <a:lvl1pPr>
+              <a:defRPr>
+                <a:solidFill>
+                  <a:schemeClr val="tx1"/>
+                </a:solidFill>
+              </a:defRPr>
+            </a:lvl1pPr>
+          </a:lstStyle>
+          <a:p>
+            <a:fld id="{543A0986-838B-4D2A-A95C-8CB1738263FE}" type="slidenum">
+              <a:rPr lang="ja-JP" altLang="en-US" smtClean="0"/>
+              <a:pPr/>
+              <a:t>‹#›</a:t>
+            </a:fld>
+            <a:endParaRPr lang="ja-JP" altLang="en-US" dirty="0"/>
+          </a:p>
+        </p:txBody>
+      </p:sp>
+      <p:sp>
+        <p:nvSpPr>
           <p:cNvPr id="10" name="フッター プレースホルダ 9"/>
           <p:cNvSpPr>
             <a:spLocks noGrp="1"/>
@@ -28888,6 +32011,30 @@
           <a:bodyPr/>
           <a:lstStyle/>
           <a:p>
+            <a:endParaRPr lang="en-US"/>
+          </a:p>
+        </p:txBody>
+      </p:sp>
+      <p:sp>
+        <p:nvSpPr>
+          <p:cNvPr id="5" name="Slide Number Placeholder 4"/>
+          <p:cNvSpPr>
+            <a:spLocks noGrp="1"/>
+          </p:cNvSpPr>
+          <p:nvPr>
+            <p:ph type="sldNum" sz="quarter" idx="12"/>
+          </p:nvPr>
+        </p:nvSpPr>
+        <p:spPr/>
+        <p:txBody>
+          <a:bodyPr/>
+          <a:lstStyle/>
+          <a:p>
+            <a:fld id="{96E69268-9C8B-4EBF-A9EE-DC5DC2D48DC3}" type="slidenum">
+              <a:rPr lang="en-US" smtClean="0"/>
+              <a:pPr/>
+              <a:t>‹#›</a:t>
+            </a:fld>
             <a:endParaRPr lang="en-US"/>
           </a:p>
         </p:txBody>
@@ -29004,6 +32151,30 @@
           </a:p>
         </p:txBody>
       </p:sp>
+      <p:sp>
+        <p:nvSpPr>
+          <p:cNvPr id="5" name="Slide Number Placeholder 4"/>
+          <p:cNvSpPr>
+            <a:spLocks noGrp="1"/>
+          </p:cNvSpPr>
+          <p:nvPr>
+            <p:ph type="sldNum" sz="quarter" idx="12"/>
+          </p:nvPr>
+        </p:nvSpPr>
+        <p:spPr/>
+        <p:txBody>
+          <a:bodyPr/>
+          <a:lstStyle/>
+          <a:p>
+            <a:fld id="{96E69268-9C8B-4EBF-A9EE-DC5DC2D48DC3}" type="slidenum">
+              <a:rPr lang="en-US" smtClean="0"/>
+              <a:pPr/>
+              <a:t>‹#›</a:t>
+            </a:fld>
+            <a:endParaRPr lang="en-US"/>
+          </a:p>
+        </p:txBody>
+      </p:sp>
     </p:spTree>
     <p:extLst>
       <p:ext uri="{BB962C8B-B14F-4D97-AF65-F5344CB8AC3E}">
@@ -29077,6 +32248,30 @@
           </a:p>
         </p:txBody>
       </p:sp>
+      <p:sp>
+        <p:nvSpPr>
+          <p:cNvPr id="4" name="Slide Number Placeholder 3"/>
+          <p:cNvSpPr>
+            <a:spLocks noGrp="1"/>
+          </p:cNvSpPr>
+          <p:nvPr>
+            <p:ph type="sldNum" sz="quarter" idx="12"/>
+          </p:nvPr>
+        </p:nvSpPr>
+        <p:spPr/>
+        <p:txBody>
+          <a:bodyPr/>
+          <a:lstStyle/>
+          <a:p>
+            <a:fld id="{96E69268-9C8B-4EBF-A9EE-DC5DC2D48DC3}" type="slidenum">
+              <a:rPr lang="en-US" smtClean="0"/>
+              <a:pPr/>
+              <a:t>‹#›</a:t>
+            </a:fld>
+            <a:endParaRPr lang="en-US"/>
+          </a:p>
+        </p:txBody>
+      </p:sp>
     </p:spTree>
     <p:extLst>
       <p:ext uri="{BB962C8B-B14F-4D97-AF65-F5344CB8AC3E}">
@@ -29330,6 +32525,30 @@
           </a:p>
         </p:txBody>
       </p:sp>
+      <p:sp>
+        <p:nvSpPr>
+          <p:cNvPr id="7" name="Slide Number Placeholder 6"/>
+          <p:cNvSpPr>
+            <a:spLocks noGrp="1"/>
+          </p:cNvSpPr>
+          <p:nvPr>
+            <p:ph type="sldNum" sz="quarter" idx="12"/>
+          </p:nvPr>
+        </p:nvSpPr>
+        <p:spPr/>
+        <p:txBody>
+          <a:bodyPr/>
+          <a:lstStyle/>
+          <a:p>
+            <a:fld id="{96E69268-9C8B-4EBF-A9EE-DC5DC2D48DC3}" type="slidenum">
+              <a:rPr lang="en-US" smtClean="0"/>
+              <a:pPr/>
+              <a:t>‹#›</a:t>
+            </a:fld>
+            <a:endParaRPr lang="en-US"/>
+          </a:p>
+        </p:txBody>
+      </p:sp>
     </p:spTree>
     <p:extLst>
       <p:ext uri="{BB962C8B-B14F-4D97-AF65-F5344CB8AC3E}">
@@ -29560,6 +32779,30 @@
           </a:p>
         </p:txBody>
       </p:sp>
+      <p:sp>
+        <p:nvSpPr>
+          <p:cNvPr id="7" name="Slide Number Placeholder 6"/>
+          <p:cNvSpPr>
+            <a:spLocks noGrp="1"/>
+          </p:cNvSpPr>
+          <p:nvPr>
+            <p:ph type="sldNum" sz="quarter" idx="12"/>
+          </p:nvPr>
+        </p:nvSpPr>
+        <p:spPr/>
+        <p:txBody>
+          <a:bodyPr/>
+          <a:lstStyle/>
+          <a:p>
+            <a:fld id="{96E69268-9C8B-4EBF-A9EE-DC5DC2D48DC3}" type="slidenum">
+              <a:rPr lang="en-US" smtClean="0"/>
+              <a:pPr/>
+              <a:t>‹#›</a:t>
+            </a:fld>
+            <a:endParaRPr lang="en-US"/>
+          </a:p>
+        </p:txBody>
+      </p:sp>
     </p:spTree>
     <p:extLst>
       <p:ext uri="{BB962C8B-B14F-4D97-AF65-F5344CB8AC3E}">
@@ -29706,6 +32949,30 @@
           </a:p>
         </p:txBody>
       </p:sp>
+      <p:sp>
+        <p:nvSpPr>
+          <p:cNvPr id="6" name="Slide Number Placeholder 5"/>
+          <p:cNvSpPr>
+            <a:spLocks noGrp="1"/>
+          </p:cNvSpPr>
+          <p:nvPr>
+            <p:ph type="sldNum" sz="quarter" idx="12"/>
+          </p:nvPr>
+        </p:nvSpPr>
+        <p:spPr/>
+        <p:txBody>
+          <a:bodyPr/>
+          <a:lstStyle/>
+          <a:p>
+            <a:fld id="{96E69268-9C8B-4EBF-A9EE-DC5DC2D48DC3}" type="slidenum">
+              <a:rPr lang="en-US" smtClean="0"/>
+              <a:pPr/>
+              <a:t>‹#›</a:t>
+            </a:fld>
+            <a:endParaRPr lang="en-US"/>
+          </a:p>
+        </p:txBody>
+      </p:sp>
     </p:spTree>
     <p:extLst>
       <p:ext uri="{BB962C8B-B14F-4D97-AF65-F5344CB8AC3E}">
@@ -29858,6 +33125,30 @@
           <a:bodyPr/>
           <a:lstStyle/>
           <a:p>
+            <a:endParaRPr lang="en-US"/>
+          </a:p>
+        </p:txBody>
+      </p:sp>
+      <p:sp>
+        <p:nvSpPr>
+          <p:cNvPr id="6" name="Slide Number Placeholder 5"/>
+          <p:cNvSpPr>
+            <a:spLocks noGrp="1"/>
+          </p:cNvSpPr>
+          <p:nvPr>
+            <p:ph type="sldNum" sz="quarter" idx="12"/>
+          </p:nvPr>
+        </p:nvSpPr>
+        <p:spPr/>
+        <p:txBody>
+          <a:bodyPr/>
+          <a:lstStyle/>
+          <a:p>
+            <a:fld id="{96E69268-9C8B-4EBF-A9EE-DC5DC2D48DC3}" type="slidenum">
+              <a:rPr lang="en-US" smtClean="0"/>
+              <a:pPr/>
+              <a:t>‹#›</a:t>
+            </a:fld>
             <a:endParaRPr lang="en-US"/>
           </a:p>
         </p:txBody>
@@ -30004,6 +33295,30 @@
           </a:p>
         </p:txBody>
       </p:sp>
+      <p:sp>
+        <p:nvSpPr>
+          <p:cNvPr id="5" name="Slide Number Placeholder 4"/>
+          <p:cNvSpPr>
+            <a:spLocks noGrp="1"/>
+          </p:cNvSpPr>
+          <p:nvPr>
+            <p:ph type="sldNum" sz="quarter" idx="12"/>
+          </p:nvPr>
+        </p:nvSpPr>
+        <p:spPr/>
+        <p:txBody>
+          <a:bodyPr/>
+          <a:lstStyle/>
+          <a:p>
+            <a:fld id="{96E69268-9C8B-4EBF-A9EE-DC5DC2D48DC3}" type="slidenum">
+              <a:rPr lang="en-US" smtClean="0"/>
+              <a:pPr/>
+              <a:t>‹#›</a:t>
+            </a:fld>
+            <a:endParaRPr lang="en-US"/>
+          </a:p>
+        </p:txBody>
+      </p:sp>
     </p:spTree>
     <p:extLst>
       <p:ext uri="{BB962C8B-B14F-4D97-AF65-F5344CB8AC3E}">
@@ -30308,6 +33623,30 @@
           </a:p>
         </p:txBody>
       </p:sp>
+      <p:sp>
+        <p:nvSpPr>
+          <p:cNvPr id="6" name="Slide Number Placeholder 5"/>
+          <p:cNvSpPr>
+            <a:spLocks noGrp="1"/>
+          </p:cNvSpPr>
+          <p:nvPr>
+            <p:ph type="sldNum" sz="quarter" idx="12"/>
+          </p:nvPr>
+        </p:nvSpPr>
+        <p:spPr/>
+        <p:txBody>
+          <a:bodyPr/>
+          <a:lstStyle/>
+          <a:p>
+            <a:fld id="{E5EDE275-BE14-4364-AEA2-5F5667C0FD49}" type="slidenum">
+              <a:rPr lang="en-US" smtClean="0"/>
+              <a:pPr/>
+              <a:t>‹#›</a:t>
+            </a:fld>
+            <a:endParaRPr lang="en-US"/>
+          </a:p>
+        </p:txBody>
+      </p:sp>
     </p:spTree>
     <p:extLst>
       <p:ext uri="{BB962C8B-B14F-4D97-AF65-F5344CB8AC3E}">
@@ -30526,6 +33865,30 @@
           </a:p>
         </p:txBody>
       </p:sp>
+      <p:sp>
+        <p:nvSpPr>
+          <p:cNvPr id="6" name="Slide Number Placeholder 5"/>
+          <p:cNvSpPr>
+            <a:spLocks noGrp="1"/>
+          </p:cNvSpPr>
+          <p:nvPr>
+            <p:ph type="sldNum" sz="quarter" idx="12"/>
+          </p:nvPr>
+        </p:nvSpPr>
+        <p:spPr/>
+        <p:txBody>
+          <a:bodyPr/>
+          <a:lstStyle/>
+          <a:p>
+            <a:fld id="{96E69268-9C8B-4EBF-A9EE-DC5DC2D48DC3}" type="slidenum">
+              <a:rPr lang="en-US" smtClean="0"/>
+              <a:pPr/>
+              <a:t>‹#›</a:t>
+            </a:fld>
+            <a:endParaRPr lang="en-US"/>
+          </a:p>
+        </p:txBody>
+      </p:sp>
     </p:spTree>
     <p:extLst>
       <p:ext uri="{BB962C8B-B14F-4D97-AF65-F5344CB8AC3E}">
@@ -30626,6 +33989,30 @@
           </a:p>
         </p:txBody>
       </p:sp>
+      <p:sp>
+        <p:nvSpPr>
+          <p:cNvPr id="5" name="Slide Number Placeholder 4"/>
+          <p:cNvSpPr>
+            <a:spLocks noGrp="1"/>
+          </p:cNvSpPr>
+          <p:nvPr>
+            <p:ph type="sldNum" sz="quarter" idx="12"/>
+          </p:nvPr>
+        </p:nvSpPr>
+        <p:spPr/>
+        <p:txBody>
+          <a:bodyPr/>
+          <a:lstStyle/>
+          <a:p>
+            <a:fld id="{96E69268-9C8B-4EBF-A9EE-DC5DC2D48DC3}" type="slidenum">
+              <a:rPr lang="en-US" smtClean="0"/>
+              <a:pPr/>
+              <a:t>‹#›</a:t>
+            </a:fld>
+            <a:endParaRPr lang="en-US"/>
+          </a:p>
+        </p:txBody>
+      </p:sp>
     </p:spTree>
     <p:extLst>
       <p:ext uri="{BB962C8B-B14F-4D97-AF65-F5344CB8AC3E}">
@@ -30772,6 +34159,30 @@
           </a:p>
         </p:txBody>
       </p:sp>
+      <p:sp>
+        <p:nvSpPr>
+          <p:cNvPr id="6" name="Slide Number Placeholder 5"/>
+          <p:cNvSpPr>
+            <a:spLocks noGrp="1"/>
+          </p:cNvSpPr>
+          <p:nvPr>
+            <p:ph type="sldNum" sz="quarter" idx="12"/>
+          </p:nvPr>
+        </p:nvSpPr>
+        <p:spPr/>
+        <p:txBody>
+          <a:bodyPr/>
+          <a:lstStyle/>
+          <a:p>
+            <a:fld id="{96E69268-9C8B-4EBF-A9EE-DC5DC2D48DC3}" type="slidenum">
+              <a:rPr lang="en-US" smtClean="0"/>
+              <a:pPr/>
+              <a:t>‹#›</a:t>
+            </a:fld>
+            <a:endParaRPr lang="en-US"/>
+          </a:p>
+        </p:txBody>
+      </p:sp>
     </p:spTree>
     <p:extLst>
       <p:ext uri="{BB962C8B-B14F-4D97-AF65-F5344CB8AC3E}">
@@ -30995,6 +34406,30 @@
           </a:p>
         </p:txBody>
       </p:sp>
+      <p:sp>
+        <p:nvSpPr>
+          <p:cNvPr id="6" name="Slide Number Placeholder 5"/>
+          <p:cNvSpPr>
+            <a:spLocks noGrp="1"/>
+          </p:cNvSpPr>
+          <p:nvPr>
+            <p:ph type="sldNum" sz="quarter" idx="12"/>
+          </p:nvPr>
+        </p:nvSpPr>
+        <p:spPr/>
+        <p:txBody>
+          <a:bodyPr/>
+          <a:lstStyle/>
+          <a:p>
+            <a:fld id="{96E69268-9C8B-4EBF-A9EE-DC5DC2D48DC3}" type="slidenum">
+              <a:rPr lang="en-US" smtClean="0"/>
+              <a:pPr/>
+              <a:t>‹#›</a:t>
+            </a:fld>
+            <a:endParaRPr lang="en-US"/>
+          </a:p>
+        </p:txBody>
+      </p:sp>
     </p:spTree>
     <p:extLst>
       <p:ext uri="{BB962C8B-B14F-4D97-AF65-F5344CB8AC3E}">
@@ -31258,6 +34693,30 @@
           </a:p>
         </p:txBody>
       </p:sp>
+      <p:sp>
+        <p:nvSpPr>
+          <p:cNvPr id="7" name="Slide Number Placeholder 6"/>
+          <p:cNvSpPr>
+            <a:spLocks noGrp="1"/>
+          </p:cNvSpPr>
+          <p:nvPr>
+            <p:ph type="sldNum" sz="quarter" idx="12"/>
+          </p:nvPr>
+        </p:nvSpPr>
+        <p:spPr/>
+        <p:txBody>
+          <a:bodyPr/>
+          <a:lstStyle/>
+          <a:p>
+            <a:fld id="{96E69268-9C8B-4EBF-A9EE-DC5DC2D48DC3}" type="slidenum">
+              <a:rPr lang="en-US" smtClean="0"/>
+              <a:pPr/>
+              <a:t>‹#›</a:t>
+            </a:fld>
+            <a:endParaRPr lang="en-US"/>
+          </a:p>
+        </p:txBody>
+      </p:sp>
     </p:spTree>
     <p:extLst>
       <p:ext uri="{BB962C8B-B14F-4D97-AF65-F5344CB8AC3E}">
@@ -31655,6 +35114,30 @@
           </a:p>
         </p:txBody>
       </p:sp>
+      <p:sp>
+        <p:nvSpPr>
+          <p:cNvPr id="9" name="Slide Number Placeholder 8"/>
+          <p:cNvSpPr>
+            <a:spLocks noGrp="1"/>
+          </p:cNvSpPr>
+          <p:nvPr>
+            <p:ph type="sldNum" sz="quarter" idx="12"/>
+          </p:nvPr>
+        </p:nvSpPr>
+        <p:spPr/>
+        <p:txBody>
+          <a:bodyPr/>
+          <a:lstStyle/>
+          <a:p>
+            <a:fld id="{96E69268-9C8B-4EBF-A9EE-DC5DC2D48DC3}" type="slidenum">
+              <a:rPr lang="en-US" smtClean="0"/>
+              <a:pPr/>
+              <a:t>‹#›</a:t>
+            </a:fld>
+            <a:endParaRPr lang="en-US"/>
+          </a:p>
+        </p:txBody>
+      </p:sp>
     </p:spTree>
     <p:extLst>
       <p:ext uri="{BB962C8B-B14F-4D97-AF65-F5344CB8AC3E}">
@@ -31752,6 +35235,30 @@
           <a:bodyPr/>
           <a:lstStyle/>
           <a:p>
+            <a:endParaRPr lang="en-US"/>
+          </a:p>
+        </p:txBody>
+      </p:sp>
+      <p:sp>
+        <p:nvSpPr>
+          <p:cNvPr id="5" name="Slide Number Placeholder 4"/>
+          <p:cNvSpPr>
+            <a:spLocks noGrp="1"/>
+          </p:cNvSpPr>
+          <p:nvPr>
+            <p:ph type="sldNum" sz="quarter" idx="12"/>
+          </p:nvPr>
+        </p:nvSpPr>
+        <p:spPr/>
+        <p:txBody>
+          <a:bodyPr/>
+          <a:lstStyle/>
+          <a:p>
+            <a:fld id="{96E69268-9C8B-4EBF-A9EE-DC5DC2D48DC3}" type="slidenum">
+              <a:rPr lang="en-US" smtClean="0"/>
+              <a:pPr/>
+              <a:t>‹#›</a:t>
+            </a:fld>
             <a:endParaRPr lang="en-US"/>
           </a:p>
         </p:txBody>
@@ -31868,6 +35375,30 @@
           </a:p>
         </p:txBody>
       </p:sp>
+      <p:sp>
+        <p:nvSpPr>
+          <p:cNvPr id="5" name="Slide Number Placeholder 4"/>
+          <p:cNvSpPr>
+            <a:spLocks noGrp="1"/>
+          </p:cNvSpPr>
+          <p:nvPr>
+            <p:ph type="sldNum" sz="quarter" idx="12"/>
+          </p:nvPr>
+        </p:nvSpPr>
+        <p:spPr/>
+        <p:txBody>
+          <a:bodyPr/>
+          <a:lstStyle/>
+          <a:p>
+            <a:fld id="{96E69268-9C8B-4EBF-A9EE-DC5DC2D48DC3}" type="slidenum">
+              <a:rPr lang="en-US" smtClean="0"/>
+              <a:pPr/>
+              <a:t>‹#›</a:t>
+            </a:fld>
+            <a:endParaRPr lang="en-US"/>
+          </a:p>
+        </p:txBody>
+      </p:sp>
     </p:spTree>
     <p:extLst>
       <p:ext uri="{BB962C8B-B14F-4D97-AF65-F5344CB8AC3E}">
@@ -31941,6 +35472,30 @@
           </a:p>
         </p:txBody>
       </p:sp>
+      <p:sp>
+        <p:nvSpPr>
+          <p:cNvPr id="4" name="Slide Number Placeholder 3"/>
+          <p:cNvSpPr>
+            <a:spLocks noGrp="1"/>
+          </p:cNvSpPr>
+          <p:nvPr>
+            <p:ph type="sldNum" sz="quarter" idx="12"/>
+          </p:nvPr>
+        </p:nvSpPr>
+        <p:spPr/>
+        <p:txBody>
+          <a:bodyPr/>
+          <a:lstStyle/>
+          <a:p>
+            <a:fld id="{96E69268-9C8B-4EBF-A9EE-DC5DC2D48DC3}" type="slidenum">
+              <a:rPr lang="en-US" smtClean="0"/>
+              <a:pPr/>
+              <a:t>‹#›</a:t>
+            </a:fld>
+            <a:endParaRPr lang="en-US"/>
+          </a:p>
+        </p:txBody>
+      </p:sp>
     </p:spTree>
     <p:extLst>
       <p:ext uri="{BB962C8B-B14F-4D97-AF65-F5344CB8AC3E}">
@@ -32194,6 +35749,30 @@
           </a:p>
         </p:txBody>
       </p:sp>
+      <p:sp>
+        <p:nvSpPr>
+          <p:cNvPr id="7" name="Slide Number Placeholder 6"/>
+          <p:cNvSpPr>
+            <a:spLocks noGrp="1"/>
+          </p:cNvSpPr>
+          <p:nvPr>
+            <p:ph type="sldNum" sz="quarter" idx="12"/>
+          </p:nvPr>
+        </p:nvSpPr>
+        <p:spPr/>
+        <p:txBody>
+          <a:bodyPr/>
+          <a:lstStyle/>
+          <a:p>
+            <a:fld id="{96E69268-9C8B-4EBF-A9EE-DC5DC2D48DC3}" type="slidenum">
+              <a:rPr lang="en-US" smtClean="0"/>
+              <a:pPr/>
+              <a:t>‹#›</a:t>
+            </a:fld>
+            <a:endParaRPr lang="en-US"/>
+          </a:p>
+        </p:txBody>
+      </p:sp>
     </p:spTree>
     <p:extLst>
       <p:ext uri="{BB962C8B-B14F-4D97-AF65-F5344CB8AC3E}">
@@ -32424,6 +36003,30 @@
           </a:p>
         </p:txBody>
       </p:sp>
+      <p:sp>
+        <p:nvSpPr>
+          <p:cNvPr id="7" name="Slide Number Placeholder 6"/>
+          <p:cNvSpPr>
+            <a:spLocks noGrp="1"/>
+          </p:cNvSpPr>
+          <p:nvPr>
+            <p:ph type="sldNum" sz="quarter" idx="12"/>
+          </p:nvPr>
+        </p:nvSpPr>
+        <p:spPr/>
+        <p:txBody>
+          <a:bodyPr/>
+          <a:lstStyle/>
+          <a:p>
+            <a:fld id="{96E69268-9C8B-4EBF-A9EE-DC5DC2D48DC3}" type="slidenum">
+              <a:rPr lang="en-US" smtClean="0"/>
+              <a:pPr/>
+              <a:t>‹#›</a:t>
+            </a:fld>
+            <a:endParaRPr lang="en-US"/>
+          </a:p>
+        </p:txBody>
+      </p:sp>
     </p:spTree>
     <p:extLst>
       <p:ext uri="{BB962C8B-B14F-4D97-AF65-F5344CB8AC3E}">
@@ -32566,6 +36169,30 @@
           <a:bodyPr/>
           <a:lstStyle/>
           <a:p>
+            <a:endParaRPr lang="en-US"/>
+          </a:p>
+        </p:txBody>
+      </p:sp>
+      <p:sp>
+        <p:nvSpPr>
+          <p:cNvPr id="6" name="Slide Number Placeholder 5"/>
+          <p:cNvSpPr>
+            <a:spLocks noGrp="1"/>
+          </p:cNvSpPr>
+          <p:nvPr>
+            <p:ph type="sldNum" sz="quarter" idx="12"/>
+          </p:nvPr>
+        </p:nvSpPr>
+        <p:spPr/>
+        <p:txBody>
+          <a:bodyPr/>
+          <a:lstStyle/>
+          <a:p>
+            <a:fld id="{96E69268-9C8B-4EBF-A9EE-DC5DC2D48DC3}" type="slidenum">
+              <a:rPr lang="en-US" smtClean="0"/>
+              <a:pPr/>
+              <a:t>‹#›</a:t>
+            </a:fld>
             <a:endParaRPr lang="en-US"/>
           </a:p>
         </p:txBody>
@@ -34038,6 +37665,30 @@
           </a:p>
         </p:txBody>
       </p:sp>
+      <p:sp>
+        <p:nvSpPr>
+          <p:cNvPr id="6" name="Slide Number Placeholder 5"/>
+          <p:cNvSpPr>
+            <a:spLocks noGrp="1"/>
+          </p:cNvSpPr>
+          <p:nvPr>
+            <p:ph type="sldNum" sz="quarter" idx="12"/>
+          </p:nvPr>
+        </p:nvSpPr>
+        <p:spPr/>
+        <p:txBody>
+          <a:bodyPr/>
+          <a:lstStyle/>
+          <a:p>
+            <a:fld id="{96E69268-9C8B-4EBF-A9EE-DC5DC2D48DC3}" type="slidenum">
+              <a:rPr lang="en-US" smtClean="0"/>
+              <a:pPr/>
+              <a:t>‹#›</a:t>
+            </a:fld>
+            <a:endParaRPr lang="en-US"/>
+          </a:p>
+        </p:txBody>
+      </p:sp>
     </p:spTree>
     <p:extLst>
       <p:ext uri="{BB962C8B-B14F-4D97-AF65-F5344CB8AC3E}">
@@ -34180,6 +37831,30 @@
           </a:p>
         </p:txBody>
       </p:sp>
+      <p:sp>
+        <p:nvSpPr>
+          <p:cNvPr id="5" name="Slide Number Placeholder 4"/>
+          <p:cNvSpPr>
+            <a:spLocks noGrp="1"/>
+          </p:cNvSpPr>
+          <p:nvPr>
+            <p:ph type="sldNum" sz="quarter" idx="12"/>
+          </p:nvPr>
+        </p:nvSpPr>
+        <p:spPr/>
+        <p:txBody>
+          <a:bodyPr/>
+          <a:lstStyle/>
+          <a:p>
+            <a:fld id="{96E69268-9C8B-4EBF-A9EE-DC5DC2D48DC3}" type="slidenum">
+              <a:rPr lang="en-US" smtClean="0"/>
+              <a:pPr/>
+              <a:t>‹#›</a:t>
+            </a:fld>
+            <a:endParaRPr lang="en-US"/>
+          </a:p>
+        </p:txBody>
+      </p:sp>
     </p:spTree>
     <p:extLst>
       <p:ext uri="{BB962C8B-B14F-4D97-AF65-F5344CB8AC3E}">
@@ -34418,6 +38093,30 @@
           </a:p>
         </p:txBody>
       </p:sp>
+      <p:sp>
+        <p:nvSpPr>
+          <p:cNvPr id="6" name="Slide Number Placeholder 5"/>
+          <p:cNvSpPr>
+            <a:spLocks noGrp="1"/>
+          </p:cNvSpPr>
+          <p:nvPr>
+            <p:ph type="sldNum" sz="quarter" idx="12"/>
+          </p:nvPr>
+        </p:nvSpPr>
+        <p:spPr/>
+        <p:txBody>
+          <a:bodyPr/>
+          <a:lstStyle/>
+          <a:p>
+            <a:fld id="{E5EDE275-BE14-4364-AEA2-5F5667C0FD49}" type="slidenum">
+              <a:rPr lang="en-US" smtClean="0"/>
+              <a:pPr/>
+              <a:t>‹#›</a:t>
+            </a:fld>
+            <a:endParaRPr lang="en-US"/>
+          </a:p>
+        </p:txBody>
+      </p:sp>
     </p:spTree>
     <p:extLst>
       <p:ext uri="{BB962C8B-B14F-4D97-AF65-F5344CB8AC3E}">
@@ -34564,6 +38263,30 @@
           </a:p>
         </p:txBody>
       </p:sp>
+      <p:sp>
+        <p:nvSpPr>
+          <p:cNvPr id="6" name="Slide Number Placeholder 5"/>
+          <p:cNvSpPr>
+            <a:spLocks noGrp="1"/>
+          </p:cNvSpPr>
+          <p:nvPr>
+            <p:ph type="sldNum" sz="quarter" idx="12"/>
+          </p:nvPr>
+        </p:nvSpPr>
+        <p:spPr/>
+        <p:txBody>
+          <a:bodyPr/>
+          <a:lstStyle/>
+          <a:p>
+            <a:fld id="{96E69268-9C8B-4EBF-A9EE-DC5DC2D48DC3}" type="slidenum">
+              <a:rPr lang="en-US" smtClean="0"/>
+              <a:pPr/>
+              <a:t>‹#›</a:t>
+            </a:fld>
+            <a:endParaRPr lang="en-US"/>
+          </a:p>
+        </p:txBody>
+      </p:sp>
     </p:spTree>
     <p:extLst>
       <p:ext uri="{BB962C8B-B14F-4D97-AF65-F5344CB8AC3E}">
@@ -34787,6 +38510,30 @@
           </a:p>
         </p:txBody>
       </p:sp>
+      <p:sp>
+        <p:nvSpPr>
+          <p:cNvPr id="6" name="Slide Number Placeholder 5"/>
+          <p:cNvSpPr>
+            <a:spLocks noGrp="1"/>
+          </p:cNvSpPr>
+          <p:nvPr>
+            <p:ph type="sldNum" sz="quarter" idx="12"/>
+          </p:nvPr>
+        </p:nvSpPr>
+        <p:spPr/>
+        <p:txBody>
+          <a:bodyPr/>
+          <a:lstStyle/>
+          <a:p>
+            <a:fld id="{96E69268-9C8B-4EBF-A9EE-DC5DC2D48DC3}" type="slidenum">
+              <a:rPr lang="en-US" smtClean="0"/>
+              <a:pPr/>
+              <a:t>‹#›</a:t>
+            </a:fld>
+            <a:endParaRPr lang="en-US"/>
+          </a:p>
+        </p:txBody>
+      </p:sp>
     </p:spTree>
     <p:extLst>
       <p:ext uri="{BB962C8B-B14F-4D97-AF65-F5344CB8AC3E}">
@@ -35050,6 +38797,30 @@
           </a:p>
         </p:txBody>
       </p:sp>
+      <p:sp>
+        <p:nvSpPr>
+          <p:cNvPr id="7" name="Slide Number Placeholder 6"/>
+          <p:cNvSpPr>
+            <a:spLocks noGrp="1"/>
+          </p:cNvSpPr>
+          <p:nvPr>
+            <p:ph type="sldNum" sz="quarter" idx="12"/>
+          </p:nvPr>
+        </p:nvSpPr>
+        <p:spPr/>
+        <p:txBody>
+          <a:bodyPr/>
+          <a:lstStyle/>
+          <a:p>
+            <a:fld id="{96E69268-9C8B-4EBF-A9EE-DC5DC2D48DC3}" type="slidenum">
+              <a:rPr lang="en-US" smtClean="0"/>
+              <a:pPr/>
+              <a:t>‹#›</a:t>
+            </a:fld>
+            <a:endParaRPr lang="en-US"/>
+          </a:p>
+        </p:txBody>
+      </p:sp>
     </p:spTree>
     <p:extLst>
       <p:ext uri="{BB962C8B-B14F-4D97-AF65-F5344CB8AC3E}">
@@ -35447,6 +39218,30 @@
           </a:p>
         </p:txBody>
       </p:sp>
+      <p:sp>
+        <p:nvSpPr>
+          <p:cNvPr id="9" name="Slide Number Placeholder 8"/>
+          <p:cNvSpPr>
+            <a:spLocks noGrp="1"/>
+          </p:cNvSpPr>
+          <p:nvPr>
+            <p:ph type="sldNum" sz="quarter" idx="12"/>
+          </p:nvPr>
+        </p:nvSpPr>
+        <p:spPr/>
+        <p:txBody>
+          <a:bodyPr/>
+          <a:lstStyle/>
+          <a:p>
+            <a:fld id="{96E69268-9C8B-4EBF-A9EE-DC5DC2D48DC3}" type="slidenum">
+              <a:rPr lang="en-US" smtClean="0"/>
+              <a:pPr/>
+              <a:t>‹#›</a:t>
+            </a:fld>
+            <a:endParaRPr lang="en-US"/>
+          </a:p>
+        </p:txBody>
+      </p:sp>
     </p:spTree>
     <p:extLst>
       <p:ext uri="{BB962C8B-B14F-4D97-AF65-F5344CB8AC3E}">
@@ -35544,6 +39339,30 @@
           <a:bodyPr/>
           <a:lstStyle/>
           <a:p>
+            <a:endParaRPr lang="en-US"/>
+          </a:p>
+        </p:txBody>
+      </p:sp>
+      <p:sp>
+        <p:nvSpPr>
+          <p:cNvPr id="5" name="Slide Number Placeholder 4"/>
+          <p:cNvSpPr>
+            <a:spLocks noGrp="1"/>
+          </p:cNvSpPr>
+          <p:nvPr>
+            <p:ph type="sldNum" sz="quarter" idx="12"/>
+          </p:nvPr>
+        </p:nvSpPr>
+        <p:spPr/>
+        <p:txBody>
+          <a:bodyPr/>
+          <a:lstStyle/>
+          <a:p>
+            <a:fld id="{96E69268-9C8B-4EBF-A9EE-DC5DC2D48DC3}" type="slidenum">
+              <a:rPr lang="en-US" smtClean="0"/>
+              <a:pPr/>
+              <a:t>‹#›</a:t>
+            </a:fld>
             <a:endParaRPr lang="en-US"/>
           </a:p>
         </p:txBody>
@@ -35660,6 +39479,30 @@
           </a:p>
         </p:txBody>
       </p:sp>
+      <p:sp>
+        <p:nvSpPr>
+          <p:cNvPr id="5" name="Slide Number Placeholder 4"/>
+          <p:cNvSpPr>
+            <a:spLocks noGrp="1"/>
+          </p:cNvSpPr>
+          <p:nvPr>
+            <p:ph type="sldNum" sz="quarter" idx="12"/>
+          </p:nvPr>
+        </p:nvSpPr>
+        <p:spPr/>
+        <p:txBody>
+          <a:bodyPr/>
+          <a:lstStyle/>
+          <a:p>
+            <a:fld id="{96E69268-9C8B-4EBF-A9EE-DC5DC2D48DC3}" type="slidenum">
+              <a:rPr lang="en-US" smtClean="0"/>
+              <a:pPr/>
+              <a:t>‹#›</a:t>
+            </a:fld>
+            <a:endParaRPr lang="en-US"/>
+          </a:p>
+        </p:txBody>
+      </p:sp>
     </p:spTree>
     <p:extLst>
       <p:ext uri="{BB962C8B-B14F-4D97-AF65-F5344CB8AC3E}">
@@ -35733,6 +39576,30 @@
           </a:p>
         </p:txBody>
       </p:sp>
+      <p:sp>
+        <p:nvSpPr>
+          <p:cNvPr id="4" name="Slide Number Placeholder 3"/>
+          <p:cNvSpPr>
+            <a:spLocks noGrp="1"/>
+          </p:cNvSpPr>
+          <p:nvPr>
+            <p:ph type="sldNum" sz="quarter" idx="12"/>
+          </p:nvPr>
+        </p:nvSpPr>
+        <p:spPr/>
+        <p:txBody>
+          <a:bodyPr/>
+          <a:lstStyle/>
+          <a:p>
+            <a:fld id="{96E69268-9C8B-4EBF-A9EE-DC5DC2D48DC3}" type="slidenum">
+              <a:rPr lang="en-US" smtClean="0"/>
+              <a:pPr/>
+              <a:t>‹#›</a:t>
+            </a:fld>
+            <a:endParaRPr lang="en-US"/>
+          </a:p>
+        </p:txBody>
+      </p:sp>
     </p:spTree>
     <p:extLst>
       <p:ext uri="{BB962C8B-B14F-4D97-AF65-F5344CB8AC3E}">
@@ -35971,6 +39838,30 @@
           </a:p>
         </p:txBody>
       </p:sp>
+      <p:sp>
+        <p:nvSpPr>
+          <p:cNvPr id="6" name="Slide Number Placeholder 5"/>
+          <p:cNvSpPr>
+            <a:spLocks noGrp="1"/>
+          </p:cNvSpPr>
+          <p:nvPr>
+            <p:ph type="sldNum" sz="quarter" idx="12"/>
+          </p:nvPr>
+        </p:nvSpPr>
+        <p:spPr/>
+        <p:txBody>
+          <a:bodyPr/>
+          <a:lstStyle/>
+          <a:p>
+            <a:fld id="{E5EDE275-BE14-4364-AEA2-5F5667C0FD49}" type="slidenum">
+              <a:rPr lang="en-US" smtClean="0"/>
+              <a:pPr/>
+              <a:t>‹#›</a:t>
+            </a:fld>
+            <a:endParaRPr lang="en-US"/>
+          </a:p>
+        </p:txBody>
+      </p:sp>
     </p:spTree>
     <p:extLst>
       <p:ext uri="{BB962C8B-B14F-4D97-AF65-F5344CB8AC3E}">
@@ -36224,6 +40115,30 @@
           </a:p>
         </p:txBody>
       </p:sp>
+      <p:sp>
+        <p:nvSpPr>
+          <p:cNvPr id="7" name="Slide Number Placeholder 6"/>
+          <p:cNvSpPr>
+            <a:spLocks noGrp="1"/>
+          </p:cNvSpPr>
+          <p:nvPr>
+            <p:ph type="sldNum" sz="quarter" idx="12"/>
+          </p:nvPr>
+        </p:nvSpPr>
+        <p:spPr/>
+        <p:txBody>
+          <a:bodyPr/>
+          <a:lstStyle/>
+          <a:p>
+            <a:fld id="{96E69268-9C8B-4EBF-A9EE-DC5DC2D48DC3}" type="slidenum">
+              <a:rPr lang="en-US" smtClean="0"/>
+              <a:pPr/>
+              <a:t>‹#›</a:t>
+            </a:fld>
+            <a:endParaRPr lang="en-US"/>
+          </a:p>
+        </p:txBody>
+      </p:sp>
     </p:spTree>
     <p:extLst>
       <p:ext uri="{BB962C8B-B14F-4D97-AF65-F5344CB8AC3E}">
@@ -36454,6 +40369,30 @@
           </a:p>
         </p:txBody>
       </p:sp>
+      <p:sp>
+        <p:nvSpPr>
+          <p:cNvPr id="7" name="Slide Number Placeholder 6"/>
+          <p:cNvSpPr>
+            <a:spLocks noGrp="1"/>
+          </p:cNvSpPr>
+          <p:nvPr>
+            <p:ph type="sldNum" sz="quarter" idx="12"/>
+          </p:nvPr>
+        </p:nvSpPr>
+        <p:spPr/>
+        <p:txBody>
+          <a:bodyPr/>
+          <a:lstStyle/>
+          <a:p>
+            <a:fld id="{96E69268-9C8B-4EBF-A9EE-DC5DC2D48DC3}" type="slidenum">
+              <a:rPr lang="en-US" smtClean="0"/>
+              <a:pPr/>
+              <a:t>‹#›</a:t>
+            </a:fld>
+            <a:endParaRPr lang="en-US"/>
+          </a:p>
+        </p:txBody>
+      </p:sp>
     </p:spTree>
     <p:extLst>
       <p:ext uri="{BB962C8B-B14F-4D97-AF65-F5344CB8AC3E}">
@@ -36600,6 +40539,30 @@
           </a:p>
         </p:txBody>
       </p:sp>
+      <p:sp>
+        <p:nvSpPr>
+          <p:cNvPr id="6" name="Slide Number Placeholder 5"/>
+          <p:cNvSpPr>
+            <a:spLocks noGrp="1"/>
+          </p:cNvSpPr>
+          <p:nvPr>
+            <p:ph type="sldNum" sz="quarter" idx="12"/>
+          </p:nvPr>
+        </p:nvSpPr>
+        <p:spPr/>
+        <p:txBody>
+          <a:bodyPr/>
+          <a:lstStyle/>
+          <a:p>
+            <a:fld id="{96E69268-9C8B-4EBF-A9EE-DC5DC2D48DC3}" type="slidenum">
+              <a:rPr lang="en-US" smtClean="0"/>
+              <a:pPr/>
+              <a:t>‹#›</a:t>
+            </a:fld>
+            <a:endParaRPr lang="en-US"/>
+          </a:p>
+        </p:txBody>
+      </p:sp>
     </p:spTree>
     <p:extLst>
       <p:ext uri="{BB962C8B-B14F-4D97-AF65-F5344CB8AC3E}">
@@ -36752,6 +40715,30 @@
           <a:bodyPr/>
           <a:lstStyle/>
           <a:p>
+            <a:endParaRPr lang="en-US"/>
+          </a:p>
+        </p:txBody>
+      </p:sp>
+      <p:sp>
+        <p:nvSpPr>
+          <p:cNvPr id="6" name="Slide Number Placeholder 5"/>
+          <p:cNvSpPr>
+            <a:spLocks noGrp="1"/>
+          </p:cNvSpPr>
+          <p:nvPr>
+            <p:ph type="sldNum" sz="quarter" idx="12"/>
+          </p:nvPr>
+        </p:nvSpPr>
+        <p:spPr/>
+        <p:txBody>
+          <a:bodyPr/>
+          <a:lstStyle/>
+          <a:p>
+            <a:fld id="{96E69268-9C8B-4EBF-A9EE-DC5DC2D48DC3}" type="slidenum">
+              <a:rPr lang="en-US" smtClean="0"/>
+              <a:pPr/>
+              <a:t>‹#›</a:t>
+            </a:fld>
             <a:endParaRPr lang="en-US"/>
           </a:p>
         </p:txBody>
@@ -36898,6 +40885,30 @@
           </a:p>
         </p:txBody>
       </p:sp>
+      <p:sp>
+        <p:nvSpPr>
+          <p:cNvPr id="5" name="Slide Number Placeholder 4"/>
+          <p:cNvSpPr>
+            <a:spLocks noGrp="1"/>
+          </p:cNvSpPr>
+          <p:nvPr>
+            <p:ph type="sldNum" sz="quarter" idx="12"/>
+          </p:nvPr>
+        </p:nvSpPr>
+        <p:spPr/>
+        <p:txBody>
+          <a:bodyPr/>
+          <a:lstStyle/>
+          <a:p>
+            <a:fld id="{96E69268-9C8B-4EBF-A9EE-DC5DC2D48DC3}" type="slidenum">
+              <a:rPr lang="en-US" smtClean="0"/>
+              <a:pPr/>
+              <a:t>‹#›</a:t>
+            </a:fld>
+            <a:endParaRPr lang="en-US"/>
+          </a:p>
+        </p:txBody>
+      </p:sp>
     </p:spTree>
     <p:extLst>
       <p:ext uri="{BB962C8B-B14F-4D97-AF65-F5344CB8AC3E}">
@@ -37136,6 +41147,30 @@
           </a:p>
         </p:txBody>
       </p:sp>
+      <p:sp>
+        <p:nvSpPr>
+          <p:cNvPr id="6" name="Slide Number Placeholder 5"/>
+          <p:cNvSpPr>
+            <a:spLocks noGrp="1"/>
+          </p:cNvSpPr>
+          <p:nvPr>
+            <p:ph type="sldNum" sz="quarter" idx="12"/>
+          </p:nvPr>
+        </p:nvSpPr>
+        <p:spPr/>
+        <p:txBody>
+          <a:bodyPr/>
+          <a:lstStyle/>
+          <a:p>
+            <a:fld id="{E5EDE275-BE14-4364-AEA2-5F5667C0FD49}" type="slidenum">
+              <a:rPr lang="en-US" smtClean="0"/>
+              <a:pPr/>
+              <a:t>‹#›</a:t>
+            </a:fld>
+            <a:endParaRPr lang="en-US"/>
+          </a:p>
+        </p:txBody>
+      </p:sp>
     </p:spTree>
     <p:extLst>
       <p:ext uri="{BB962C8B-B14F-4D97-AF65-F5344CB8AC3E}">
@@ -37354,6 +41389,30 @@
           </a:p>
         </p:txBody>
       </p:sp>
+      <p:sp>
+        <p:nvSpPr>
+          <p:cNvPr id="6" name="Slide Number Placeholder 5"/>
+          <p:cNvSpPr>
+            <a:spLocks noGrp="1"/>
+          </p:cNvSpPr>
+          <p:nvPr>
+            <p:ph type="sldNum" sz="quarter" idx="12"/>
+          </p:nvPr>
+        </p:nvSpPr>
+        <p:spPr/>
+        <p:txBody>
+          <a:bodyPr/>
+          <a:lstStyle/>
+          <a:p>
+            <a:fld id="{96E69268-9C8B-4EBF-A9EE-DC5DC2D48DC3}" type="slidenum">
+              <a:rPr lang="en-US" smtClean="0"/>
+              <a:pPr/>
+              <a:t>‹#›</a:t>
+            </a:fld>
+            <a:endParaRPr lang="en-US"/>
+          </a:p>
+        </p:txBody>
+      </p:sp>
     </p:spTree>
     <p:extLst>
       <p:ext uri="{BB962C8B-B14F-4D97-AF65-F5344CB8AC3E}">
@@ -37500,6 +41559,30 @@
           </a:p>
         </p:txBody>
       </p:sp>
+      <p:sp>
+        <p:nvSpPr>
+          <p:cNvPr id="6" name="Slide Number Placeholder 5"/>
+          <p:cNvSpPr>
+            <a:spLocks noGrp="1"/>
+          </p:cNvSpPr>
+          <p:nvPr>
+            <p:ph type="sldNum" sz="quarter" idx="12"/>
+          </p:nvPr>
+        </p:nvSpPr>
+        <p:spPr/>
+        <p:txBody>
+          <a:bodyPr/>
+          <a:lstStyle/>
+          <a:p>
+            <a:fld id="{96E69268-9C8B-4EBF-A9EE-DC5DC2D48DC3}" type="slidenum">
+              <a:rPr lang="en-US" smtClean="0"/>
+              <a:pPr/>
+              <a:t>‹#›</a:t>
+            </a:fld>
+            <a:endParaRPr lang="en-US"/>
+          </a:p>
+        </p:txBody>
+      </p:sp>
     </p:spTree>
     <p:extLst>
       <p:ext uri="{BB962C8B-B14F-4D97-AF65-F5344CB8AC3E}">
@@ -37723,6 +41806,30 @@
           </a:p>
         </p:txBody>
       </p:sp>
+      <p:sp>
+        <p:nvSpPr>
+          <p:cNvPr id="6" name="Slide Number Placeholder 5"/>
+          <p:cNvSpPr>
+            <a:spLocks noGrp="1"/>
+          </p:cNvSpPr>
+          <p:nvPr>
+            <p:ph type="sldNum" sz="quarter" idx="12"/>
+          </p:nvPr>
+        </p:nvSpPr>
+        <p:spPr/>
+        <p:txBody>
+          <a:bodyPr/>
+          <a:lstStyle/>
+          <a:p>
+            <a:fld id="{96E69268-9C8B-4EBF-A9EE-DC5DC2D48DC3}" type="slidenum">
+              <a:rPr lang="en-US" smtClean="0"/>
+              <a:pPr/>
+              <a:t>‹#›</a:t>
+            </a:fld>
+            <a:endParaRPr lang="en-US"/>
+          </a:p>
+        </p:txBody>
+      </p:sp>
     </p:spTree>
     <p:extLst>
       <p:ext uri="{BB962C8B-B14F-4D97-AF65-F5344CB8AC3E}">
@@ -37986,6 +42093,30 @@
           </a:p>
         </p:txBody>
       </p:sp>
+      <p:sp>
+        <p:nvSpPr>
+          <p:cNvPr id="7" name="Slide Number Placeholder 6"/>
+          <p:cNvSpPr>
+            <a:spLocks noGrp="1"/>
+          </p:cNvSpPr>
+          <p:nvPr>
+            <p:ph type="sldNum" sz="quarter" idx="12"/>
+          </p:nvPr>
+        </p:nvSpPr>
+        <p:spPr/>
+        <p:txBody>
+          <a:bodyPr/>
+          <a:lstStyle/>
+          <a:p>
+            <a:fld id="{96E69268-9C8B-4EBF-A9EE-DC5DC2D48DC3}" type="slidenum">
+              <a:rPr lang="en-US" smtClean="0"/>
+              <a:pPr/>
+              <a:t>‹#›</a:t>
+            </a:fld>
+            <a:endParaRPr lang="en-US"/>
+          </a:p>
+        </p:txBody>
+      </p:sp>
     </p:spTree>
     <p:extLst>
       <p:ext uri="{BB962C8B-B14F-4D97-AF65-F5344CB8AC3E}">
@@ -38204,6 +42335,30 @@
           </a:p>
         </p:txBody>
       </p:sp>
+      <p:sp>
+        <p:nvSpPr>
+          <p:cNvPr id="6" name="Slide Number Placeholder 5"/>
+          <p:cNvSpPr>
+            <a:spLocks noGrp="1"/>
+          </p:cNvSpPr>
+          <p:nvPr>
+            <p:ph type="sldNum" sz="quarter" idx="12"/>
+          </p:nvPr>
+        </p:nvSpPr>
+        <p:spPr/>
+        <p:txBody>
+          <a:bodyPr/>
+          <a:lstStyle/>
+          <a:p>
+            <a:fld id="{96E69268-9C8B-4EBF-A9EE-DC5DC2D48DC3}" type="slidenum">
+              <a:rPr lang="en-US" smtClean="0"/>
+              <a:pPr/>
+              <a:t>‹#›</a:t>
+            </a:fld>
+            <a:endParaRPr lang="en-US"/>
+          </a:p>
+        </p:txBody>
+      </p:sp>
     </p:spTree>
     <p:extLst>
       <p:ext uri="{BB962C8B-B14F-4D97-AF65-F5344CB8AC3E}">
@@ -38601,6 +42756,30 @@
           </a:p>
         </p:txBody>
       </p:sp>
+      <p:sp>
+        <p:nvSpPr>
+          <p:cNvPr id="9" name="Slide Number Placeholder 8"/>
+          <p:cNvSpPr>
+            <a:spLocks noGrp="1"/>
+          </p:cNvSpPr>
+          <p:nvPr>
+            <p:ph type="sldNum" sz="quarter" idx="12"/>
+          </p:nvPr>
+        </p:nvSpPr>
+        <p:spPr/>
+        <p:txBody>
+          <a:bodyPr/>
+          <a:lstStyle/>
+          <a:p>
+            <a:fld id="{96E69268-9C8B-4EBF-A9EE-DC5DC2D48DC3}" type="slidenum">
+              <a:rPr lang="en-US" smtClean="0"/>
+              <a:pPr/>
+              <a:t>‹#›</a:t>
+            </a:fld>
+            <a:endParaRPr lang="en-US"/>
+          </a:p>
+        </p:txBody>
+      </p:sp>
     </p:spTree>
     <p:extLst>
       <p:ext uri="{BB962C8B-B14F-4D97-AF65-F5344CB8AC3E}">
@@ -38702,6 +42881,30 @@
           </a:p>
         </p:txBody>
       </p:sp>
+      <p:sp>
+        <p:nvSpPr>
+          <p:cNvPr id="5" name="Slide Number Placeholder 4"/>
+          <p:cNvSpPr>
+            <a:spLocks noGrp="1"/>
+          </p:cNvSpPr>
+          <p:nvPr>
+            <p:ph type="sldNum" sz="quarter" idx="12"/>
+          </p:nvPr>
+        </p:nvSpPr>
+        <p:spPr/>
+        <p:txBody>
+          <a:bodyPr/>
+          <a:lstStyle/>
+          <a:p>
+            <a:fld id="{96E69268-9C8B-4EBF-A9EE-DC5DC2D48DC3}" type="slidenum">
+              <a:rPr lang="en-US" smtClean="0"/>
+              <a:pPr/>
+              <a:t>‹#›</a:t>
+            </a:fld>
+            <a:endParaRPr lang="en-US"/>
+          </a:p>
+        </p:txBody>
+      </p:sp>
     </p:spTree>
     <p:extLst>
       <p:ext uri="{BB962C8B-B14F-4D97-AF65-F5344CB8AC3E}">
@@ -38775,6 +42978,30 @@
           </a:p>
         </p:txBody>
       </p:sp>
+      <p:sp>
+        <p:nvSpPr>
+          <p:cNvPr id="4" name="Slide Number Placeholder 3"/>
+          <p:cNvSpPr>
+            <a:spLocks noGrp="1"/>
+          </p:cNvSpPr>
+          <p:nvPr>
+            <p:ph type="sldNum" sz="quarter" idx="12"/>
+          </p:nvPr>
+        </p:nvSpPr>
+        <p:spPr/>
+        <p:txBody>
+          <a:bodyPr/>
+          <a:lstStyle/>
+          <a:p>
+            <a:fld id="{96E69268-9C8B-4EBF-A9EE-DC5DC2D48DC3}" type="slidenum">
+              <a:rPr lang="en-US" smtClean="0"/>
+              <a:pPr/>
+              <a:t>‹#›</a:t>
+            </a:fld>
+            <a:endParaRPr lang="en-US"/>
+          </a:p>
+        </p:txBody>
+      </p:sp>
     </p:spTree>
     <p:extLst>
       <p:ext uri="{BB962C8B-B14F-4D97-AF65-F5344CB8AC3E}">
@@ -39028,6 +43255,30 @@
           </a:p>
         </p:txBody>
       </p:sp>
+      <p:sp>
+        <p:nvSpPr>
+          <p:cNvPr id="7" name="Slide Number Placeholder 6"/>
+          <p:cNvSpPr>
+            <a:spLocks noGrp="1"/>
+          </p:cNvSpPr>
+          <p:nvPr>
+            <p:ph type="sldNum" sz="quarter" idx="12"/>
+          </p:nvPr>
+        </p:nvSpPr>
+        <p:spPr/>
+        <p:txBody>
+          <a:bodyPr/>
+          <a:lstStyle/>
+          <a:p>
+            <a:fld id="{96E69268-9C8B-4EBF-A9EE-DC5DC2D48DC3}" type="slidenum">
+              <a:rPr lang="en-US" smtClean="0"/>
+              <a:pPr/>
+              <a:t>‹#›</a:t>
+            </a:fld>
+            <a:endParaRPr lang="en-US"/>
+          </a:p>
+        </p:txBody>
+      </p:sp>
     </p:spTree>
     <p:extLst>
       <p:ext uri="{BB962C8B-B14F-4D97-AF65-F5344CB8AC3E}">
@@ -39258,6 +43509,30 @@
           </a:p>
         </p:txBody>
       </p:sp>
+      <p:sp>
+        <p:nvSpPr>
+          <p:cNvPr id="7" name="Slide Number Placeholder 6"/>
+          <p:cNvSpPr>
+            <a:spLocks noGrp="1"/>
+          </p:cNvSpPr>
+          <p:nvPr>
+            <p:ph type="sldNum" sz="quarter" idx="12"/>
+          </p:nvPr>
+        </p:nvSpPr>
+        <p:spPr/>
+        <p:txBody>
+          <a:bodyPr/>
+          <a:lstStyle/>
+          <a:p>
+            <a:fld id="{96E69268-9C8B-4EBF-A9EE-DC5DC2D48DC3}" type="slidenum">
+              <a:rPr lang="en-US" smtClean="0"/>
+              <a:pPr/>
+              <a:t>‹#›</a:t>
+            </a:fld>
+            <a:endParaRPr lang="en-US"/>
+          </a:p>
+        </p:txBody>
+      </p:sp>
     </p:spTree>
     <p:extLst>
       <p:ext uri="{BB962C8B-B14F-4D97-AF65-F5344CB8AC3E}">
@@ -39404,6 +43679,30 @@
           </a:p>
         </p:txBody>
       </p:sp>
+      <p:sp>
+        <p:nvSpPr>
+          <p:cNvPr id="6" name="Slide Number Placeholder 5"/>
+          <p:cNvSpPr>
+            <a:spLocks noGrp="1"/>
+          </p:cNvSpPr>
+          <p:nvPr>
+            <p:ph type="sldNum" sz="quarter" idx="12"/>
+          </p:nvPr>
+        </p:nvSpPr>
+        <p:spPr/>
+        <p:txBody>
+          <a:bodyPr/>
+          <a:lstStyle/>
+          <a:p>
+            <a:fld id="{96E69268-9C8B-4EBF-A9EE-DC5DC2D48DC3}" type="slidenum">
+              <a:rPr lang="en-US" smtClean="0"/>
+              <a:pPr/>
+              <a:t>‹#›</a:t>
+            </a:fld>
+            <a:endParaRPr lang="en-US"/>
+          </a:p>
+        </p:txBody>
+      </p:sp>
     </p:spTree>
     <p:extLst>
       <p:ext uri="{BB962C8B-B14F-4D97-AF65-F5344CB8AC3E}">
@@ -39556,6 +43855,30 @@
           <a:bodyPr/>
           <a:lstStyle/>
           <a:p>
+            <a:endParaRPr lang="en-US"/>
+          </a:p>
+        </p:txBody>
+      </p:sp>
+      <p:sp>
+        <p:nvSpPr>
+          <p:cNvPr id="6" name="Slide Number Placeholder 5"/>
+          <p:cNvSpPr>
+            <a:spLocks noGrp="1"/>
+          </p:cNvSpPr>
+          <p:nvPr>
+            <p:ph type="sldNum" sz="quarter" idx="12"/>
+          </p:nvPr>
+        </p:nvSpPr>
+        <p:spPr/>
+        <p:txBody>
+          <a:bodyPr/>
+          <a:lstStyle/>
+          <a:p>
+            <a:fld id="{96E69268-9C8B-4EBF-A9EE-DC5DC2D48DC3}" type="slidenum">
+              <a:rPr lang="en-US" smtClean="0"/>
+              <a:pPr/>
+              <a:t>‹#›</a:t>
+            </a:fld>
             <a:endParaRPr lang="en-US"/>
           </a:p>
         </p:txBody>
@@ -39702,6 +44025,30 @@
           </a:p>
         </p:txBody>
       </p:sp>
+      <p:sp>
+        <p:nvSpPr>
+          <p:cNvPr id="5" name="Slide Number Placeholder 4"/>
+          <p:cNvSpPr>
+            <a:spLocks noGrp="1"/>
+          </p:cNvSpPr>
+          <p:nvPr>
+            <p:ph type="sldNum" sz="quarter" idx="12"/>
+          </p:nvPr>
+        </p:nvSpPr>
+        <p:spPr/>
+        <p:txBody>
+          <a:bodyPr/>
+          <a:lstStyle/>
+          <a:p>
+            <a:fld id="{96E69268-9C8B-4EBF-A9EE-DC5DC2D48DC3}" type="slidenum">
+              <a:rPr lang="en-US" smtClean="0"/>
+              <a:pPr/>
+              <a:t>‹#›</a:t>
+            </a:fld>
+            <a:endParaRPr lang="en-US"/>
+          </a:p>
+        </p:txBody>
+      </p:sp>
     </p:spTree>
     <p:extLst>
       <p:ext uri="{BB962C8B-B14F-4D97-AF65-F5344CB8AC3E}">
@@ -39940,6 +44287,30 @@
           </a:p>
         </p:txBody>
       </p:sp>
+      <p:sp>
+        <p:nvSpPr>
+          <p:cNvPr id="6" name="Slide Number Placeholder 5"/>
+          <p:cNvSpPr>
+            <a:spLocks noGrp="1"/>
+          </p:cNvSpPr>
+          <p:nvPr>
+            <p:ph type="sldNum" sz="quarter" idx="12"/>
+          </p:nvPr>
+        </p:nvSpPr>
+        <p:spPr/>
+        <p:txBody>
+          <a:bodyPr/>
+          <a:lstStyle/>
+          <a:p>
+            <a:fld id="{E5EDE275-BE14-4364-AEA2-5F5667C0FD49}" type="slidenum">
+              <a:rPr lang="en-US" smtClean="0"/>
+              <a:pPr/>
+              <a:t>‹#›</a:t>
+            </a:fld>
+            <a:endParaRPr lang="en-US"/>
+          </a:p>
+        </p:txBody>
+      </p:sp>
     </p:spTree>
     <p:extLst>
       <p:ext uri="{BB962C8B-B14F-4D97-AF65-F5344CB8AC3E}">
@@ -40158,6 +44529,30 @@
           </a:p>
         </p:txBody>
       </p:sp>
+      <p:sp>
+        <p:nvSpPr>
+          <p:cNvPr id="6" name="Slide Number Placeholder 5"/>
+          <p:cNvSpPr>
+            <a:spLocks noGrp="1"/>
+          </p:cNvSpPr>
+          <p:nvPr>
+            <p:ph type="sldNum" sz="quarter" idx="12"/>
+          </p:nvPr>
+        </p:nvSpPr>
+        <p:spPr/>
+        <p:txBody>
+          <a:bodyPr/>
+          <a:lstStyle/>
+          <a:p>
+            <a:fld id="{96E69268-9C8B-4EBF-A9EE-DC5DC2D48DC3}" type="slidenum">
+              <a:rPr lang="en-US" smtClean="0"/>
+              <a:pPr/>
+              <a:t>‹#›</a:t>
+            </a:fld>
+            <a:endParaRPr lang="en-US"/>
+          </a:p>
+        </p:txBody>
+      </p:sp>
     </p:spTree>
     <p:extLst>
       <p:ext uri="{BB962C8B-B14F-4D97-AF65-F5344CB8AC3E}">
@@ -40304,6 +44699,30 @@
           </a:p>
         </p:txBody>
       </p:sp>
+      <p:sp>
+        <p:nvSpPr>
+          <p:cNvPr id="6" name="Slide Number Placeholder 5"/>
+          <p:cNvSpPr>
+            <a:spLocks noGrp="1"/>
+          </p:cNvSpPr>
+          <p:nvPr>
+            <p:ph type="sldNum" sz="quarter" idx="12"/>
+          </p:nvPr>
+        </p:nvSpPr>
+        <p:spPr/>
+        <p:txBody>
+          <a:bodyPr/>
+          <a:lstStyle/>
+          <a:p>
+            <a:fld id="{96E69268-9C8B-4EBF-A9EE-DC5DC2D48DC3}" type="slidenum">
+              <a:rPr lang="en-US" smtClean="0"/>
+              <a:pPr/>
+              <a:t>‹#›</a:t>
+            </a:fld>
+            <a:endParaRPr lang="en-US"/>
+          </a:p>
+        </p:txBody>
+      </p:sp>
     </p:spTree>
     <p:extLst>
       <p:ext uri="{BB962C8B-B14F-4D97-AF65-F5344CB8AC3E}">
@@ -40450,6 +44869,30 @@
           </a:p>
         </p:txBody>
       </p:sp>
+      <p:sp>
+        <p:nvSpPr>
+          <p:cNvPr id="6" name="Slide Number Placeholder 5"/>
+          <p:cNvSpPr>
+            <a:spLocks noGrp="1"/>
+          </p:cNvSpPr>
+          <p:nvPr>
+            <p:ph type="sldNum" sz="quarter" idx="12"/>
+          </p:nvPr>
+        </p:nvSpPr>
+        <p:spPr/>
+        <p:txBody>
+          <a:bodyPr/>
+          <a:lstStyle/>
+          <a:p>
+            <a:fld id="{96E69268-9C8B-4EBF-A9EE-DC5DC2D48DC3}" type="slidenum">
+              <a:rPr lang="en-US" smtClean="0"/>
+              <a:pPr/>
+              <a:t>‹#›</a:t>
+            </a:fld>
+            <a:endParaRPr lang="en-US"/>
+          </a:p>
+        </p:txBody>
+      </p:sp>
     </p:spTree>
     <p:extLst>
       <p:ext uri="{BB962C8B-B14F-4D97-AF65-F5344CB8AC3E}">
@@ -40673,6 +45116,30 @@
           </a:p>
         </p:txBody>
       </p:sp>
+      <p:sp>
+        <p:nvSpPr>
+          <p:cNvPr id="6" name="Slide Number Placeholder 5"/>
+          <p:cNvSpPr>
+            <a:spLocks noGrp="1"/>
+          </p:cNvSpPr>
+          <p:nvPr>
+            <p:ph type="sldNum" sz="quarter" idx="12"/>
+          </p:nvPr>
+        </p:nvSpPr>
+        <p:spPr/>
+        <p:txBody>
+          <a:bodyPr/>
+          <a:lstStyle/>
+          <a:p>
+            <a:fld id="{96E69268-9C8B-4EBF-A9EE-DC5DC2D48DC3}" type="slidenum">
+              <a:rPr lang="en-US" smtClean="0"/>
+              <a:pPr/>
+              <a:t>‹#›</a:t>
+            </a:fld>
+            <a:endParaRPr lang="en-US"/>
+          </a:p>
+        </p:txBody>
+      </p:sp>
     </p:spTree>
     <p:extLst>
       <p:ext uri="{BB962C8B-B14F-4D97-AF65-F5344CB8AC3E}">
@@ -40936,6 +45403,30 @@
           </a:p>
         </p:txBody>
       </p:sp>
+      <p:sp>
+        <p:nvSpPr>
+          <p:cNvPr id="7" name="Slide Number Placeholder 6"/>
+          <p:cNvSpPr>
+            <a:spLocks noGrp="1"/>
+          </p:cNvSpPr>
+          <p:nvPr>
+            <p:ph type="sldNum" sz="quarter" idx="12"/>
+          </p:nvPr>
+        </p:nvSpPr>
+        <p:spPr/>
+        <p:txBody>
+          <a:bodyPr/>
+          <a:lstStyle/>
+          <a:p>
+            <a:fld id="{96E69268-9C8B-4EBF-A9EE-DC5DC2D48DC3}" type="slidenum">
+              <a:rPr lang="en-US" smtClean="0"/>
+              <a:pPr/>
+              <a:t>‹#›</a:t>
+            </a:fld>
+            <a:endParaRPr lang="en-US"/>
+          </a:p>
+        </p:txBody>
+      </p:sp>
     </p:spTree>
     <p:extLst>
       <p:ext uri="{BB962C8B-B14F-4D97-AF65-F5344CB8AC3E}">
@@ -41333,6 +45824,30 @@
           </a:p>
         </p:txBody>
       </p:sp>
+      <p:sp>
+        <p:nvSpPr>
+          <p:cNvPr id="9" name="Slide Number Placeholder 8"/>
+          <p:cNvSpPr>
+            <a:spLocks noGrp="1"/>
+          </p:cNvSpPr>
+          <p:nvPr>
+            <p:ph type="sldNum" sz="quarter" idx="12"/>
+          </p:nvPr>
+        </p:nvSpPr>
+        <p:spPr/>
+        <p:txBody>
+          <a:bodyPr/>
+          <a:lstStyle/>
+          <a:p>
+            <a:fld id="{96E69268-9C8B-4EBF-A9EE-DC5DC2D48DC3}" type="slidenum">
+              <a:rPr lang="en-US" smtClean="0"/>
+              <a:pPr/>
+              <a:t>‹#›</a:t>
+            </a:fld>
+            <a:endParaRPr lang="en-US"/>
+          </a:p>
+        </p:txBody>
+      </p:sp>
     </p:spTree>
     <p:extLst>
       <p:ext uri="{BB962C8B-B14F-4D97-AF65-F5344CB8AC3E}">
@@ -41434,6 +45949,30 @@
           </a:p>
         </p:txBody>
       </p:sp>
+      <p:sp>
+        <p:nvSpPr>
+          <p:cNvPr id="5" name="Slide Number Placeholder 4"/>
+          <p:cNvSpPr>
+            <a:spLocks noGrp="1"/>
+          </p:cNvSpPr>
+          <p:nvPr>
+            <p:ph type="sldNum" sz="quarter" idx="12"/>
+          </p:nvPr>
+        </p:nvSpPr>
+        <p:spPr/>
+        <p:txBody>
+          <a:bodyPr/>
+          <a:lstStyle/>
+          <a:p>
+            <a:fld id="{96E69268-9C8B-4EBF-A9EE-DC5DC2D48DC3}" type="slidenum">
+              <a:rPr lang="en-US" smtClean="0"/>
+              <a:pPr/>
+              <a:t>‹#›</a:t>
+            </a:fld>
+            <a:endParaRPr lang="en-US"/>
+          </a:p>
+        </p:txBody>
+      </p:sp>
     </p:spTree>
     <p:extLst>
       <p:ext uri="{BB962C8B-B14F-4D97-AF65-F5344CB8AC3E}">
@@ -41507,6 +46046,30 @@
           </a:p>
         </p:txBody>
       </p:sp>
+      <p:sp>
+        <p:nvSpPr>
+          <p:cNvPr id="4" name="Slide Number Placeholder 3"/>
+          <p:cNvSpPr>
+            <a:spLocks noGrp="1"/>
+          </p:cNvSpPr>
+          <p:nvPr>
+            <p:ph type="sldNum" sz="quarter" idx="12"/>
+          </p:nvPr>
+        </p:nvSpPr>
+        <p:spPr/>
+        <p:txBody>
+          <a:bodyPr/>
+          <a:lstStyle/>
+          <a:p>
+            <a:fld id="{96E69268-9C8B-4EBF-A9EE-DC5DC2D48DC3}" type="slidenum">
+              <a:rPr lang="en-US" smtClean="0"/>
+              <a:pPr/>
+              <a:t>‹#›</a:t>
+            </a:fld>
+            <a:endParaRPr lang="en-US"/>
+          </a:p>
+        </p:txBody>
+      </p:sp>
     </p:spTree>
     <p:extLst>
       <p:ext uri="{BB962C8B-B14F-4D97-AF65-F5344CB8AC3E}">
@@ -41760,6 +46323,30 @@
           </a:p>
         </p:txBody>
       </p:sp>
+      <p:sp>
+        <p:nvSpPr>
+          <p:cNvPr id="7" name="Slide Number Placeholder 6"/>
+          <p:cNvSpPr>
+            <a:spLocks noGrp="1"/>
+          </p:cNvSpPr>
+          <p:nvPr>
+            <p:ph type="sldNum" sz="quarter" idx="12"/>
+          </p:nvPr>
+        </p:nvSpPr>
+        <p:spPr/>
+        <p:txBody>
+          <a:bodyPr/>
+          <a:lstStyle/>
+          <a:p>
+            <a:fld id="{96E69268-9C8B-4EBF-A9EE-DC5DC2D48DC3}" type="slidenum">
+              <a:rPr lang="en-US" smtClean="0"/>
+              <a:pPr/>
+              <a:t>‹#›</a:t>
+            </a:fld>
+            <a:endParaRPr lang="en-US"/>
+          </a:p>
+        </p:txBody>
+      </p:sp>
     </p:spTree>
     <p:extLst>
       <p:ext uri="{BB962C8B-B14F-4D97-AF65-F5344CB8AC3E}">
@@ -41990,6 +46577,30 @@
           </a:p>
         </p:txBody>
       </p:sp>
+      <p:sp>
+        <p:nvSpPr>
+          <p:cNvPr id="7" name="Slide Number Placeholder 6"/>
+          <p:cNvSpPr>
+            <a:spLocks noGrp="1"/>
+          </p:cNvSpPr>
+          <p:nvPr>
+            <p:ph type="sldNum" sz="quarter" idx="12"/>
+          </p:nvPr>
+        </p:nvSpPr>
+        <p:spPr/>
+        <p:txBody>
+          <a:bodyPr/>
+          <a:lstStyle/>
+          <a:p>
+            <a:fld id="{96E69268-9C8B-4EBF-A9EE-DC5DC2D48DC3}" type="slidenum">
+              <a:rPr lang="en-US" smtClean="0"/>
+              <a:pPr/>
+              <a:t>‹#›</a:t>
+            </a:fld>
+            <a:endParaRPr lang="en-US"/>
+          </a:p>
+        </p:txBody>
+      </p:sp>
     </p:spTree>
     <p:extLst>
       <p:ext uri="{BB962C8B-B14F-4D97-AF65-F5344CB8AC3E}">
@@ -42136,6 +46747,30 @@
           </a:p>
         </p:txBody>
       </p:sp>
+      <p:sp>
+        <p:nvSpPr>
+          <p:cNvPr id="6" name="Slide Number Placeholder 5"/>
+          <p:cNvSpPr>
+            <a:spLocks noGrp="1"/>
+          </p:cNvSpPr>
+          <p:nvPr>
+            <p:ph type="sldNum" sz="quarter" idx="12"/>
+          </p:nvPr>
+        </p:nvSpPr>
+        <p:spPr/>
+        <p:txBody>
+          <a:bodyPr/>
+          <a:lstStyle/>
+          <a:p>
+            <a:fld id="{96E69268-9C8B-4EBF-A9EE-DC5DC2D48DC3}" type="slidenum">
+              <a:rPr lang="en-US" smtClean="0"/>
+              <a:pPr/>
+              <a:t>‹#›</a:t>
+            </a:fld>
+            <a:endParaRPr lang="en-US"/>
+          </a:p>
+        </p:txBody>
+      </p:sp>
     </p:spTree>
     <p:extLst>
       <p:ext uri="{BB962C8B-B14F-4D97-AF65-F5344CB8AC3E}">
@@ -42288,6 +46923,30 @@
           <a:bodyPr/>
           <a:lstStyle/>
           <a:p>
+            <a:endParaRPr lang="en-US"/>
+          </a:p>
+        </p:txBody>
+      </p:sp>
+      <p:sp>
+        <p:nvSpPr>
+          <p:cNvPr id="6" name="Slide Number Placeholder 5"/>
+          <p:cNvSpPr>
+            <a:spLocks noGrp="1"/>
+          </p:cNvSpPr>
+          <p:nvPr>
+            <p:ph type="sldNum" sz="quarter" idx="12"/>
+          </p:nvPr>
+        </p:nvSpPr>
+        <p:spPr/>
+        <p:txBody>
+          <a:bodyPr/>
+          <a:lstStyle/>
+          <a:p>
+            <a:fld id="{96E69268-9C8B-4EBF-A9EE-DC5DC2D48DC3}" type="slidenum">
+              <a:rPr lang="en-US" smtClean="0"/>
+              <a:pPr/>
+              <a:t>‹#›</a:t>
+            </a:fld>
             <a:endParaRPr lang="en-US"/>
           </a:p>
         </p:txBody>
@@ -43142,6 +47801,48 @@
           </a:p>
         </p:txBody>
       </p:sp>
+      <p:sp>
+        <p:nvSpPr>
+          <p:cNvPr id="6" name="Slide Number Placeholder 5"/>
+          <p:cNvSpPr>
+            <a:spLocks noGrp="1"/>
+          </p:cNvSpPr>
+          <p:nvPr>
+            <p:ph type="sldNum" sz="quarter" idx="4"/>
+          </p:nvPr>
+        </p:nvSpPr>
+        <p:spPr>
+          <a:xfrm>
+            <a:off x="7099301" y="6356352"/>
+            <a:ext cx="2311400" cy="365125"/>
+          </a:xfrm>
+          <a:prstGeom prst="rect">
+            <a:avLst/>
+          </a:prstGeom>
+        </p:spPr>
+        <p:txBody>
+          <a:bodyPr vert="horz" lIns="0" tIns="60949" rIns="0" bIns="60949" rtlCol="0" anchor="ctr"/>
+          <a:lstStyle>
+            <a:lvl1pPr algn="r">
+              <a:defRPr sz="1300">
+                <a:solidFill>
+                  <a:schemeClr val="tx1">
+                    <a:tint val="75000"/>
+                  </a:schemeClr>
+                </a:solidFill>
+              </a:defRPr>
+            </a:lvl1pPr>
+          </a:lstStyle>
+          <a:p>
+            <a:fld id="{96E69268-9C8B-4EBF-A9EE-DC5DC2D48DC3}" type="slidenum">
+              <a:rPr lang="en-US" smtClean="0"/>
+              <a:pPr/>
+              <a:t>‹#›</a:t>
+            </a:fld>
+            <a:endParaRPr lang="en-US"/>
+          </a:p>
+        </p:txBody>
+      </p:sp>
     </p:spTree>
     <p:extLst>
       <p:ext uri="{BB962C8B-B14F-4D97-AF65-F5344CB8AC3E}">
@@ -43664,6 +48365,48 @@
           </a:p>
         </p:txBody>
       </p:sp>
+      <p:sp>
+        <p:nvSpPr>
+          <p:cNvPr id="6" name="Slide Number Placeholder 5"/>
+          <p:cNvSpPr>
+            <a:spLocks noGrp="1"/>
+          </p:cNvSpPr>
+          <p:nvPr>
+            <p:ph type="sldNum" sz="quarter" idx="4"/>
+          </p:nvPr>
+        </p:nvSpPr>
+        <p:spPr>
+          <a:xfrm>
+            <a:off x="7099301" y="6356352"/>
+            <a:ext cx="2311400" cy="365125"/>
+          </a:xfrm>
+          <a:prstGeom prst="rect">
+            <a:avLst/>
+          </a:prstGeom>
+        </p:spPr>
+        <p:txBody>
+          <a:bodyPr vert="horz" lIns="121899" tIns="60949" rIns="121899" bIns="60949" rtlCol="0" anchor="ctr"/>
+          <a:lstStyle>
+            <a:lvl1pPr algn="r">
+              <a:defRPr sz="1300">
+                <a:solidFill>
+                  <a:schemeClr val="tx1">
+                    <a:tint val="75000"/>
+                  </a:schemeClr>
+                </a:solidFill>
+              </a:defRPr>
+            </a:lvl1pPr>
+          </a:lstStyle>
+          <a:p>
+            <a:fld id="{96E69268-9C8B-4EBF-A9EE-DC5DC2D48DC3}" type="slidenum">
+              <a:rPr lang="en-US" smtClean="0"/>
+              <a:pPr/>
+              <a:t>‹#›</a:t>
+            </a:fld>
+            <a:endParaRPr lang="en-US"/>
+          </a:p>
+        </p:txBody>
+      </p:sp>
     </p:spTree>
     <p:extLst>
       <p:ext uri="{BB962C8B-B14F-4D97-AF65-F5344CB8AC3E}">
@@ -44148,6 +48891,48 @@
             </a:lvl1pPr>
           </a:lstStyle>
           <a:p>
+            <a:endParaRPr lang="en-US"/>
+          </a:p>
+        </p:txBody>
+      </p:sp>
+      <p:sp>
+        <p:nvSpPr>
+          <p:cNvPr id="6" name="Slide Number Placeholder 5"/>
+          <p:cNvSpPr>
+            <a:spLocks noGrp="1"/>
+          </p:cNvSpPr>
+          <p:nvPr>
+            <p:ph type="sldNum" sz="quarter" idx="4"/>
+          </p:nvPr>
+        </p:nvSpPr>
+        <p:spPr>
+          <a:xfrm>
+            <a:off x="7099301" y="6356352"/>
+            <a:ext cx="2311400" cy="365125"/>
+          </a:xfrm>
+          <a:prstGeom prst="rect">
+            <a:avLst/>
+          </a:prstGeom>
+        </p:spPr>
+        <p:txBody>
+          <a:bodyPr vert="horz" lIns="121899" tIns="60949" rIns="121899" bIns="60949" rtlCol="0" anchor="ctr"/>
+          <a:lstStyle>
+            <a:lvl1pPr algn="r">
+              <a:defRPr sz="1300">
+                <a:solidFill>
+                  <a:schemeClr val="tx1">
+                    <a:tint val="75000"/>
+                  </a:schemeClr>
+                </a:solidFill>
+              </a:defRPr>
+            </a:lvl1pPr>
+          </a:lstStyle>
+          <a:p>
+            <a:fld id="{96E69268-9C8B-4EBF-A9EE-DC5DC2D48DC3}" type="slidenum">
+              <a:rPr lang="en-US" smtClean="0"/>
+              <a:pPr/>
+              <a:t>‹#›</a:t>
+            </a:fld>
             <a:endParaRPr lang="en-US"/>
           </a:p>
         </p:txBody>
@@ -44641,6 +49426,48 @@
           </a:p>
         </p:txBody>
       </p:sp>
+      <p:sp>
+        <p:nvSpPr>
+          <p:cNvPr id="6" name="Slide Number Placeholder 5"/>
+          <p:cNvSpPr>
+            <a:spLocks noGrp="1"/>
+          </p:cNvSpPr>
+          <p:nvPr>
+            <p:ph type="sldNum" sz="quarter" idx="4"/>
+          </p:nvPr>
+        </p:nvSpPr>
+        <p:spPr>
+          <a:xfrm>
+            <a:off x="7099301" y="6356352"/>
+            <a:ext cx="2311400" cy="365125"/>
+          </a:xfrm>
+          <a:prstGeom prst="rect">
+            <a:avLst/>
+          </a:prstGeom>
+        </p:spPr>
+        <p:txBody>
+          <a:bodyPr vert="horz" lIns="121899" tIns="60949" rIns="121899" bIns="60949" rtlCol="0" anchor="ctr"/>
+          <a:lstStyle>
+            <a:lvl1pPr algn="r">
+              <a:defRPr sz="1300">
+                <a:solidFill>
+                  <a:schemeClr val="tx1">
+                    <a:tint val="75000"/>
+                  </a:schemeClr>
+                </a:solidFill>
+              </a:defRPr>
+            </a:lvl1pPr>
+          </a:lstStyle>
+          <a:p>
+            <a:fld id="{96E69268-9C8B-4EBF-A9EE-DC5DC2D48DC3}" type="slidenum">
+              <a:rPr lang="en-US" smtClean="0"/>
+              <a:pPr/>
+              <a:t>‹#›</a:t>
+            </a:fld>
+            <a:endParaRPr lang="en-US"/>
+          </a:p>
+        </p:txBody>
+      </p:sp>
     </p:spTree>
     <p:extLst>
       <p:ext uri="{BB962C8B-B14F-4D97-AF65-F5344CB8AC3E}">
@@ -45115,6 +49942,48 @@
           </a:p>
         </p:txBody>
       </p:sp>
+      <p:sp>
+        <p:nvSpPr>
+          <p:cNvPr id="6" name="Slide Number Placeholder 5"/>
+          <p:cNvSpPr>
+            <a:spLocks noGrp="1"/>
+          </p:cNvSpPr>
+          <p:nvPr>
+            <p:ph type="sldNum" sz="quarter" idx="4"/>
+          </p:nvPr>
+        </p:nvSpPr>
+        <p:spPr>
+          <a:xfrm>
+            <a:off x="7099301" y="6356352"/>
+            <a:ext cx="2311400" cy="365125"/>
+          </a:xfrm>
+          <a:prstGeom prst="rect">
+            <a:avLst/>
+          </a:prstGeom>
+        </p:spPr>
+        <p:txBody>
+          <a:bodyPr vert="horz" lIns="0" tIns="60949" rIns="0" bIns="60949" rtlCol="0" anchor="ctr"/>
+          <a:lstStyle>
+            <a:lvl1pPr algn="r">
+              <a:defRPr sz="1300">
+                <a:solidFill>
+                  <a:schemeClr val="tx1">
+                    <a:tint val="75000"/>
+                  </a:schemeClr>
+                </a:solidFill>
+              </a:defRPr>
+            </a:lvl1pPr>
+          </a:lstStyle>
+          <a:p>
+            <a:fld id="{96E69268-9C8B-4EBF-A9EE-DC5DC2D48DC3}" type="slidenum">
+              <a:rPr lang="en-US" smtClean="0"/>
+              <a:pPr/>
+              <a:t>‹#›</a:t>
+            </a:fld>
+            <a:endParaRPr lang="en-US"/>
+          </a:p>
+        </p:txBody>
+      </p:sp>
     </p:spTree>
     <p:extLst>
       <p:ext uri="{BB962C8B-B14F-4D97-AF65-F5344CB8AC3E}">
@@ -45588,6 +50457,48 @@
           </a:p>
         </p:txBody>
       </p:sp>
+      <p:sp>
+        <p:nvSpPr>
+          <p:cNvPr id="6" name="Slide Number Placeholder 5"/>
+          <p:cNvSpPr>
+            <a:spLocks noGrp="1"/>
+          </p:cNvSpPr>
+          <p:nvPr>
+            <p:ph type="sldNum" sz="quarter" idx="4"/>
+          </p:nvPr>
+        </p:nvSpPr>
+        <p:spPr>
+          <a:xfrm>
+            <a:off x="7099301" y="6356352"/>
+            <a:ext cx="2311400" cy="365125"/>
+          </a:xfrm>
+          <a:prstGeom prst="rect">
+            <a:avLst/>
+          </a:prstGeom>
+        </p:spPr>
+        <p:txBody>
+          <a:bodyPr vert="horz" lIns="0" tIns="60949" rIns="0" bIns="60949" rtlCol="0" anchor="ctr"/>
+          <a:lstStyle>
+            <a:lvl1pPr algn="r">
+              <a:defRPr sz="1300">
+                <a:solidFill>
+                  <a:schemeClr val="tx1">
+                    <a:tint val="75000"/>
+                  </a:schemeClr>
+                </a:solidFill>
+              </a:defRPr>
+            </a:lvl1pPr>
+          </a:lstStyle>
+          <a:p>
+            <a:fld id="{96E69268-9C8B-4EBF-A9EE-DC5DC2D48DC3}" type="slidenum">
+              <a:rPr lang="en-US" smtClean="0"/>
+              <a:pPr/>
+              <a:t>‹#›</a:t>
+            </a:fld>
+            <a:endParaRPr lang="en-US"/>
+          </a:p>
+        </p:txBody>
+      </p:sp>
     </p:spTree>
     <p:extLst>
       <p:ext uri="{BB962C8B-B14F-4D97-AF65-F5344CB8AC3E}">
@@ -46061,6 +50972,48 @@
           </a:p>
         </p:txBody>
       </p:sp>
+      <p:sp>
+        <p:nvSpPr>
+          <p:cNvPr id="6" name="Slide Number Placeholder 5"/>
+          <p:cNvSpPr>
+            <a:spLocks noGrp="1"/>
+          </p:cNvSpPr>
+          <p:nvPr>
+            <p:ph type="sldNum" sz="quarter" idx="4"/>
+          </p:nvPr>
+        </p:nvSpPr>
+        <p:spPr>
+          <a:xfrm>
+            <a:off x="7099301" y="6356352"/>
+            <a:ext cx="2311400" cy="365125"/>
+          </a:xfrm>
+          <a:prstGeom prst="rect">
+            <a:avLst/>
+          </a:prstGeom>
+        </p:spPr>
+        <p:txBody>
+          <a:bodyPr vert="horz" lIns="0" tIns="60949" rIns="0" bIns="60949" rtlCol="0" anchor="ctr"/>
+          <a:lstStyle>
+            <a:lvl1pPr algn="r">
+              <a:defRPr sz="1300">
+                <a:solidFill>
+                  <a:schemeClr val="tx1">
+                    <a:tint val="75000"/>
+                  </a:schemeClr>
+                </a:solidFill>
+              </a:defRPr>
+            </a:lvl1pPr>
+          </a:lstStyle>
+          <a:p>
+            <a:fld id="{96E69268-9C8B-4EBF-A9EE-DC5DC2D48DC3}" type="slidenum">
+              <a:rPr lang="en-US" smtClean="0"/>
+              <a:pPr/>
+              <a:t>‹#›</a:t>
+            </a:fld>
+            <a:endParaRPr lang="en-US"/>
+          </a:p>
+        </p:txBody>
+      </p:sp>
     </p:spTree>
     <p:extLst>
       <p:ext uri="{BB962C8B-B14F-4D97-AF65-F5344CB8AC3E}">
@@ -46530,6 +51483,48 @@
             </a:lvl1pPr>
           </a:lstStyle>
           <a:p>
+            <a:endParaRPr lang="en-US"/>
+          </a:p>
+        </p:txBody>
+      </p:sp>
+      <p:sp>
+        <p:nvSpPr>
+          <p:cNvPr id="6" name="Slide Number Placeholder 5"/>
+          <p:cNvSpPr>
+            <a:spLocks noGrp="1"/>
+          </p:cNvSpPr>
+          <p:nvPr>
+            <p:ph type="sldNum" sz="quarter" idx="4"/>
+          </p:nvPr>
+        </p:nvSpPr>
+        <p:spPr>
+          <a:xfrm>
+            <a:off x="7099301" y="6356352"/>
+            <a:ext cx="2311400" cy="365125"/>
+          </a:xfrm>
+          <a:prstGeom prst="rect">
+            <a:avLst/>
+          </a:prstGeom>
+        </p:spPr>
+        <p:txBody>
+          <a:bodyPr vert="horz" lIns="0" tIns="60949" rIns="0" bIns="60949" rtlCol="0" anchor="ctr"/>
+          <a:lstStyle>
+            <a:lvl1pPr algn="r">
+              <a:defRPr sz="1300">
+                <a:solidFill>
+                  <a:schemeClr val="tx1">
+                    <a:tint val="75000"/>
+                  </a:schemeClr>
+                </a:solidFill>
+              </a:defRPr>
+            </a:lvl1pPr>
+          </a:lstStyle>
+          <a:p>
+            <a:fld id="{96E69268-9C8B-4EBF-A9EE-DC5DC2D48DC3}" type="slidenum">
+              <a:rPr lang="en-US" smtClean="0"/>
+              <a:pPr/>
+              <a:t>‹#›</a:t>
+            </a:fld>
             <a:endParaRPr lang="en-US"/>
           </a:p>
         </p:txBody>
@@ -47023,6 +52018,48 @@
           </a:p>
         </p:txBody>
       </p:sp>
+      <p:sp>
+        <p:nvSpPr>
+          <p:cNvPr id="6" name="Slide Number Placeholder 5"/>
+          <p:cNvSpPr>
+            <a:spLocks noGrp="1"/>
+          </p:cNvSpPr>
+          <p:nvPr>
+            <p:ph type="sldNum" sz="quarter" idx="4"/>
+          </p:nvPr>
+        </p:nvSpPr>
+        <p:spPr>
+          <a:xfrm>
+            <a:off x="7099301" y="6356352"/>
+            <a:ext cx="2311400" cy="365125"/>
+          </a:xfrm>
+          <a:prstGeom prst="rect">
+            <a:avLst/>
+          </a:prstGeom>
+        </p:spPr>
+        <p:txBody>
+          <a:bodyPr vert="horz" lIns="121899" tIns="60949" rIns="121899" bIns="60949" rtlCol="0" anchor="ctr"/>
+          <a:lstStyle>
+            <a:lvl1pPr algn="r">
+              <a:defRPr sz="1300">
+                <a:solidFill>
+                  <a:schemeClr val="tx1">
+                    <a:tint val="75000"/>
+                  </a:schemeClr>
+                </a:solidFill>
+              </a:defRPr>
+            </a:lvl1pPr>
+          </a:lstStyle>
+          <a:p>
+            <a:fld id="{96E69268-9C8B-4EBF-A9EE-DC5DC2D48DC3}" type="slidenum">
+              <a:rPr lang="en-US" smtClean="0"/>
+              <a:pPr/>
+              <a:t>‹#›</a:t>
+            </a:fld>
+            <a:endParaRPr lang="en-US"/>
+          </a:p>
+        </p:txBody>
+      </p:sp>
     </p:spTree>
     <p:extLst>
       <p:ext uri="{BB962C8B-B14F-4D97-AF65-F5344CB8AC3E}">
@@ -47497,6 +52534,48 @@
           </a:p>
         </p:txBody>
       </p:sp>
+      <p:sp>
+        <p:nvSpPr>
+          <p:cNvPr id="6" name="Slide Number Placeholder 5"/>
+          <p:cNvSpPr>
+            <a:spLocks noGrp="1"/>
+          </p:cNvSpPr>
+          <p:nvPr>
+            <p:ph type="sldNum" sz="quarter" idx="4"/>
+          </p:nvPr>
+        </p:nvSpPr>
+        <p:spPr>
+          <a:xfrm>
+            <a:off x="7099301" y="6356352"/>
+            <a:ext cx="2311400" cy="365125"/>
+          </a:xfrm>
+          <a:prstGeom prst="rect">
+            <a:avLst/>
+          </a:prstGeom>
+        </p:spPr>
+        <p:txBody>
+          <a:bodyPr vert="horz" lIns="121899" tIns="60949" rIns="121899" bIns="60949" rtlCol="0" anchor="ctr"/>
+          <a:lstStyle>
+            <a:lvl1pPr algn="r">
+              <a:defRPr sz="1300">
+                <a:solidFill>
+                  <a:schemeClr val="tx1">
+                    <a:tint val="75000"/>
+                  </a:schemeClr>
+                </a:solidFill>
+              </a:defRPr>
+            </a:lvl1pPr>
+          </a:lstStyle>
+          <a:p>
+            <a:fld id="{96E69268-9C8B-4EBF-A9EE-DC5DC2D48DC3}" type="slidenum">
+              <a:rPr lang="en-US" smtClean="0"/>
+              <a:pPr/>
+              <a:t>‹#›</a:t>
+            </a:fld>
+            <a:endParaRPr lang="en-US"/>
+          </a:p>
+        </p:txBody>
+      </p:sp>
     </p:spTree>
     <p:extLst>
       <p:ext uri="{BB962C8B-B14F-4D97-AF65-F5344CB8AC3E}">
@@ -47971,6 +53050,48 @@
           </a:p>
         </p:txBody>
       </p:sp>
+      <p:sp>
+        <p:nvSpPr>
+          <p:cNvPr id="6" name="Slide Number Placeholder 5"/>
+          <p:cNvSpPr>
+            <a:spLocks noGrp="1"/>
+          </p:cNvSpPr>
+          <p:nvPr>
+            <p:ph type="sldNum" sz="quarter" idx="4"/>
+          </p:nvPr>
+        </p:nvSpPr>
+        <p:spPr>
+          <a:xfrm>
+            <a:off x="7099301" y="6356352"/>
+            <a:ext cx="2311400" cy="365125"/>
+          </a:xfrm>
+          <a:prstGeom prst="rect">
+            <a:avLst/>
+          </a:prstGeom>
+        </p:spPr>
+        <p:txBody>
+          <a:bodyPr vert="horz" lIns="0" tIns="60949" rIns="0" bIns="60949" rtlCol="0" anchor="ctr"/>
+          <a:lstStyle>
+            <a:lvl1pPr algn="r">
+              <a:defRPr sz="1300">
+                <a:solidFill>
+                  <a:schemeClr val="tx1">
+                    <a:tint val="75000"/>
+                  </a:schemeClr>
+                </a:solidFill>
+              </a:defRPr>
+            </a:lvl1pPr>
+          </a:lstStyle>
+          <a:p>
+            <a:fld id="{96E69268-9C8B-4EBF-A9EE-DC5DC2D48DC3}" type="slidenum">
+              <a:rPr lang="en-US" smtClean="0"/>
+              <a:pPr/>
+              <a:t>‹#›</a:t>
+            </a:fld>
+            <a:endParaRPr lang="en-US"/>
+          </a:p>
+        </p:txBody>
+      </p:sp>
     </p:spTree>
     <p:extLst>
       <p:ext uri="{BB962C8B-B14F-4D97-AF65-F5344CB8AC3E}">
@@ -48444,6 +53565,48 @@
           </a:p>
         </p:txBody>
       </p:sp>
+      <p:sp>
+        <p:nvSpPr>
+          <p:cNvPr id="6" name="Slide Number Placeholder 5"/>
+          <p:cNvSpPr>
+            <a:spLocks noGrp="1"/>
+          </p:cNvSpPr>
+          <p:nvPr>
+            <p:ph type="sldNum" sz="quarter" idx="4"/>
+          </p:nvPr>
+        </p:nvSpPr>
+        <p:spPr>
+          <a:xfrm>
+            <a:off x="7099301" y="6356352"/>
+            <a:ext cx="2311400" cy="365125"/>
+          </a:xfrm>
+          <a:prstGeom prst="rect">
+            <a:avLst/>
+          </a:prstGeom>
+        </p:spPr>
+        <p:txBody>
+          <a:bodyPr vert="horz" lIns="0" tIns="60949" rIns="0" bIns="60949" rtlCol="0" anchor="ctr"/>
+          <a:lstStyle>
+            <a:lvl1pPr algn="r">
+              <a:defRPr sz="1300">
+                <a:solidFill>
+                  <a:schemeClr val="tx1">
+                    <a:tint val="75000"/>
+                  </a:schemeClr>
+                </a:solidFill>
+              </a:defRPr>
+            </a:lvl1pPr>
+          </a:lstStyle>
+          <a:p>
+            <a:fld id="{96E69268-9C8B-4EBF-A9EE-DC5DC2D48DC3}" type="slidenum">
+              <a:rPr lang="en-US" smtClean="0"/>
+              <a:pPr/>
+              <a:t>‹#›</a:t>
+            </a:fld>
+            <a:endParaRPr lang="en-US"/>
+          </a:p>
+        </p:txBody>
+      </p:sp>
     </p:spTree>
     <p:extLst>
       <p:ext uri="{BB962C8B-B14F-4D97-AF65-F5344CB8AC3E}">
@@ -48917,6 +54080,48 @@
           </a:p>
         </p:txBody>
       </p:sp>
+      <p:sp>
+        <p:nvSpPr>
+          <p:cNvPr id="6" name="Slide Number Placeholder 5"/>
+          <p:cNvSpPr>
+            <a:spLocks noGrp="1"/>
+          </p:cNvSpPr>
+          <p:nvPr>
+            <p:ph type="sldNum" sz="quarter" idx="4"/>
+          </p:nvPr>
+        </p:nvSpPr>
+        <p:spPr>
+          <a:xfrm>
+            <a:off x="7099301" y="6356352"/>
+            <a:ext cx="2311400" cy="365125"/>
+          </a:xfrm>
+          <a:prstGeom prst="rect">
+            <a:avLst/>
+          </a:prstGeom>
+        </p:spPr>
+        <p:txBody>
+          <a:bodyPr vert="horz" lIns="0" tIns="60949" rIns="0" bIns="60949" rtlCol="0" anchor="ctr"/>
+          <a:lstStyle>
+            <a:lvl1pPr algn="r">
+              <a:defRPr sz="1300">
+                <a:solidFill>
+                  <a:schemeClr val="tx1">
+                    <a:tint val="75000"/>
+                  </a:schemeClr>
+                </a:solidFill>
+              </a:defRPr>
+            </a:lvl1pPr>
+          </a:lstStyle>
+          <a:p>
+            <a:fld id="{96E69268-9C8B-4EBF-A9EE-DC5DC2D48DC3}" type="slidenum">
+              <a:rPr lang="en-US" smtClean="0"/>
+              <a:pPr/>
+              <a:t>‹#›</a:t>
+            </a:fld>
+            <a:endParaRPr lang="en-US"/>
+          </a:p>
+        </p:txBody>
+      </p:sp>
     </p:spTree>
     <p:extLst>
       <p:ext uri="{BB962C8B-B14F-4D97-AF65-F5344CB8AC3E}">
@@ -49390,6 +54595,48 @@
           </a:p>
         </p:txBody>
       </p:sp>
+      <p:sp>
+        <p:nvSpPr>
+          <p:cNvPr id="6" name="Slide Number Placeholder 5"/>
+          <p:cNvSpPr>
+            <a:spLocks noGrp="1"/>
+          </p:cNvSpPr>
+          <p:nvPr>
+            <p:ph type="sldNum" sz="quarter" idx="4"/>
+          </p:nvPr>
+        </p:nvSpPr>
+        <p:spPr>
+          <a:xfrm>
+            <a:off x="7099301" y="6356352"/>
+            <a:ext cx="2311400" cy="365125"/>
+          </a:xfrm>
+          <a:prstGeom prst="rect">
+            <a:avLst/>
+          </a:prstGeom>
+        </p:spPr>
+        <p:txBody>
+          <a:bodyPr vert="horz" lIns="0" tIns="60949" rIns="0" bIns="60949" rtlCol="0" anchor="ctr"/>
+          <a:lstStyle>
+            <a:lvl1pPr algn="r">
+              <a:defRPr sz="1300">
+                <a:solidFill>
+                  <a:schemeClr val="tx1">
+                    <a:tint val="75000"/>
+                  </a:schemeClr>
+                </a:solidFill>
+              </a:defRPr>
+            </a:lvl1pPr>
+          </a:lstStyle>
+          <a:p>
+            <a:fld id="{96E69268-9C8B-4EBF-A9EE-DC5DC2D48DC3}" type="slidenum">
+              <a:rPr lang="en-US" smtClean="0"/>
+              <a:pPr/>
+              <a:t>‹#›</a:t>
+            </a:fld>
+            <a:endParaRPr lang="en-US"/>
+          </a:p>
+        </p:txBody>
+      </p:sp>
     </p:spTree>
     <p:extLst>
       <p:ext uri="{BB962C8B-B14F-4D97-AF65-F5344CB8AC3E}">
@@ -49726,55 +54973,7 @@
                   <a:schemeClr val="tx1"/>
                 </a:solidFill>
               </a:rPr>
-              <a:t>ユニクロ32店・無印17店、ABCマートは出店余地が大きい</a:t>
-            </a:r>
-            <a:r>
-              <a:rPr kumimoji="1" lang="vi-VN" altLang="ja-JP" sz="2400" dirty="0">
-                <a:solidFill>
-                  <a:schemeClr val="tx1"/>
-                </a:solidFill>
-              </a:rPr>
-              <a:t/>
-            </a:r>
-            <a:r>
-              <a:rPr kumimoji="1" lang="ja-JP" altLang="en-US" sz="2400">
-                <a:solidFill>
-                  <a:schemeClr val="tx1"/>
-                </a:solidFill>
-              </a:rPr>
-              <a:t/>
-            </a:r>
-            <a:r>
-              <a:rPr kumimoji="1" lang="en-US" altLang="ja-JP" sz="2400" dirty="0">
-                <a:solidFill>
-                  <a:schemeClr val="tx1"/>
-                </a:solidFill>
-              </a:rPr>
-              <a:t/>
-            </a:r>
-            <a:r>
-              <a:rPr kumimoji="1" lang="ja-JP" altLang="en-US" sz="2400">
-                <a:solidFill>
-                  <a:schemeClr val="tx1"/>
-                </a:solidFill>
-              </a:rPr>
-              <a:t/>
-            </a:r>
-            <a:r>
-              <a:rPr kumimoji="1" lang="en-US" altLang="ja-JP" sz="2400" dirty="0">
-                <a:solidFill>
-                  <a:schemeClr val="tx1"/>
-                </a:solidFill>
-              </a:rPr>
-              <a:t/>
-            </a:r>
-            <a:r>
-              <a:rPr kumimoji="1" lang="ja-JP" altLang="en-US" sz="2400">
-                <a:solidFill>
-                  <a:schemeClr val="tx1"/>
-                </a:solidFill>
-              </a:rPr>
-              <a:t/>
+              <a:t>ユニクロ32店・無印良品17店に対し、ABCマートは5店</a:t>
             </a:r>
           </a:p>
         </p:txBody>
@@ -49828,16 +55027,8 @@
           <a:lstStyle/>
           <a:p>
             <a:r>
-              <a:rPr kumimoji="1" lang="ja-JP" altLang="en-US" sz="900"/>
-              <a:t>出所：各社公表資料よりInfoBank作成。</a:t>
-            </a:r>
-            <a:r>
-              <a:rPr kumimoji="1" lang="en-US" altLang="ja-JP" sz="900" dirty="0" err="1"/>
-              <a:t/>
-            </a:r>
-            <a:r>
-              <a:rPr kumimoji="1" lang="ja-JP" altLang="en-US" sz="900"/>
-              <a:t/>
+              <a:rPr kumimoji="1" lang="ja-JP" altLang="en-US" sz="1400"/>
+              <a:t>出所：各社公表資料よりInfoBankが作成。ユニクロは2026年7月時点、ABCマートは新店を含む</a:t>
             </a:r>
           </a:p>
         </p:txBody>
@@ -49856,8 +55047,8 @@
         </p:nvSpPr>
         <p:spPr>
           <a:xfrm>
-            <a:off x="8046720" y="1691640"/>
-            <a:ext cx="1280160" cy="349702"/>
+            <a:off x="1928664" y="2194469"/>
+            <a:ext cx="712302" cy="349702"/>
           </a:xfrm>
           <a:prstGeom prst="rect">
             <a:avLst/>
@@ -49877,8 +55068,8 @@
               <a:buSzPct val="100000"/>
             </a:pPr>
             <a:r>
-              <a:rPr kumimoji="1" lang="ja-JP" altLang="en-US" sz="1000" b="1"/>
-              <a:t>単位：店</a:t>
+              <a:rPr kumimoji="1" lang="ja-JP" altLang="en-US" sz="1800" b="1"/>
+              <a:t/>
             </a:r>
             <a:endParaRPr kumimoji="1" lang="vi-VN" altLang="ja-JP" sz="1800" b="1" dirty="0"/>
           </a:p>
@@ -49920,8 +55111,8 @@
         </p:nvSpPr>
         <p:spPr>
           <a:xfrm>
-            <a:off x="548640" y="5908478"/>
-            <a:ext cx="6035040" cy="318924"/>
+            <a:off x="2880182" y="5908478"/>
+            <a:ext cx="3786861" cy="318924"/>
           </a:xfrm>
           <a:prstGeom prst="rect">
             <a:avLst/>
@@ -49941,20 +55132,8 @@
               <a:buSzPct val="100000"/>
             </a:pPr>
             <a:r>
-              <a:rPr kumimoji="1" lang="en-US" altLang="ja-JP" sz="900" dirty="0"/>
-              <a:t>※ユニクロは2026年7月末、無印良品は2025年10月、ABCマートは8月29日開業の新店を含む。</a:t>
-            </a:r>
-            <a:r>
-              <a:rPr kumimoji="1" lang="ja-JP" altLang="en-US" sz="900"/>
-              <a:t/>
-            </a:r>
-            <a:r>
-              <a:rPr kumimoji="1" lang="en-US" altLang="ja-JP" sz="900" dirty="0"/>
-              <a:t/>
-            </a:r>
-            <a:r>
-              <a:rPr kumimoji="1" lang="ja-JP" altLang="en-US" sz="900"/>
-              <a:t/>
+              <a:rPr kumimoji="1" lang="en-US" altLang="ja-JP" sz="1600" dirty="0"/>
+              <a:t>※無印良品は2025年11月時点</a:t>
             </a:r>
             <a:endParaRPr kumimoji="1" lang="ja-JP" altLang="en-US" sz="1600" dirty="0" err="1"/>
           </a:p>
@@ -50004,8 +55183,8 @@
         </p:nvSpPr>
         <p:spPr>
           <a:xfrm>
-            <a:off x="1234440" y="1572768"/>
-            <a:ext cx="7315200" cy="380480"/>
+            <a:off x="422635" y="1567699"/>
+            <a:ext cx="9046689" cy="380480"/>
           </a:xfrm>
           <a:prstGeom prst="rect">
             <a:avLst/>
@@ -50018,7 +55197,7 @@
           </a:bodyPr>
           <a:lstStyle/>
           <a:p>
-            <a:pPr algn="l">
+            <a:pPr algn="ctr">
               <a:spcBef>
                 <a:spcPts val="600"/>
               </a:spcBef>
@@ -50030,93 +55209,8 @@
                   <a:srgbClr val="004CA0"/>
                 </a:solidFill>
               </a:rPr>
-              <a:t>日系専門店チェーンのベトナム店舗数</a:t>
-            </a:r>
-            <a:r>
-              <a:rPr kumimoji="1" lang="vi-VN" altLang="ja-JP" sz="2000" b="1" dirty="0">
-                <a:solidFill>
-                  <a:srgbClr val="004CA0"/>
-                </a:solidFill>
-              </a:rPr>
-              <a:t/>
-            </a:r>
-            <a:r>
-              <a:rPr kumimoji="1" lang="ja-JP" altLang="vi-VN" sz="2000" b="1">
-                <a:solidFill>
-                  <a:srgbClr val="004CA0"/>
-                </a:solidFill>
-              </a:rPr>
-              <a:t/>
-            </a:r>
-            <a:r>
-              <a:rPr kumimoji="1" lang="ja-JP" altLang="en-US" sz="2000" b="1">
-                <a:solidFill>
-                  <a:srgbClr val="004CA0"/>
-                </a:solidFill>
-              </a:rPr>
-              <a:t/>
-            </a:r>
-          </a:p>
-        </p:txBody>
-      </p:sp>
-      <p:sp>
-        <p:nvSpPr>
-          <p:cNvPr id="6" name="角丸四角形 5">
-            <a:extLst>
-              <a:ext uri="{FF2B5EF4-FFF2-40B4-BE49-F238E27FC236}">
-                <a16:creationId xmlns:a16="http://schemas.microsoft.com/office/drawing/2014/main" id="{C3949D65-888F-E44F-E610-6B8EE44959D4}"/>
-              </a:ext>
-            </a:extLst>
-          </p:cNvPr>
-          <p:cNvSpPr/>
-          <p:nvPr/>
-        </p:nvSpPr>
-        <p:spPr bwMode="gray">
-          <a:xfrm>
-            <a:off x="502920" y="1591056"/>
-            <a:ext cx="648071" cy="288925"/>
-          </a:xfrm>
-          <a:prstGeom prst="roundRect">
-            <a:avLst/>
-          </a:prstGeom>
-          <a:solidFill>
-            <a:schemeClr val="tx1">
-              <a:lumMod val="50000"/>
-              <a:lumOff val="50000"/>
-            </a:schemeClr>
-          </a:solidFill>
-          <a:ln w="12700" algn="ctr">
-            <a:noFill/>
-            <a:miter lim="800000"/>
-            <a:headEnd/>
-            <a:tailEnd/>
-          </a:ln>
-        </p:spPr>
-        <p:txBody>
-          <a:bodyPr wrap="square" lIns="88900" tIns="88900" rIns="88900" bIns="88900" rtlCol="0" anchor="ctr"/>
-          <a:lstStyle/>
-          <a:p>
-            <a:pPr algn="ctr">
-              <a:buFont typeface="Wingdings 2" pitchFamily="18" charset="2"/>
-              <a:buNone/>
-            </a:pPr>
-            <a:r>
-              <a:rPr kumimoji="1" lang="ja-JP" altLang="en-US" sz="1400">
-                <a:solidFill>
-                  <a:schemeClr val="bg1"/>
-                </a:solidFill>
-                <a:latin typeface="Meiryo UI" panose="020B0604030504040204" pitchFamily="34" charset="-128"/>
-                <a:ea typeface="Meiryo UI" panose="020B0604030504040204" pitchFamily="34" charset="-128"/>
-              </a:rPr>
-              <a:t>図表</a:t>
-            </a:r>
-            <a:endParaRPr kumimoji="1" lang="ja-JP" altLang="en-US" sz="1400" dirty="0">
-              <a:solidFill>
-                <a:schemeClr val="bg1"/>
-              </a:solidFill>
-              <a:latin typeface="Meiryo UI" panose="020B0604030504040204" pitchFamily="34" charset="-128"/>
-              <a:ea typeface="Meiryo UI" panose="020B0604030504040204" pitchFamily="34" charset="-128"/>
-            </a:endParaRPr>
+              <a:t>日系専門店チェーンのベトナム店舗数（単位：店）</a:t>
+            </a:r>
           </a:p>
         </p:txBody>
       </p:sp>
@@ -50193,63 +55287,7 @@
                   <a:schemeClr val="tx1"/>
                 </a:solidFill>
               </a:rPr>
-              <a:t>韓国317店に対しベトナムは5店、多店舗化はこれから</a:t>
-            </a:r>
-            <a:r>
-              <a:rPr kumimoji="1" lang="ja-JP" altLang="en-US" sz="2400">
-                <a:solidFill>
-                  <a:schemeClr val="tx1"/>
-                </a:solidFill>
-              </a:rPr>
-              <a:t/>
-            </a:r>
-            <a:r>
-              <a:rPr kumimoji="1" lang="vi-VN" altLang="ja-JP" sz="2400" dirty="0">
-                <a:solidFill>
-                  <a:schemeClr val="tx1"/>
-                </a:solidFill>
-              </a:rPr>
-              <a:t/>
-            </a:r>
-            <a:r>
-              <a:rPr kumimoji="1" lang="ja-JP" altLang="en-US" sz="2400">
-                <a:solidFill>
-                  <a:schemeClr val="tx1"/>
-                </a:solidFill>
-              </a:rPr>
-              <a:t/>
-            </a:r>
-            <a:r>
-              <a:rPr kumimoji="1" lang="en-US" altLang="ja-JP" sz="2400" dirty="0">
-                <a:solidFill>
-                  <a:schemeClr val="tx1"/>
-                </a:solidFill>
-              </a:rPr>
-              <a:t/>
-            </a:r>
-            <a:r>
-              <a:rPr kumimoji="1" lang="ja-JP" altLang="en-US" sz="2400">
-                <a:solidFill>
-                  <a:schemeClr val="tx1"/>
-                </a:solidFill>
-              </a:rPr>
-              <a:t/>
-            </a:r>
-            <a:r>
-              <a:rPr kumimoji="1" lang="en-US" altLang="ja-JP" sz="2400" dirty="0">
-                <a:solidFill>
-                  <a:schemeClr val="tx1"/>
-                </a:solidFill>
-              </a:rPr>
-              <a:t/>
-            </a:r>
-            <a:r>
-              <a:rPr kumimoji="1" lang="ja-JP" altLang="en-US" sz="2400">
-                <a:solidFill>
-                  <a:schemeClr val="tx1"/>
-                </a:solidFill>
-              </a:rPr>
-              <a:t/>
+              <a:t>韓国317店に対しベトナムは4店、今回の開業で5店に</a:t>
             </a:r>
           </a:p>
         </p:txBody>
@@ -50298,7 +55336,7 @@
         <p:spPr>
           <a:xfrm>
             <a:off x="567302" y="5272766"/>
-            <a:ext cx="6309360" cy="288925"/>
+            <a:ext cx="9072000" cy="288925"/>
           </a:xfrm>
         </p:spPr>
         <p:txBody>
@@ -50308,20 +55346,8 @@
           <a:lstStyle/>
           <a:p>
             <a:r>
-              <a:rPr kumimoji="1" lang="ja-JP" altLang="en-US" sz="900"/>
-              <a:t>出所：エービーシー・マート決算説明資料よりInfoBank作成。※ベトナムは8月29日開業の新店を含む。</a:t>
-            </a:r>
-            <a:r>
-              <a:rPr lang="ja-JP" altLang="en-US" sz="900"/>
-              <a:t/>
-            </a:r>
-            <a:r>
-              <a:rPr lang="en-US" altLang="ja-JP" sz="900" dirty="0"/>
-              <a:t/>
-            </a:r>
-            <a:r>
-              <a:rPr lang="ja-JP" altLang="en-US" sz="900"/>
-              <a:t/>
+              <a:rPr kumimoji="1" lang="ja-JP" altLang="en-US" sz="1200"/>
+              <a:t>出所：エービーシー・マート「2027年2月期第1四半期決算」よりInfoBankが作成</a:t>
             </a:r>
             <a:endParaRPr kumimoji="1" lang="ja-JP" altLang="en-US" sz="1200"/>
           </a:p>
@@ -50420,12 +55446,8 @@
               <a:buSzPct val="100000"/>
             </a:pPr>
             <a:r>
-              <a:rPr kumimoji="1" lang="ja-JP" altLang="en-US" sz="1000"/>
+              <a:rPr kumimoji="1" lang="ja-JP" altLang="en-US" sz="1600"/>
               <a:t>単位：店</a:t>
-            </a:r>
-            <a:r>
-              <a:rPr kumimoji="1" lang="en-US" altLang="ja-JP" sz="1000" dirty="0"/>
-              <a:t/>
             </a:r>
             <a:endParaRPr kumimoji="1" lang="ja-JP" altLang="en-US" sz="1600" dirty="0" err="1"/>
           </a:p>
@@ -50445,8 +55467,8 @@
         </p:nvSpPr>
         <p:spPr>
           <a:xfrm>
-            <a:off x="1234440" y="1572768"/>
-            <a:ext cx="7498079" cy="380480"/>
+            <a:off x="1954461" y="1608333"/>
+            <a:ext cx="5437954" cy="380480"/>
           </a:xfrm>
           <a:prstGeom prst="rect">
             <a:avLst/>
@@ -50459,7 +55481,7 @@
           </a:bodyPr>
           <a:lstStyle/>
           <a:p>
-            <a:pPr algn="l">
+            <a:pPr>
               <a:spcBef>
                 <a:spcPts val="600"/>
               </a:spcBef>
@@ -50471,97 +55493,12 @@
                   <a:srgbClr val="004CA0"/>
                 </a:solidFill>
               </a:rPr>
-              <a:t>ABCマートの国・地域別店舗数（2026年5月末時点）</a:t>
-            </a:r>
-            <a:r>
-              <a:rPr lang="ja-JP" altLang="en-US" sz="2000" b="1">
-                <a:solidFill>
-                  <a:srgbClr val="004CA0"/>
-                </a:solidFill>
-              </a:rPr>
-              <a:t/>
-            </a:r>
-            <a:r>
-              <a:rPr lang="en-US" altLang="ja-JP" sz="2000" b="1" dirty="0">
-                <a:solidFill>
-                  <a:srgbClr val="004CA0"/>
-                </a:solidFill>
-              </a:rPr>
-              <a:t/>
-            </a:r>
-            <a:r>
-              <a:rPr lang="ja-JP" altLang="en-US" sz="2000" b="1">
-                <a:solidFill>
-                  <a:srgbClr val="004CA0"/>
-                </a:solidFill>
-              </a:rPr>
-              <a:t/>
+              <a:t>ABCマートの海外店舗数（2026年3月末時点）</a:t>
             </a:r>
             <a:endParaRPr kumimoji="1" lang="ja-JP" altLang="en-US" sz="2000" b="1">
               <a:solidFill>
                 <a:srgbClr val="004CA0"/>
               </a:solidFill>
-            </a:endParaRPr>
-          </a:p>
-        </p:txBody>
-      </p:sp>
-      <p:sp>
-        <p:nvSpPr>
-          <p:cNvPr id="6" name="角丸四角形 5">
-            <a:extLst>
-              <a:ext uri="{FF2B5EF4-FFF2-40B4-BE49-F238E27FC236}">
-                <a16:creationId xmlns:a16="http://schemas.microsoft.com/office/drawing/2014/main" id="{C3949D65-888F-E44F-E610-6B8EE44959D4}"/>
-              </a:ext>
-            </a:extLst>
-          </p:cNvPr>
-          <p:cNvSpPr/>
-          <p:nvPr/>
-        </p:nvSpPr>
-        <p:spPr bwMode="gray">
-          <a:xfrm>
-            <a:off x="502920" y="1591056"/>
-            <a:ext cx="648071" cy="288925"/>
-          </a:xfrm>
-          <a:prstGeom prst="roundRect">
-            <a:avLst/>
-          </a:prstGeom>
-          <a:solidFill>
-            <a:schemeClr val="tx1">
-              <a:lumMod val="50000"/>
-              <a:lumOff val="50000"/>
-            </a:schemeClr>
-          </a:solidFill>
-          <a:ln w="12700" algn="ctr">
-            <a:noFill/>
-            <a:miter lim="800000"/>
-            <a:headEnd/>
-            <a:tailEnd/>
-          </a:ln>
-        </p:spPr>
-        <p:txBody>
-          <a:bodyPr wrap="square" lIns="88900" tIns="88900" rIns="88900" bIns="88900" rtlCol="0" anchor="ctr"/>
-          <a:lstStyle/>
-          <a:p>
-            <a:pPr algn="ctr">
-              <a:buFont typeface="Wingdings 2" pitchFamily="18" charset="2"/>
-              <a:buNone/>
-            </a:pPr>
-            <a:r>
-              <a:rPr kumimoji="1" lang="ja-JP" altLang="en-US" sz="1400">
-                <a:solidFill>
-                  <a:schemeClr val="bg1"/>
-                </a:solidFill>
-                <a:latin typeface="Meiryo UI" panose="020B0604030504040204" pitchFamily="34" charset="-128"/>
-                <a:ea typeface="Meiryo UI" panose="020B0604030504040204" pitchFamily="34" charset="-128"/>
-              </a:rPr>
-              <a:t>図表</a:t>
-            </a:r>
-            <a:endParaRPr kumimoji="1" lang="ja-JP" altLang="en-US" sz="1400" dirty="0">
-              <a:solidFill>
-                <a:schemeClr val="bg1"/>
-              </a:solidFill>
-              <a:latin typeface="Meiryo UI" panose="020B0604030504040204" pitchFamily="34" charset="-128"/>
-              <a:ea typeface="Meiryo UI" panose="020B0604030504040204" pitchFamily="34" charset="-128"/>
             </a:endParaRPr>
           </a:p>
         </p:txBody>

--- a/samples/2026-08-18_abcmart/figures.pptx
+++ b/samples/2026-08-18_abcmart/figures.pptx
@@ -55028,7 +55028,7 @@
           <a:p>
             <a:r>
               <a:rPr kumimoji="1" lang="ja-JP" altLang="en-US" sz="1400"/>
-              <a:t>出所：各社公表資料よりInfoBankが作成。ユニクロは2026年7月時点、ABCマートは新店を含む</a:t>
+              <a:t>出所：各社公表資料をもとにInfoBank作成。ユニクロは2026年7月時点、ABCマートは新店を含む</a:t>
             </a:r>
           </a:p>
         </p:txBody>
@@ -55347,7 +55347,7 @@
           <a:p>
             <a:r>
               <a:rPr kumimoji="1" lang="ja-JP" altLang="en-US" sz="1200"/>
-              <a:t>出所：エービーシー・マート「2027年2月期第1四半期決算」よりInfoBankが作成</a:t>
+              <a:t>出所：エービーシー・マート「2027年2月期第1四半期決算」をもとにInfoBank作成</a:t>
             </a:r>
             <a:endParaRPr kumimoji="1" lang="ja-JP" altLang="en-US" sz="1200"/>
           </a:p>

--- a/samples/2026-08-18_abcmart/figures.pptx
+++ b/samples/2026-08-18_abcmart/figures.pptx
@@ -226,6 +226,24 @@
           </c:spPr>
           <c:invertIfNegative val="0"/>
           <c:dLbls>
+            <c:txPr>
+              <a:bodyPr/>
+              <a:lstStyle/>
+              <a:p>
+                <a:pPr>
+                  <a:defRPr sz="1400">
+                    <a:latin typeface="Meiryo UI"/>
+                    <a:ea typeface="Meiryo UI"/>
+                    <a:cs typeface="Meiryo UI"/>
+                  </a:defRPr>
+                </a:pPr>
+                <a:endParaRPr lang="ja-JP">
+                  <a:latin typeface="Meiryo UI"/>
+                  <a:ea typeface="Meiryo UI"/>
+                  <a:cs typeface="Meiryo UI"/>
+                </a:endParaRPr>
+              </a:p>
+            </c:txPr>
             <c:showLegendKey val="0"/>
             <c:showVal val="1"/>
             <c:showCatName val="0"/>
@@ -309,20 +327,21 @@
           <a:effectLst/>
         </c:spPr>
         <c:txPr>
-          <a:bodyPr rot="-60000000" spcFirstLastPara="1" vertOverflow="ellipsis" vert="horz" wrap="square" anchor="ctr" anchorCtr="1"/>
+          <a:bodyPr/>
           <a:lstStyle/>
           <a:p>
             <a:pPr>
-              <a:defRPr sz="2400" b="0" i="0" u="none" strike="noStrike" kern="1200" baseline="0">
-                <a:solidFill>
-                  <a:schemeClr val="tx1"/>
-                </a:solidFill>
-                <a:latin typeface="+mn-lt"/>
-                <a:ea typeface="+mn-ea"/>
-                <a:cs typeface="+mn-cs"/>
+              <a:defRPr sz="1400">
+                <a:latin typeface="Meiryo UI"/>
+                <a:ea typeface="Meiryo UI"/>
+                <a:cs typeface="Meiryo UI"/>
               </a:defRPr>
             </a:pPr>
-            <a:endParaRPr lang="ja-JP"/>
+            <a:endParaRPr lang="ja-JP">
+              <a:latin typeface="Meiryo UI"/>
+              <a:ea typeface="Meiryo UI"/>
+              <a:cs typeface="Meiryo UI"/>
+            </a:endParaRPr>
           </a:p>
         </c:txPr>
         <c:crossAx val="97533248"/>
@@ -330,6 +349,7 @@
         <c:auto val="1"/>
         <c:lblAlgn val="ctr"/>
         <c:lblOffset val="100"/>
+        <c:tickLblSkip val="1"/>
         <c:noMultiLvlLbl val="0"/>
       </c:catAx>
       <c:valAx>
@@ -353,20 +373,21 @@
           <a:effectLst/>
         </c:spPr>
         <c:txPr>
-          <a:bodyPr rot="-60000000" spcFirstLastPara="1" vertOverflow="ellipsis" vert="horz" wrap="square" anchor="ctr" anchorCtr="1"/>
+          <a:bodyPr/>
           <a:lstStyle/>
           <a:p>
             <a:pPr>
-              <a:defRPr sz="2400" b="0" i="0" u="none" strike="noStrike" kern="1200" baseline="0">
-                <a:solidFill>
-                  <a:schemeClr val="tx1"/>
-                </a:solidFill>
-                <a:latin typeface="+mn-lt"/>
-                <a:ea typeface="+mn-ea"/>
-                <a:cs typeface="+mn-cs"/>
+              <a:defRPr sz="1400">
+                <a:latin typeface="Meiryo UI"/>
+                <a:ea typeface="Meiryo UI"/>
+                <a:cs typeface="Meiryo UI"/>
               </a:defRPr>
             </a:pPr>
-            <a:endParaRPr lang="ja-JP"/>
+            <a:endParaRPr lang="ja-JP">
+              <a:latin typeface="Meiryo UI"/>
+              <a:ea typeface="Meiryo UI"/>
+              <a:cs typeface="Meiryo UI"/>
+            </a:endParaRPr>
           </a:p>
         </c:txPr>
         <c:crossAx val="2072058431"/>
@@ -404,9 +425,17 @@
     <a:lstStyle/>
     <a:p>
       <a:pPr>
-        <a:defRPr/>
+        <a:defRPr>
+          <a:latin typeface="Meiryo UI"/>
+          <a:ea typeface="Meiryo UI"/>
+          <a:cs typeface="Meiryo UI"/>
+        </a:defRPr>
       </a:pPr>
-      <a:endParaRPr lang="ja-JP"/>
+      <a:endParaRPr lang="ja-JP">
+        <a:latin typeface="Meiryo UI"/>
+        <a:ea typeface="Meiryo UI"/>
+        <a:cs typeface="Meiryo UI"/>
+      </a:endParaRPr>
     </a:p>
   </c:txPr>
   <c:externalData r:id="rId3">
@@ -461,6 +490,24 @@
           </c:spPr>
           <c:invertIfNegative val="0"/>
           <c:dLbls>
+            <c:txPr>
+              <a:bodyPr/>
+              <a:lstStyle/>
+              <a:p>
+                <a:pPr>
+                  <a:defRPr sz="1400">
+                    <a:latin typeface="Meiryo UI"/>
+                    <a:ea typeface="Meiryo UI"/>
+                    <a:cs typeface="Meiryo UI"/>
+                  </a:defRPr>
+                </a:pPr>
+                <a:endParaRPr lang="ja-JP">
+                  <a:latin typeface="Meiryo UI"/>
+                  <a:ea typeface="Meiryo UI"/>
+                  <a:cs typeface="Meiryo UI"/>
+                </a:endParaRPr>
+              </a:p>
+            </c:txPr>
             <c:showLegendKey val="0"/>
             <c:showVal val="1"/>
             <c:showCatName val="0"/>
@@ -555,20 +602,21 @@
           <a:effectLst/>
         </c:spPr>
         <c:txPr>
-          <a:bodyPr rot="-60000000" spcFirstLastPara="1" vertOverflow="ellipsis" vert="horz" wrap="square" anchor="ctr" anchorCtr="1"/>
+          <a:bodyPr/>
           <a:lstStyle/>
           <a:p>
             <a:pPr>
-              <a:defRPr sz="2400" b="0" i="0" u="none" strike="noStrike" kern="1200" baseline="0">
-                <a:solidFill>
-                  <a:schemeClr val="tx1"/>
-                </a:solidFill>
-                <a:latin typeface="+mn-lt"/>
-                <a:ea typeface="+mn-ea"/>
-                <a:cs typeface="+mn-cs"/>
+              <a:defRPr sz="1400">
+                <a:latin typeface="Meiryo UI"/>
+                <a:ea typeface="Meiryo UI"/>
+                <a:cs typeface="Meiryo UI"/>
               </a:defRPr>
             </a:pPr>
-            <a:endParaRPr lang="ja-JP"/>
+            <a:endParaRPr lang="ja-JP">
+              <a:latin typeface="Meiryo UI"/>
+              <a:ea typeface="Meiryo UI"/>
+              <a:cs typeface="Meiryo UI"/>
+            </a:endParaRPr>
           </a:p>
         </c:txPr>
         <c:crossAx val="97533248"/>
@@ -576,6 +624,7 @@
         <c:auto val="1"/>
         <c:lblAlgn val="ctr"/>
         <c:lblOffset val="100"/>
+        <c:tickLblSkip val="1"/>
         <c:noMultiLvlLbl val="0"/>
       </c:catAx>
       <c:valAx>
@@ -599,20 +648,21 @@
           <a:effectLst/>
         </c:spPr>
         <c:txPr>
-          <a:bodyPr rot="-60000000" spcFirstLastPara="1" vertOverflow="ellipsis" vert="horz" wrap="square" anchor="ctr" anchorCtr="1"/>
+          <a:bodyPr/>
           <a:lstStyle/>
           <a:p>
             <a:pPr>
-              <a:defRPr sz="2400" b="0" i="0" u="none" strike="noStrike" kern="1200" baseline="0">
-                <a:solidFill>
-                  <a:schemeClr val="tx1"/>
-                </a:solidFill>
-                <a:latin typeface="+mn-lt"/>
-                <a:ea typeface="+mn-ea"/>
-                <a:cs typeface="+mn-cs"/>
+              <a:defRPr sz="1400">
+                <a:latin typeface="Meiryo UI"/>
+                <a:ea typeface="Meiryo UI"/>
+                <a:cs typeface="Meiryo UI"/>
               </a:defRPr>
             </a:pPr>
-            <a:endParaRPr lang="ja-JP"/>
+            <a:endParaRPr lang="ja-JP">
+              <a:latin typeface="Meiryo UI"/>
+              <a:ea typeface="Meiryo UI"/>
+              <a:cs typeface="Meiryo UI"/>
+            </a:endParaRPr>
           </a:p>
         </c:txPr>
         <c:crossAx val="2072058431"/>
@@ -650,9 +700,17 @@
     <a:lstStyle/>
     <a:p>
       <a:pPr>
-        <a:defRPr/>
+        <a:defRPr>
+          <a:latin typeface="Meiryo UI"/>
+          <a:ea typeface="Meiryo UI"/>
+          <a:cs typeface="Meiryo UI"/>
+        </a:defRPr>
       </a:pPr>
-      <a:endParaRPr lang="ja-JP"/>
+      <a:endParaRPr lang="ja-JP">
+        <a:latin typeface="Meiryo UI"/>
+        <a:ea typeface="Meiryo UI"/>
+        <a:cs typeface="Meiryo UI"/>
+      </a:endParaRPr>
     </a:p>
   </c:txPr>
   <c:externalData r:id="rId3">
@@ -54972,6 +55030,9 @@
                 <a:solidFill>
                   <a:schemeClr val="tx1"/>
                 </a:solidFill>
+                <a:latin typeface="Meiryo UI"/>
+                <a:ea typeface="Meiryo UI"/>
+                <a:cs typeface="Meiryo UI"/>
               </a:rPr>
               <a:t>ユニクロ32店・無印良品17店に対し、ABCマートは5店</a:t>
             </a:r>
@@ -54999,7 +55060,11 @@
           <a:bodyPr/>
           <a:lstStyle/>
           <a:p>
-            <a:endParaRPr kumimoji="1" lang="ja-JP" altLang="en-US"/>
+            <a:endParaRPr kumimoji="1" lang="ja-JP" altLang="en-US">
+              <a:latin typeface="Meiryo UI"/>
+              <a:ea typeface="Meiryo UI"/>
+              <a:cs typeface="Meiryo UI"/>
+            </a:endParaRPr>
           </a:p>
         </p:txBody>
       </p:sp>
@@ -55027,7 +55092,11 @@
           <a:lstStyle/>
           <a:p>
             <a:r>
-              <a:rPr kumimoji="1" lang="ja-JP" altLang="en-US" sz="1400"/>
+              <a:rPr kumimoji="1" lang="ja-JP" altLang="en-US" sz="1400">
+                <a:latin typeface="Meiryo UI"/>
+                <a:ea typeface="Meiryo UI"/>
+                <a:cs typeface="Meiryo UI"/>
+              </a:rPr>
               <a:t>出所：各社公表資料をもとにInfoBank作成。ユニクロは2026年7月時点、ABCマートは新店を含む</a:t>
             </a:r>
           </a:p>
@@ -55068,10 +55137,18 @@
               <a:buSzPct val="100000"/>
             </a:pPr>
             <a:r>
-              <a:rPr kumimoji="1" lang="ja-JP" altLang="en-US" sz="1800" b="1"/>
+              <a:rPr kumimoji="1" lang="ja-JP" altLang="en-US" sz="1800" b="1">
+                <a:latin typeface="Meiryo UI"/>
+                <a:ea typeface="Meiryo UI"/>
+                <a:cs typeface="Meiryo UI"/>
+              </a:rPr>
               <a:t/>
             </a:r>
-            <a:endParaRPr kumimoji="1" lang="vi-VN" altLang="ja-JP" sz="1800" b="1" dirty="0"/>
+            <a:endParaRPr kumimoji="1" lang="vi-VN" altLang="ja-JP" sz="1800" b="1" dirty="0">
+              <a:latin typeface="Meiryo UI"/>
+              <a:ea typeface="Meiryo UI"/>
+              <a:cs typeface="Meiryo UI"/>
+            </a:endParaRPr>
           </a:p>
         </p:txBody>
       </p:sp>
@@ -55132,10 +55209,18 @@
               <a:buSzPct val="100000"/>
             </a:pPr>
             <a:r>
-              <a:rPr kumimoji="1" lang="en-US" altLang="ja-JP" sz="1600" dirty="0"/>
+              <a:rPr kumimoji="1" lang="en-US" altLang="ja-JP" sz="1600" dirty="0">
+                <a:latin typeface="Meiryo UI"/>
+                <a:ea typeface="Meiryo UI"/>
+                <a:cs typeface="Meiryo UI"/>
+              </a:rPr>
               <a:t>※無印良品は2025年11月時点</a:t>
             </a:r>
-            <a:endParaRPr kumimoji="1" lang="ja-JP" altLang="en-US" sz="1600" dirty="0" err="1"/>
+            <a:endParaRPr kumimoji="1" lang="ja-JP" altLang="en-US" sz="1600" dirty="0" err="1">
+              <a:latin typeface="Meiryo UI"/>
+              <a:ea typeface="Meiryo UI"/>
+              <a:cs typeface="Meiryo UI"/>
+            </a:endParaRPr>
           </a:p>
         </p:txBody>
       </p:sp>
@@ -55208,6 +55293,9 @@
                 <a:solidFill>
                   <a:srgbClr val="004CA0"/>
                 </a:solidFill>
+                <a:latin typeface="Meiryo UI"/>
+                <a:ea typeface="Meiryo UI"/>
+                <a:cs typeface="Meiryo UI"/>
               </a:rPr>
               <a:t>日系専門店チェーンのベトナム店舗数（単位：店）</a:t>
             </a:r>
@@ -55286,6 +55374,9 @@
                 <a:solidFill>
                   <a:schemeClr val="tx1"/>
                 </a:solidFill>
+                <a:latin typeface="Meiryo UI"/>
+                <a:ea typeface="Meiryo UI"/>
+                <a:cs typeface="Meiryo UI"/>
               </a:rPr>
               <a:t>韓国317店に対しベトナムは4店、今回の開業で5店に</a:t>
             </a:r>
@@ -55313,7 +55404,11 @@
           <a:bodyPr/>
           <a:lstStyle/>
           <a:p>
-            <a:endParaRPr kumimoji="1" lang="ja-JP" altLang="en-US"/>
+            <a:endParaRPr kumimoji="1" lang="ja-JP" altLang="en-US">
+              <a:latin typeface="Meiryo UI"/>
+              <a:ea typeface="Meiryo UI"/>
+              <a:cs typeface="Meiryo UI"/>
+            </a:endParaRPr>
           </a:p>
         </p:txBody>
       </p:sp>
@@ -55346,10 +55441,18 @@
           <a:lstStyle/>
           <a:p>
             <a:r>
-              <a:rPr kumimoji="1" lang="ja-JP" altLang="en-US" sz="1200"/>
+              <a:rPr kumimoji="1" lang="ja-JP" altLang="en-US" sz="1200">
+                <a:latin typeface="Meiryo UI"/>
+                <a:ea typeface="Meiryo UI"/>
+                <a:cs typeface="Meiryo UI"/>
+              </a:rPr>
               <a:t>出所：エービーシー・マート「2027年2月期第1四半期決算」をもとにInfoBank作成</a:t>
             </a:r>
-            <a:endParaRPr kumimoji="1" lang="ja-JP" altLang="en-US" sz="1200"/>
+            <a:endParaRPr kumimoji="1" lang="ja-JP" altLang="en-US" sz="1200">
+              <a:latin typeface="Meiryo UI"/>
+              <a:ea typeface="Meiryo UI"/>
+              <a:cs typeface="Meiryo UI"/>
+            </a:endParaRPr>
           </a:p>
         </p:txBody>
       </p:sp>
@@ -55446,10 +55549,18 @@
               <a:buSzPct val="100000"/>
             </a:pPr>
             <a:r>
-              <a:rPr kumimoji="1" lang="ja-JP" altLang="en-US" sz="1600"/>
+              <a:rPr kumimoji="1" lang="ja-JP" altLang="en-US" sz="1600">
+                <a:latin typeface="Meiryo UI"/>
+                <a:ea typeface="Meiryo UI"/>
+                <a:cs typeface="Meiryo UI"/>
+              </a:rPr>
               <a:t>単位：店</a:t>
             </a:r>
-            <a:endParaRPr kumimoji="1" lang="ja-JP" altLang="en-US" sz="1600" dirty="0" err="1"/>
+            <a:endParaRPr kumimoji="1" lang="ja-JP" altLang="en-US" sz="1600" dirty="0" err="1">
+              <a:latin typeface="Meiryo UI"/>
+              <a:ea typeface="Meiryo UI"/>
+              <a:cs typeface="Meiryo UI"/>
+            </a:endParaRPr>
           </a:p>
         </p:txBody>
       </p:sp>
@@ -55492,6 +55603,9 @@
                 <a:solidFill>
                   <a:srgbClr val="004CA0"/>
                 </a:solidFill>
+                <a:latin typeface="Meiryo UI"/>
+                <a:ea typeface="Meiryo UI"/>
+                <a:cs typeface="Meiryo UI"/>
               </a:rPr>
               <a:t>ABCマートの海外店舗数（2026年3月末時点）</a:t>
             </a:r>
@@ -55499,6 +55613,9 @@
               <a:solidFill>
                 <a:srgbClr val="004CA0"/>
               </a:solidFill>
+              <a:latin typeface="Meiryo UI"/>
+              <a:ea typeface="Meiryo UI"/>
+              <a:cs typeface="Meiryo UI"/>
             </a:endParaRPr>
           </a:p>
         </p:txBody>

--- a/samples/2026-08-18_abcmart/figures.pptx
+++ b/samples/2026-08-18_abcmart/figures.pptx
@@ -278,7 +278,7 @@
                   <c:v>32</c:v>
                 </c:pt>
                 <c:pt idx="1">
-                  <c:v>17</c:v>
+                  <c:v>19</c:v>
                 </c:pt>
                 <c:pt idx="2">
                   <c:v>5</c:v>
@@ -55034,7 +55034,7 @@
                 <a:ea typeface="Meiryo UI"/>
                 <a:cs typeface="Meiryo UI"/>
               </a:rPr>
-              <a:t>ユニクロ32店・無印良品17店に対し、ABCマートは5店</a:t>
+              <a:t>ユニクロ32店・無印良品19店に対し、ABCマートは5店</a:t>
             </a:r>
           </a:p>
         </p:txBody>
@@ -55097,7 +55097,7 @@
                 <a:ea typeface="Meiryo UI"/>
                 <a:cs typeface="Meiryo UI"/>
               </a:rPr>
-              <a:t>出所：各社公表資料をもとにInfoBank作成。ユニクロは2026年7月時点、ABCマートは新店を含む</a:t>
+              <a:t>出所：各社公式店舗一覧・公表資料をもとにInfoBank作成。ユニクロは2026年7月時点、ABCマートは新店を含む</a:t>
             </a:r>
           </a:p>
         </p:txBody>
@@ -55214,7 +55214,7 @@
                 <a:ea typeface="Meiryo UI"/>
                 <a:cs typeface="Meiryo UI"/>
               </a:rPr>
-              <a:t>※無印良品は2025年11月時点</a:t>
+              <a:t>※無印良品は2026年8月時点</a:t>
             </a:r>
             <a:endParaRPr kumimoji="1" lang="ja-JP" altLang="en-US" sz="1600" dirty="0" err="1">
               <a:latin typeface="Meiryo UI"/>

--- a/samples/2026-08-18_abcmart/figures.pptx
+++ b/samples/2026-08-18_abcmart/figures.pptx
@@ -25,8 +25,8 @@
     <p:handoutMasterId r:id="rId150"/>
   </p:handoutMasterIdLst>
   <p:sldIdLst>
+    <p:sldId id="1111" r:id="rId130"/>
     <p:sldId id="1118" r:id="rId136"/>
-    <p:sldId id="1111" r:id="rId130"/>
   </p:sldIdLst>
   <p:sldSz cx="9906000" cy="6858000" type="A4"/>
   <p:notesSz cx="6888163" cy="10020300"/>
